--- a/talks/src/class02.pptx
+++ b/talks/src/class02.pptx
@@ -6,10 +6,10 @@
     <p:sldMasterId id="2147483660" r:id="rId2"/>
   </p:sldMasterIdLst>
   <p:notesMasterIdLst>
-    <p:notesMasterId r:id="rId45"/>
+    <p:notesMasterId r:id="rId52"/>
   </p:notesMasterIdLst>
   <p:handoutMasterIdLst>
-    <p:handoutMasterId r:id="rId46"/>
+    <p:handoutMasterId r:id="rId53"/>
   </p:handoutMasterIdLst>
   <p:sldIdLst>
     <p:sldId id="398" r:id="rId3"/>
@@ -36,24 +36,31 @@
     <p:sldId id="405" r:id="rId24"/>
     <p:sldId id="404" r:id="rId25"/>
     <p:sldId id="402" r:id="rId26"/>
-    <p:sldId id="417" r:id="rId27"/>
-    <p:sldId id="407" r:id="rId28"/>
-    <p:sldId id="329" r:id="rId29"/>
-    <p:sldId id="302" r:id="rId30"/>
-    <p:sldId id="350" r:id="rId31"/>
-    <p:sldId id="408" r:id="rId32"/>
-    <p:sldId id="378" r:id="rId33"/>
-    <p:sldId id="374" r:id="rId34"/>
-    <p:sldId id="375" r:id="rId35"/>
-    <p:sldId id="377" r:id="rId36"/>
-    <p:sldId id="381" r:id="rId37"/>
-    <p:sldId id="409" r:id="rId38"/>
-    <p:sldId id="337" r:id="rId39"/>
-    <p:sldId id="410" r:id="rId40"/>
-    <p:sldId id="384" r:id="rId41"/>
-    <p:sldId id="387" r:id="rId42"/>
-    <p:sldId id="385" r:id="rId43"/>
-    <p:sldId id="386" r:id="rId44"/>
+    <p:sldId id="425" r:id="rId27"/>
+    <p:sldId id="417" r:id="rId28"/>
+    <p:sldId id="407" r:id="rId29"/>
+    <p:sldId id="329" r:id="rId30"/>
+    <p:sldId id="302" r:id="rId31"/>
+    <p:sldId id="350" r:id="rId32"/>
+    <p:sldId id="408" r:id="rId33"/>
+    <p:sldId id="378" r:id="rId34"/>
+    <p:sldId id="374" r:id="rId35"/>
+    <p:sldId id="375" r:id="rId36"/>
+    <p:sldId id="377" r:id="rId37"/>
+    <p:sldId id="381" r:id="rId38"/>
+    <p:sldId id="409" r:id="rId39"/>
+    <p:sldId id="337" r:id="rId40"/>
+    <p:sldId id="410" r:id="rId41"/>
+    <p:sldId id="384" r:id="rId42"/>
+    <p:sldId id="387" r:id="rId43"/>
+    <p:sldId id="385" r:id="rId44"/>
+    <p:sldId id="386" r:id="rId45"/>
+    <p:sldId id="418" r:id="rId46"/>
+    <p:sldId id="420" r:id="rId47"/>
+    <p:sldId id="419" r:id="rId48"/>
+    <p:sldId id="422" r:id="rId49"/>
+    <p:sldId id="423" r:id="rId50"/>
+    <p:sldId id="424" r:id="rId51"/>
   </p:sldIdLst>
   <p:sldSz cx="12192000" cy="6858000"/>
   <p:notesSz cx="6858000" cy="9144000"/>
@@ -245,7 +252,7 @@
           <a:p>
             <a:fld id="{56C6788E-680A-49E5-BB93-D456A9D23A29}" type="datetimeFigureOut">
               <a:rPr lang="ru-RU" smtClean="0"/>
-              <a:t>23.10.2025</a:t>
+              <a:t>20.10.2026</a:t>
             </a:fld>
             <a:endParaRPr lang="ru-RU"/>
           </a:p>
@@ -414,7 +421,7 @@
           <a:p>
             <a:fld id="{C4DF4945-C160-4CD5-B124-49B9BE14C0AB}" type="datetimeFigureOut">
               <a:rPr lang="ru-RU" smtClean="0"/>
-              <a:t>23.10.2025</a:t>
+              <a:t>19.10.2026</a:t>
             </a:fld>
             <a:endParaRPr lang="ru-RU"/>
           </a:p>
@@ -2823,6 +2830,142 @@
         <p:cNvPr id="1" name="">
           <a:extLst>
             <a:ext uri="{FF2B5EF4-FFF2-40B4-BE49-F238E27FC236}">
+              <a16:creationId xmlns:a16="http://schemas.microsoft.com/office/drawing/2014/main" id="{BC2E873D-FF9F-5EC8-7871-3F7B2129AD07}"/>
+            </a:ext>
+          </a:extLst>
+        </p:cNvPr>
+        <p:cNvGrpSpPr/>
+        <p:nvPr/>
+      </p:nvGrpSpPr>
+      <p:grpSpPr>
+        <a:xfrm>
+          <a:off x="0" y="0"/>
+          <a:ext cx="0" cy="0"/>
+          <a:chOff x="0" y="0"/>
+          <a:chExt cx="0" cy="0"/>
+        </a:xfrm>
+      </p:grpSpPr>
+      <p:sp>
+        <p:nvSpPr>
+          <p:cNvPr id="2" name="Slide Image Placeholder 1">
+            <a:extLst>
+              <a:ext uri="{FF2B5EF4-FFF2-40B4-BE49-F238E27FC236}">
+                <a16:creationId xmlns:a16="http://schemas.microsoft.com/office/drawing/2014/main" id="{D0BDBDFE-9005-201F-256F-59F43A0BD140}"/>
+              </a:ext>
+            </a:extLst>
+          </p:cNvPr>
+          <p:cNvSpPr>
+            <a:spLocks noGrp="1" noRot="1" noChangeAspect="1"/>
+          </p:cNvSpPr>
+          <p:nvPr>
+            <p:ph type="sldImg"/>
+          </p:nvPr>
+        </p:nvSpPr>
+        <p:spPr/>
+      </p:sp>
+      <p:sp>
+        <p:nvSpPr>
+          <p:cNvPr id="3" name="Notes Placeholder 2">
+            <a:extLst>
+              <a:ext uri="{FF2B5EF4-FFF2-40B4-BE49-F238E27FC236}">
+                <a16:creationId xmlns:a16="http://schemas.microsoft.com/office/drawing/2014/main" id="{4AFD98DE-5EC2-D4F9-336E-BFC2D3D1BA2C}"/>
+              </a:ext>
+            </a:extLst>
+          </p:cNvPr>
+          <p:cNvSpPr>
+            <a:spLocks noGrp="1"/>
+          </p:cNvSpPr>
+          <p:nvPr>
+            <p:ph type="body" idx="1"/>
+          </p:nvPr>
+        </p:nvSpPr>
+        <p:spPr/>
+        <p:txBody>
+          <a:bodyPr/>
+          <a:lstStyle/>
+          <a:p>
+            <a:endParaRPr lang="ru-RU" dirty="0"/>
+          </a:p>
+        </p:txBody>
+      </p:sp>
+      <p:sp>
+        <p:nvSpPr>
+          <p:cNvPr id="4" name="Slide Number Placeholder 3">
+            <a:extLst>
+              <a:ext uri="{FF2B5EF4-FFF2-40B4-BE49-F238E27FC236}">
+                <a16:creationId xmlns:a16="http://schemas.microsoft.com/office/drawing/2014/main" id="{9E5B4654-1518-CCD5-1985-2006F5FD7C7F}"/>
+              </a:ext>
+            </a:extLst>
+          </p:cNvPr>
+          <p:cNvSpPr>
+            <a:spLocks noGrp="1"/>
+          </p:cNvSpPr>
+          <p:nvPr>
+            <p:ph type="sldNum" sz="quarter" idx="10"/>
+          </p:nvPr>
+        </p:nvSpPr>
+        <p:spPr/>
+        <p:txBody>
+          <a:bodyPr/>
+          <a:lstStyle/>
+          <a:p>
+            <a:fld id="{7F33120B-582B-4354-977D-A474A534F6B9}" type="slidenum">
+              <a:rPr lang="ru-RU" smtClean="0"/>
+              <a:t>25</a:t>
+            </a:fld>
+            <a:endParaRPr lang="ru-RU"/>
+          </a:p>
+        </p:txBody>
+      </p:sp>
+      <p:sp>
+        <p:nvSpPr>
+          <p:cNvPr id="5" name="Header Placeholder 4">
+            <a:extLst>
+              <a:ext uri="{FF2B5EF4-FFF2-40B4-BE49-F238E27FC236}">
+                <a16:creationId xmlns:a16="http://schemas.microsoft.com/office/drawing/2014/main" id="{244C112A-E527-6BB4-15F7-7BFAEE85DDA1}"/>
+              </a:ext>
+            </a:extLst>
+          </p:cNvPr>
+          <p:cNvSpPr>
+            <a:spLocks noGrp="1"/>
+          </p:cNvSpPr>
+          <p:nvPr>
+            <p:ph type="hdr" sz="quarter" idx="11"/>
+          </p:nvPr>
+        </p:nvSpPr>
+        <p:spPr/>
+        <p:txBody>
+          <a:bodyPr/>
+          <a:lstStyle/>
+          <a:p>
+            <a:r>
+              <a:rPr lang="ru-RU"/>
+              <a:t>Основы построения файловых систем</a:t>
+            </a:r>
+          </a:p>
+        </p:txBody>
+      </p:sp>
+    </p:spTree>
+    <p:extLst>
+      <p:ext uri="{BB962C8B-B14F-4D97-AF65-F5344CB8AC3E}">
+        <p14:creationId xmlns:p14="http://schemas.microsoft.com/office/powerpoint/2010/main" val="3159199158"/>
+      </p:ext>
+    </p:extLst>
+  </p:cSld>
+  <p:clrMapOvr>
+    <a:masterClrMapping/>
+  </p:clrMapOvr>
+</p:notes>
+</file>
+
+<file path=ppt/notesSlides/notesSlide26.xml><?xml version="1.0" encoding="utf-8"?>
+<p:notes xmlns:a="http://schemas.openxmlformats.org/drawingml/2006/main" xmlns:r="http://schemas.openxmlformats.org/officeDocument/2006/relationships" xmlns:p="http://schemas.openxmlformats.org/presentationml/2006/main">
+  <p:cSld>
+    <p:spTree>
+      <p:nvGrpSpPr>
+        <p:cNvPr id="1" name="">
+          <a:extLst>
+            <a:ext uri="{FF2B5EF4-FFF2-40B4-BE49-F238E27FC236}">
               <a16:creationId xmlns:a16="http://schemas.microsoft.com/office/drawing/2014/main" id="{CEDF4690-BF34-CB57-5383-6C1C3C81BE38}"/>
             </a:ext>
           </a:extLst>
@@ -2904,7 +3047,7 @@
           <a:p>
             <a:fld id="{7F33120B-582B-4354-977D-A474A534F6B9}" type="slidenum">
               <a:rPr lang="ru-RU" smtClean="0"/>
-              <a:t>25</a:t>
+              <a:t>26</a:t>
             </a:fld>
             <a:endParaRPr lang="ru-RU"/>
           </a:p>
@@ -2951,7 +3094,7 @@
 </p:notes>
 </file>
 
-<file path=ppt/notesSlides/notesSlide26.xml><?xml version="1.0" encoding="utf-8"?>
+<file path=ppt/notesSlides/notesSlide27.xml><?xml version="1.0" encoding="utf-8"?>
 <p:notes xmlns:a="http://schemas.openxmlformats.org/drawingml/2006/main" xmlns:r="http://schemas.openxmlformats.org/officeDocument/2006/relationships" xmlns:p="http://schemas.openxmlformats.org/presentationml/2006/main">
   <p:cSld>
     <p:spTree>
@@ -3040,7 +3183,7 @@
           <a:p>
             <a:fld id="{7F33120B-582B-4354-977D-A474A534F6B9}" type="slidenum">
               <a:rPr lang="ru-RU" smtClean="0"/>
-              <a:t>26</a:t>
+              <a:t>27</a:t>
             </a:fld>
             <a:endParaRPr lang="ru-RU"/>
           </a:p>
@@ -3087,7 +3230,7 @@
 </p:notes>
 </file>
 
-<file path=ppt/notesSlides/notesSlide27.xml><?xml version="1.0" encoding="utf-8"?>
+<file path=ppt/notesSlides/notesSlide28.xml><?xml version="1.0" encoding="utf-8"?>
 <p:notes xmlns:a="http://schemas.openxmlformats.org/drawingml/2006/main" xmlns:r="http://schemas.openxmlformats.org/officeDocument/2006/relationships" xmlns:p="http://schemas.openxmlformats.org/presentationml/2006/main">
   <p:cSld>
     <p:spTree>
@@ -3152,7 +3295,7 @@
           <a:p>
             <a:fld id="{7F33120B-582B-4354-977D-A474A534F6B9}" type="slidenum">
               <a:rPr lang="ru-RU" smtClean="0"/>
-              <a:t>27</a:t>
+              <a:t>28</a:t>
             </a:fld>
             <a:endParaRPr lang="ru-RU"/>
           </a:p>
@@ -3184,112 +3327,6 @@
     <p:extLst>
       <p:ext uri="{BB962C8B-B14F-4D97-AF65-F5344CB8AC3E}">
         <p14:creationId xmlns:p14="http://schemas.microsoft.com/office/powerpoint/2010/main" val="938715785"/>
-      </p:ext>
-    </p:extLst>
-  </p:cSld>
-  <p:clrMapOvr>
-    <a:masterClrMapping/>
-  </p:clrMapOvr>
-</p:notes>
-</file>
-
-<file path=ppt/notesSlides/notesSlide28.xml><?xml version="1.0" encoding="utf-8"?>
-<p:notes xmlns:a="http://schemas.openxmlformats.org/drawingml/2006/main" xmlns:r="http://schemas.openxmlformats.org/officeDocument/2006/relationships" xmlns:p="http://schemas.openxmlformats.org/presentationml/2006/main">
-  <p:cSld>
-    <p:spTree>
-      <p:nvGrpSpPr>
-        <p:cNvPr id="1" name=""/>
-        <p:cNvGrpSpPr/>
-        <p:nvPr/>
-      </p:nvGrpSpPr>
-      <p:grpSpPr>
-        <a:xfrm>
-          <a:off x="0" y="0"/>
-          <a:ext cx="0" cy="0"/>
-          <a:chOff x="0" y="0"/>
-          <a:chExt cx="0" cy="0"/>
-        </a:xfrm>
-      </p:grpSpPr>
-      <p:sp>
-        <p:nvSpPr>
-          <p:cNvPr id="2" name="Slide Image Placeholder 1"/>
-          <p:cNvSpPr>
-            <a:spLocks noGrp="1" noRot="1" noChangeAspect="1"/>
-          </p:cNvSpPr>
-          <p:nvPr>
-            <p:ph type="sldImg"/>
-          </p:nvPr>
-        </p:nvSpPr>
-        <p:spPr/>
-      </p:sp>
-      <p:sp>
-        <p:nvSpPr>
-          <p:cNvPr id="3" name="Notes Placeholder 2"/>
-          <p:cNvSpPr>
-            <a:spLocks noGrp="1"/>
-          </p:cNvSpPr>
-          <p:nvPr>
-            <p:ph type="body" idx="1"/>
-          </p:nvPr>
-        </p:nvSpPr>
-        <p:spPr/>
-        <p:txBody>
-          <a:bodyPr/>
-          <a:lstStyle/>
-          <a:p>
-            <a:endParaRPr lang="ru-RU"/>
-          </a:p>
-        </p:txBody>
-      </p:sp>
-      <p:sp>
-        <p:nvSpPr>
-          <p:cNvPr id="4" name="Slide Number Placeholder 3"/>
-          <p:cNvSpPr>
-            <a:spLocks noGrp="1"/>
-          </p:cNvSpPr>
-          <p:nvPr>
-            <p:ph type="sldNum" sz="quarter" idx="10"/>
-          </p:nvPr>
-        </p:nvSpPr>
-        <p:spPr/>
-        <p:txBody>
-          <a:bodyPr/>
-          <a:lstStyle/>
-          <a:p>
-            <a:fld id="{7F33120B-582B-4354-977D-A474A534F6B9}" type="slidenum">
-              <a:rPr lang="ru-RU" smtClean="0"/>
-              <a:t>28</a:t>
-            </a:fld>
-            <a:endParaRPr lang="ru-RU"/>
-          </a:p>
-        </p:txBody>
-      </p:sp>
-      <p:sp>
-        <p:nvSpPr>
-          <p:cNvPr id="5" name="Header Placeholder 4"/>
-          <p:cNvSpPr>
-            <a:spLocks noGrp="1"/>
-          </p:cNvSpPr>
-          <p:nvPr>
-            <p:ph type="hdr" sz="quarter" idx="11"/>
-          </p:nvPr>
-        </p:nvSpPr>
-        <p:spPr/>
-        <p:txBody>
-          <a:bodyPr/>
-          <a:lstStyle/>
-          <a:p>
-            <a:r>
-              <a:rPr lang="ru-RU"/>
-              <a:t>Основы построения файловых систем</a:t>
-            </a:r>
-          </a:p>
-        </p:txBody>
-      </p:sp>
-    </p:spTree>
-    <p:extLst>
-      <p:ext uri="{BB962C8B-B14F-4D97-AF65-F5344CB8AC3E}">
-        <p14:creationId xmlns:p14="http://schemas.microsoft.com/office/powerpoint/2010/main" val="4279028054"/>
       </p:ext>
     </p:extLst>
   </p:cSld>
@@ -3395,7 +3432,7 @@
     </p:spTree>
     <p:extLst>
       <p:ext uri="{BB962C8B-B14F-4D97-AF65-F5344CB8AC3E}">
-        <p14:creationId xmlns:p14="http://schemas.microsoft.com/office/powerpoint/2010/main" val="1833144585"/>
+        <p14:creationId xmlns:p14="http://schemas.microsoft.com/office/powerpoint/2010/main" val="4279028054"/>
       </p:ext>
     </p:extLst>
   </p:cSld>
@@ -3516,6 +3553,112 @@
   <p:cSld>
     <p:spTree>
       <p:nvGrpSpPr>
+        <p:cNvPr id="1" name=""/>
+        <p:cNvGrpSpPr/>
+        <p:nvPr/>
+      </p:nvGrpSpPr>
+      <p:grpSpPr>
+        <a:xfrm>
+          <a:off x="0" y="0"/>
+          <a:ext cx="0" cy="0"/>
+          <a:chOff x="0" y="0"/>
+          <a:chExt cx="0" cy="0"/>
+        </a:xfrm>
+      </p:grpSpPr>
+      <p:sp>
+        <p:nvSpPr>
+          <p:cNvPr id="2" name="Slide Image Placeholder 1"/>
+          <p:cNvSpPr>
+            <a:spLocks noGrp="1" noRot="1" noChangeAspect="1"/>
+          </p:cNvSpPr>
+          <p:nvPr>
+            <p:ph type="sldImg"/>
+          </p:nvPr>
+        </p:nvSpPr>
+        <p:spPr/>
+      </p:sp>
+      <p:sp>
+        <p:nvSpPr>
+          <p:cNvPr id="3" name="Notes Placeholder 2"/>
+          <p:cNvSpPr>
+            <a:spLocks noGrp="1"/>
+          </p:cNvSpPr>
+          <p:nvPr>
+            <p:ph type="body" idx="1"/>
+          </p:nvPr>
+        </p:nvSpPr>
+        <p:spPr/>
+        <p:txBody>
+          <a:bodyPr/>
+          <a:lstStyle/>
+          <a:p>
+            <a:endParaRPr lang="ru-RU"/>
+          </a:p>
+        </p:txBody>
+      </p:sp>
+      <p:sp>
+        <p:nvSpPr>
+          <p:cNvPr id="4" name="Slide Number Placeholder 3"/>
+          <p:cNvSpPr>
+            <a:spLocks noGrp="1"/>
+          </p:cNvSpPr>
+          <p:nvPr>
+            <p:ph type="sldNum" sz="quarter" idx="10"/>
+          </p:nvPr>
+        </p:nvSpPr>
+        <p:spPr/>
+        <p:txBody>
+          <a:bodyPr/>
+          <a:lstStyle/>
+          <a:p>
+            <a:fld id="{7F33120B-582B-4354-977D-A474A534F6B9}" type="slidenum">
+              <a:rPr lang="ru-RU" smtClean="0"/>
+              <a:t>30</a:t>
+            </a:fld>
+            <a:endParaRPr lang="ru-RU"/>
+          </a:p>
+        </p:txBody>
+      </p:sp>
+      <p:sp>
+        <p:nvSpPr>
+          <p:cNvPr id="5" name="Header Placeholder 4"/>
+          <p:cNvSpPr>
+            <a:spLocks noGrp="1"/>
+          </p:cNvSpPr>
+          <p:nvPr>
+            <p:ph type="hdr" sz="quarter" idx="11"/>
+          </p:nvPr>
+        </p:nvSpPr>
+        <p:spPr/>
+        <p:txBody>
+          <a:bodyPr/>
+          <a:lstStyle/>
+          <a:p>
+            <a:r>
+              <a:rPr lang="ru-RU"/>
+              <a:t>Основы построения файловых систем</a:t>
+            </a:r>
+          </a:p>
+        </p:txBody>
+      </p:sp>
+    </p:spTree>
+    <p:extLst>
+      <p:ext uri="{BB962C8B-B14F-4D97-AF65-F5344CB8AC3E}">
+        <p14:creationId xmlns:p14="http://schemas.microsoft.com/office/powerpoint/2010/main" val="1833144585"/>
+      </p:ext>
+    </p:extLst>
+  </p:cSld>
+  <p:clrMapOvr>
+    <a:masterClrMapping/>
+  </p:clrMapOvr>
+</p:notes>
+</file>
+
+<file path=ppt/notesSlides/notesSlide31.xml><?xml version="1.0" encoding="utf-8"?>
+<p:notes xmlns:a="http://schemas.openxmlformats.org/drawingml/2006/main" xmlns:r="http://schemas.openxmlformats.org/officeDocument/2006/relationships" xmlns:p="http://schemas.openxmlformats.org/presentationml/2006/main">
+  <p:cSld>
+    <p:spTree>
+      <p:nvGrpSpPr>
         <p:cNvPr id="1" name="">
           <a:extLst>
             <a:ext uri="{FF2B5EF4-FFF2-40B4-BE49-F238E27FC236}">
@@ -3600,7 +3743,7 @@
           <a:p>
             <a:fld id="{7F33120B-582B-4354-977D-A474A534F6B9}" type="slidenum">
               <a:rPr lang="ru-RU" smtClean="0"/>
-              <a:t>30</a:t>
+              <a:t>31</a:t>
             </a:fld>
             <a:endParaRPr lang="ru-RU"/>
           </a:p>
@@ -3638,112 +3781,6 @@
     <p:extLst>
       <p:ext uri="{BB962C8B-B14F-4D97-AF65-F5344CB8AC3E}">
         <p14:creationId xmlns:p14="http://schemas.microsoft.com/office/powerpoint/2010/main" val="2092188002"/>
-      </p:ext>
-    </p:extLst>
-  </p:cSld>
-  <p:clrMapOvr>
-    <a:masterClrMapping/>
-  </p:clrMapOvr>
-</p:notes>
-</file>
-
-<file path=ppt/notesSlides/notesSlide31.xml><?xml version="1.0" encoding="utf-8"?>
-<p:notes xmlns:a="http://schemas.openxmlformats.org/drawingml/2006/main" xmlns:r="http://schemas.openxmlformats.org/officeDocument/2006/relationships" xmlns:p="http://schemas.openxmlformats.org/presentationml/2006/main">
-  <p:cSld>
-    <p:spTree>
-      <p:nvGrpSpPr>
-        <p:cNvPr id="1" name=""/>
-        <p:cNvGrpSpPr/>
-        <p:nvPr/>
-      </p:nvGrpSpPr>
-      <p:grpSpPr>
-        <a:xfrm>
-          <a:off x="0" y="0"/>
-          <a:ext cx="0" cy="0"/>
-          <a:chOff x="0" y="0"/>
-          <a:chExt cx="0" cy="0"/>
-        </a:xfrm>
-      </p:grpSpPr>
-      <p:sp>
-        <p:nvSpPr>
-          <p:cNvPr id="2" name="Slide Image Placeholder 1"/>
-          <p:cNvSpPr>
-            <a:spLocks noGrp="1" noRot="1" noChangeAspect="1"/>
-          </p:cNvSpPr>
-          <p:nvPr>
-            <p:ph type="sldImg"/>
-          </p:nvPr>
-        </p:nvSpPr>
-        <p:spPr/>
-      </p:sp>
-      <p:sp>
-        <p:nvSpPr>
-          <p:cNvPr id="3" name="Notes Placeholder 2"/>
-          <p:cNvSpPr>
-            <a:spLocks noGrp="1"/>
-          </p:cNvSpPr>
-          <p:nvPr>
-            <p:ph type="body" idx="1"/>
-          </p:nvPr>
-        </p:nvSpPr>
-        <p:spPr/>
-        <p:txBody>
-          <a:bodyPr/>
-          <a:lstStyle/>
-          <a:p>
-            <a:endParaRPr lang="ru-RU"/>
-          </a:p>
-        </p:txBody>
-      </p:sp>
-      <p:sp>
-        <p:nvSpPr>
-          <p:cNvPr id="4" name="Slide Number Placeholder 3"/>
-          <p:cNvSpPr>
-            <a:spLocks noGrp="1"/>
-          </p:cNvSpPr>
-          <p:nvPr>
-            <p:ph type="sldNum" sz="quarter" idx="10"/>
-          </p:nvPr>
-        </p:nvSpPr>
-        <p:spPr/>
-        <p:txBody>
-          <a:bodyPr/>
-          <a:lstStyle/>
-          <a:p>
-            <a:fld id="{7F33120B-582B-4354-977D-A474A534F6B9}" type="slidenum">
-              <a:rPr lang="ru-RU" smtClean="0"/>
-              <a:t>31</a:t>
-            </a:fld>
-            <a:endParaRPr lang="ru-RU"/>
-          </a:p>
-        </p:txBody>
-      </p:sp>
-      <p:sp>
-        <p:nvSpPr>
-          <p:cNvPr id="5" name="Header Placeholder 4"/>
-          <p:cNvSpPr>
-            <a:spLocks noGrp="1"/>
-          </p:cNvSpPr>
-          <p:nvPr>
-            <p:ph type="hdr" sz="quarter" idx="11"/>
-          </p:nvPr>
-        </p:nvSpPr>
-        <p:spPr/>
-        <p:txBody>
-          <a:bodyPr/>
-          <a:lstStyle/>
-          <a:p>
-            <a:r>
-              <a:rPr lang="ru-RU"/>
-              <a:t>Основы построения файловых систем</a:t>
-            </a:r>
-          </a:p>
-        </p:txBody>
-      </p:sp>
-    </p:spTree>
-    <p:extLst>
-      <p:ext uri="{BB962C8B-B14F-4D97-AF65-F5344CB8AC3E}">
-        <p14:creationId xmlns:p14="http://schemas.microsoft.com/office/powerpoint/2010/main" val="1239992121"/>
       </p:ext>
     </p:extLst>
   </p:cSld>
@@ -3849,7 +3886,7 @@
     </p:spTree>
     <p:extLst>
       <p:ext uri="{BB962C8B-B14F-4D97-AF65-F5344CB8AC3E}">
-        <p14:creationId xmlns:p14="http://schemas.microsoft.com/office/powerpoint/2010/main" val="4075224564"/>
+        <p14:creationId xmlns:p14="http://schemas.microsoft.com/office/powerpoint/2010/main" val="1239992121"/>
       </p:ext>
     </p:extLst>
   </p:cSld>
@@ -3955,7 +3992,7 @@
     </p:spTree>
     <p:extLst>
       <p:ext uri="{BB962C8B-B14F-4D97-AF65-F5344CB8AC3E}">
-        <p14:creationId xmlns:p14="http://schemas.microsoft.com/office/powerpoint/2010/main" val="1626932421"/>
+        <p14:creationId xmlns:p14="http://schemas.microsoft.com/office/powerpoint/2010/main" val="4075224564"/>
       </p:ext>
     </p:extLst>
   </p:cSld>
@@ -4061,7 +4098,7 @@
     </p:spTree>
     <p:extLst>
       <p:ext uri="{BB962C8B-B14F-4D97-AF65-F5344CB8AC3E}">
-        <p14:creationId xmlns:p14="http://schemas.microsoft.com/office/powerpoint/2010/main" val="639422980"/>
+        <p14:creationId xmlns:p14="http://schemas.microsoft.com/office/powerpoint/2010/main" val="1626932421"/>
       </p:ext>
     </p:extLst>
   </p:cSld>
@@ -4167,6 +4204,112 @@
     </p:spTree>
     <p:extLst>
       <p:ext uri="{BB962C8B-B14F-4D97-AF65-F5344CB8AC3E}">
+        <p14:creationId xmlns:p14="http://schemas.microsoft.com/office/powerpoint/2010/main" val="639422980"/>
+      </p:ext>
+    </p:extLst>
+  </p:cSld>
+  <p:clrMapOvr>
+    <a:masterClrMapping/>
+  </p:clrMapOvr>
+</p:notes>
+</file>
+
+<file path=ppt/notesSlides/notesSlide36.xml><?xml version="1.0" encoding="utf-8"?>
+<p:notes xmlns:a="http://schemas.openxmlformats.org/drawingml/2006/main" xmlns:r="http://schemas.openxmlformats.org/officeDocument/2006/relationships" xmlns:p="http://schemas.openxmlformats.org/presentationml/2006/main">
+  <p:cSld>
+    <p:spTree>
+      <p:nvGrpSpPr>
+        <p:cNvPr id="1" name=""/>
+        <p:cNvGrpSpPr/>
+        <p:nvPr/>
+      </p:nvGrpSpPr>
+      <p:grpSpPr>
+        <a:xfrm>
+          <a:off x="0" y="0"/>
+          <a:ext cx="0" cy="0"/>
+          <a:chOff x="0" y="0"/>
+          <a:chExt cx="0" cy="0"/>
+        </a:xfrm>
+      </p:grpSpPr>
+      <p:sp>
+        <p:nvSpPr>
+          <p:cNvPr id="2" name="Slide Image Placeholder 1"/>
+          <p:cNvSpPr>
+            <a:spLocks noGrp="1" noRot="1" noChangeAspect="1"/>
+          </p:cNvSpPr>
+          <p:nvPr>
+            <p:ph type="sldImg"/>
+          </p:nvPr>
+        </p:nvSpPr>
+        <p:spPr/>
+      </p:sp>
+      <p:sp>
+        <p:nvSpPr>
+          <p:cNvPr id="3" name="Notes Placeholder 2"/>
+          <p:cNvSpPr>
+            <a:spLocks noGrp="1"/>
+          </p:cNvSpPr>
+          <p:nvPr>
+            <p:ph type="body" idx="1"/>
+          </p:nvPr>
+        </p:nvSpPr>
+        <p:spPr/>
+        <p:txBody>
+          <a:bodyPr/>
+          <a:lstStyle/>
+          <a:p>
+            <a:endParaRPr lang="ru-RU"/>
+          </a:p>
+        </p:txBody>
+      </p:sp>
+      <p:sp>
+        <p:nvSpPr>
+          <p:cNvPr id="4" name="Slide Number Placeholder 3"/>
+          <p:cNvSpPr>
+            <a:spLocks noGrp="1"/>
+          </p:cNvSpPr>
+          <p:nvPr>
+            <p:ph type="sldNum" sz="quarter" idx="10"/>
+          </p:nvPr>
+        </p:nvSpPr>
+        <p:spPr/>
+        <p:txBody>
+          <a:bodyPr/>
+          <a:lstStyle/>
+          <a:p>
+            <a:fld id="{7F33120B-582B-4354-977D-A474A534F6B9}" type="slidenum">
+              <a:rPr lang="ru-RU" smtClean="0"/>
+              <a:t>36</a:t>
+            </a:fld>
+            <a:endParaRPr lang="ru-RU"/>
+          </a:p>
+        </p:txBody>
+      </p:sp>
+      <p:sp>
+        <p:nvSpPr>
+          <p:cNvPr id="5" name="Header Placeholder 4"/>
+          <p:cNvSpPr>
+            <a:spLocks noGrp="1"/>
+          </p:cNvSpPr>
+          <p:nvPr>
+            <p:ph type="hdr" sz="quarter" idx="11"/>
+          </p:nvPr>
+        </p:nvSpPr>
+        <p:spPr/>
+        <p:txBody>
+          <a:bodyPr/>
+          <a:lstStyle/>
+          <a:p>
+            <a:r>
+              <a:rPr lang="ru-RU"/>
+              <a:t>Основы построения файловых систем</a:t>
+            </a:r>
+          </a:p>
+        </p:txBody>
+      </p:sp>
+    </p:spTree>
+    <p:extLst>
+      <p:ext uri="{BB962C8B-B14F-4D97-AF65-F5344CB8AC3E}">
         <p14:creationId xmlns:p14="http://schemas.microsoft.com/office/powerpoint/2010/main" val="180795610"/>
       </p:ext>
     </p:extLst>
@@ -4177,7 +4320,7 @@
 </p:notes>
 </file>
 
-<file path=ppt/notesSlides/notesSlide36.xml><?xml version="1.0" encoding="utf-8"?>
+<file path=ppt/notesSlides/notesSlide37.xml><?xml version="1.0" encoding="utf-8"?>
 <p:notes xmlns:a="http://schemas.openxmlformats.org/drawingml/2006/main" xmlns:r="http://schemas.openxmlformats.org/officeDocument/2006/relationships" xmlns:p="http://schemas.openxmlformats.org/presentationml/2006/main">
   <p:cSld>
     <p:spTree>
@@ -4266,7 +4409,7 @@
           <a:p>
             <a:fld id="{7F33120B-582B-4354-977D-A474A534F6B9}" type="slidenum">
               <a:rPr lang="ru-RU" smtClean="0"/>
-              <a:t>36</a:t>
+              <a:t>37</a:t>
             </a:fld>
             <a:endParaRPr lang="ru-RU"/>
           </a:p>
@@ -4313,7 +4456,7 @@
 </p:notes>
 </file>
 
-<file path=ppt/notesSlides/notesSlide37.xml><?xml version="1.0" encoding="utf-8"?>
+<file path=ppt/notesSlides/notesSlide38.xml><?xml version="1.0" encoding="utf-8"?>
 <p:notes xmlns:a="http://schemas.openxmlformats.org/drawingml/2006/main" xmlns:r="http://schemas.openxmlformats.org/officeDocument/2006/relationships" xmlns:p="http://schemas.openxmlformats.org/presentationml/2006/main">
   <p:cSld>
     <p:spTree>
@@ -4378,7 +4521,7 @@
           <a:p>
             <a:fld id="{7F33120B-582B-4354-977D-A474A534F6B9}" type="slidenum">
               <a:rPr lang="ru-RU" smtClean="0"/>
-              <a:t>37</a:t>
+              <a:t>38</a:t>
             </a:fld>
             <a:endParaRPr lang="ru-RU"/>
           </a:p>
@@ -4419,7 +4562,7 @@
 </p:notes>
 </file>
 
-<file path=ppt/notesSlides/notesSlide38.xml><?xml version="1.0" encoding="utf-8"?>
+<file path=ppt/notesSlides/notesSlide39.xml><?xml version="1.0" encoding="utf-8"?>
 <p:notes xmlns:a="http://schemas.openxmlformats.org/drawingml/2006/main" xmlns:r="http://schemas.openxmlformats.org/officeDocument/2006/relationships" xmlns:p="http://schemas.openxmlformats.org/presentationml/2006/main">
   <p:cSld>
     <p:spTree>
@@ -4508,7 +4651,7 @@
           <a:p>
             <a:fld id="{7F33120B-582B-4354-977D-A474A534F6B9}" type="slidenum">
               <a:rPr lang="ru-RU" smtClean="0"/>
-              <a:t>38</a:t>
+              <a:t>39</a:t>
             </a:fld>
             <a:endParaRPr lang="ru-RU"/>
           </a:p>
@@ -4546,112 +4689,6 @@
     <p:extLst>
       <p:ext uri="{BB962C8B-B14F-4D97-AF65-F5344CB8AC3E}">
         <p14:creationId xmlns:p14="http://schemas.microsoft.com/office/powerpoint/2010/main" val="959136079"/>
-      </p:ext>
-    </p:extLst>
-  </p:cSld>
-  <p:clrMapOvr>
-    <a:masterClrMapping/>
-  </p:clrMapOvr>
-</p:notes>
-</file>
-
-<file path=ppt/notesSlides/notesSlide39.xml><?xml version="1.0" encoding="utf-8"?>
-<p:notes xmlns:a="http://schemas.openxmlformats.org/drawingml/2006/main" xmlns:r="http://schemas.openxmlformats.org/officeDocument/2006/relationships" xmlns:p="http://schemas.openxmlformats.org/presentationml/2006/main">
-  <p:cSld>
-    <p:spTree>
-      <p:nvGrpSpPr>
-        <p:cNvPr id="1" name=""/>
-        <p:cNvGrpSpPr/>
-        <p:nvPr/>
-      </p:nvGrpSpPr>
-      <p:grpSpPr>
-        <a:xfrm>
-          <a:off x="0" y="0"/>
-          <a:ext cx="0" cy="0"/>
-          <a:chOff x="0" y="0"/>
-          <a:chExt cx="0" cy="0"/>
-        </a:xfrm>
-      </p:grpSpPr>
-      <p:sp>
-        <p:nvSpPr>
-          <p:cNvPr id="2" name="Slide Image Placeholder 1"/>
-          <p:cNvSpPr>
-            <a:spLocks noGrp="1" noRot="1" noChangeAspect="1"/>
-          </p:cNvSpPr>
-          <p:nvPr>
-            <p:ph type="sldImg"/>
-          </p:nvPr>
-        </p:nvSpPr>
-        <p:spPr/>
-      </p:sp>
-      <p:sp>
-        <p:nvSpPr>
-          <p:cNvPr id="3" name="Notes Placeholder 2"/>
-          <p:cNvSpPr>
-            <a:spLocks noGrp="1"/>
-          </p:cNvSpPr>
-          <p:nvPr>
-            <p:ph type="body" idx="1"/>
-          </p:nvPr>
-        </p:nvSpPr>
-        <p:spPr/>
-        <p:txBody>
-          <a:bodyPr/>
-          <a:lstStyle/>
-          <a:p>
-            <a:endParaRPr lang="ru-RU"/>
-          </a:p>
-        </p:txBody>
-      </p:sp>
-      <p:sp>
-        <p:nvSpPr>
-          <p:cNvPr id="4" name="Slide Number Placeholder 3"/>
-          <p:cNvSpPr>
-            <a:spLocks noGrp="1"/>
-          </p:cNvSpPr>
-          <p:nvPr>
-            <p:ph type="sldNum" sz="quarter" idx="10"/>
-          </p:nvPr>
-        </p:nvSpPr>
-        <p:spPr/>
-        <p:txBody>
-          <a:bodyPr/>
-          <a:lstStyle/>
-          <a:p>
-            <a:fld id="{7F33120B-582B-4354-977D-A474A534F6B9}" type="slidenum">
-              <a:rPr lang="ru-RU" smtClean="0"/>
-              <a:t>39</a:t>
-            </a:fld>
-            <a:endParaRPr lang="ru-RU"/>
-          </a:p>
-        </p:txBody>
-      </p:sp>
-      <p:sp>
-        <p:nvSpPr>
-          <p:cNvPr id="5" name="Header Placeholder 4"/>
-          <p:cNvSpPr>
-            <a:spLocks noGrp="1"/>
-          </p:cNvSpPr>
-          <p:nvPr>
-            <p:ph type="hdr" sz="quarter" idx="11"/>
-          </p:nvPr>
-        </p:nvSpPr>
-        <p:spPr/>
-        <p:txBody>
-          <a:bodyPr/>
-          <a:lstStyle/>
-          <a:p>
-            <a:r>
-              <a:rPr lang="ru-RU"/>
-              <a:t>Основы построения файловых систем</a:t>
-            </a:r>
-          </a:p>
-        </p:txBody>
-      </p:sp>
-    </p:spTree>
-    <p:extLst>
-      <p:ext uri="{BB962C8B-B14F-4D97-AF65-F5344CB8AC3E}">
-        <p14:creationId xmlns:p14="http://schemas.microsoft.com/office/powerpoint/2010/main" val="3232107595"/>
       </p:ext>
     </p:extLst>
   </p:cSld>
@@ -4863,7 +4900,7 @@
     </p:spTree>
     <p:extLst>
       <p:ext uri="{BB962C8B-B14F-4D97-AF65-F5344CB8AC3E}">
-        <p14:creationId xmlns:p14="http://schemas.microsoft.com/office/powerpoint/2010/main" val="1429130162"/>
+        <p14:creationId xmlns:p14="http://schemas.microsoft.com/office/powerpoint/2010/main" val="3232107595"/>
       </p:ext>
     </p:extLst>
   </p:cSld>
@@ -4969,7 +5006,7 @@
     </p:spTree>
     <p:extLst>
       <p:ext uri="{BB962C8B-B14F-4D97-AF65-F5344CB8AC3E}">
-        <p14:creationId xmlns:p14="http://schemas.microsoft.com/office/powerpoint/2010/main" val="3931420251"/>
+        <p14:creationId xmlns:p14="http://schemas.microsoft.com/office/powerpoint/2010/main" val="1429130162"/>
       </p:ext>
     </p:extLst>
   </p:cSld>
@@ -5075,7 +5112,929 @@
     </p:spTree>
     <p:extLst>
       <p:ext uri="{BB962C8B-B14F-4D97-AF65-F5344CB8AC3E}">
+        <p14:creationId xmlns:p14="http://schemas.microsoft.com/office/powerpoint/2010/main" val="3931420251"/>
+      </p:ext>
+    </p:extLst>
+  </p:cSld>
+  <p:clrMapOvr>
+    <a:masterClrMapping/>
+  </p:clrMapOvr>
+</p:notes>
+</file>
+
+<file path=ppt/notesSlides/notesSlide43.xml><?xml version="1.0" encoding="utf-8"?>
+<p:notes xmlns:a="http://schemas.openxmlformats.org/drawingml/2006/main" xmlns:r="http://schemas.openxmlformats.org/officeDocument/2006/relationships" xmlns:p="http://schemas.openxmlformats.org/presentationml/2006/main">
+  <p:cSld>
+    <p:spTree>
+      <p:nvGrpSpPr>
+        <p:cNvPr id="1" name=""/>
+        <p:cNvGrpSpPr/>
+        <p:nvPr/>
+      </p:nvGrpSpPr>
+      <p:grpSpPr>
+        <a:xfrm>
+          <a:off x="0" y="0"/>
+          <a:ext cx="0" cy="0"/>
+          <a:chOff x="0" y="0"/>
+          <a:chExt cx="0" cy="0"/>
+        </a:xfrm>
+      </p:grpSpPr>
+      <p:sp>
+        <p:nvSpPr>
+          <p:cNvPr id="2" name="Slide Image Placeholder 1"/>
+          <p:cNvSpPr>
+            <a:spLocks noGrp="1" noRot="1" noChangeAspect="1"/>
+          </p:cNvSpPr>
+          <p:nvPr>
+            <p:ph type="sldImg"/>
+          </p:nvPr>
+        </p:nvSpPr>
+        <p:spPr/>
+      </p:sp>
+      <p:sp>
+        <p:nvSpPr>
+          <p:cNvPr id="3" name="Notes Placeholder 2"/>
+          <p:cNvSpPr>
+            <a:spLocks noGrp="1"/>
+          </p:cNvSpPr>
+          <p:nvPr>
+            <p:ph type="body" idx="1"/>
+          </p:nvPr>
+        </p:nvSpPr>
+        <p:spPr/>
+        <p:txBody>
+          <a:bodyPr/>
+          <a:lstStyle/>
+          <a:p>
+            <a:endParaRPr lang="ru-RU"/>
+          </a:p>
+        </p:txBody>
+      </p:sp>
+      <p:sp>
+        <p:nvSpPr>
+          <p:cNvPr id="4" name="Slide Number Placeholder 3"/>
+          <p:cNvSpPr>
+            <a:spLocks noGrp="1"/>
+          </p:cNvSpPr>
+          <p:nvPr>
+            <p:ph type="sldNum" sz="quarter" idx="10"/>
+          </p:nvPr>
+        </p:nvSpPr>
+        <p:spPr/>
+        <p:txBody>
+          <a:bodyPr/>
+          <a:lstStyle/>
+          <a:p>
+            <a:fld id="{7F33120B-582B-4354-977D-A474A534F6B9}" type="slidenum">
+              <a:rPr lang="ru-RU" smtClean="0"/>
+              <a:t>43</a:t>
+            </a:fld>
+            <a:endParaRPr lang="ru-RU"/>
+          </a:p>
+        </p:txBody>
+      </p:sp>
+      <p:sp>
+        <p:nvSpPr>
+          <p:cNvPr id="5" name="Header Placeholder 4"/>
+          <p:cNvSpPr>
+            <a:spLocks noGrp="1"/>
+          </p:cNvSpPr>
+          <p:nvPr>
+            <p:ph type="hdr" sz="quarter" idx="11"/>
+          </p:nvPr>
+        </p:nvSpPr>
+        <p:spPr/>
+        <p:txBody>
+          <a:bodyPr/>
+          <a:lstStyle/>
+          <a:p>
+            <a:r>
+              <a:rPr lang="ru-RU"/>
+              <a:t>Основы построения файловых систем</a:t>
+            </a:r>
+          </a:p>
+        </p:txBody>
+      </p:sp>
+    </p:spTree>
+    <p:extLst>
+      <p:ext uri="{BB962C8B-B14F-4D97-AF65-F5344CB8AC3E}">
         <p14:creationId xmlns:p14="http://schemas.microsoft.com/office/powerpoint/2010/main" val="42879878"/>
+      </p:ext>
+    </p:extLst>
+  </p:cSld>
+  <p:clrMapOvr>
+    <a:masterClrMapping/>
+  </p:clrMapOvr>
+</p:notes>
+</file>
+
+<file path=ppt/notesSlides/notesSlide44.xml><?xml version="1.0" encoding="utf-8"?>
+<p:notes xmlns:a="http://schemas.openxmlformats.org/drawingml/2006/main" xmlns:r="http://schemas.openxmlformats.org/officeDocument/2006/relationships" xmlns:p="http://schemas.openxmlformats.org/presentationml/2006/main">
+  <p:cSld>
+    <p:spTree>
+      <p:nvGrpSpPr>
+        <p:cNvPr id="1" name="">
+          <a:extLst>
+            <a:ext uri="{FF2B5EF4-FFF2-40B4-BE49-F238E27FC236}">
+              <a16:creationId xmlns:a16="http://schemas.microsoft.com/office/drawing/2014/main" id="{43445F13-9652-F292-494E-A8A1CD269BCC}"/>
+            </a:ext>
+          </a:extLst>
+        </p:cNvPr>
+        <p:cNvGrpSpPr/>
+        <p:nvPr/>
+      </p:nvGrpSpPr>
+      <p:grpSpPr>
+        <a:xfrm>
+          <a:off x="0" y="0"/>
+          <a:ext cx="0" cy="0"/>
+          <a:chOff x="0" y="0"/>
+          <a:chExt cx="0" cy="0"/>
+        </a:xfrm>
+      </p:grpSpPr>
+      <p:sp>
+        <p:nvSpPr>
+          <p:cNvPr id="2" name="Slide Image Placeholder 1">
+            <a:extLst>
+              <a:ext uri="{FF2B5EF4-FFF2-40B4-BE49-F238E27FC236}">
+                <a16:creationId xmlns:a16="http://schemas.microsoft.com/office/drawing/2014/main" id="{C9C704FF-632D-596A-EB0C-63556DF8950A}"/>
+              </a:ext>
+            </a:extLst>
+          </p:cNvPr>
+          <p:cNvSpPr>
+            <a:spLocks noGrp="1" noRot="1" noChangeAspect="1"/>
+          </p:cNvSpPr>
+          <p:nvPr>
+            <p:ph type="sldImg"/>
+          </p:nvPr>
+        </p:nvSpPr>
+        <p:spPr/>
+      </p:sp>
+      <p:sp>
+        <p:nvSpPr>
+          <p:cNvPr id="3" name="Notes Placeholder 2">
+            <a:extLst>
+              <a:ext uri="{FF2B5EF4-FFF2-40B4-BE49-F238E27FC236}">
+                <a16:creationId xmlns:a16="http://schemas.microsoft.com/office/drawing/2014/main" id="{D3965A74-CBD0-E0C4-2765-352CEFEC8C9C}"/>
+              </a:ext>
+            </a:extLst>
+          </p:cNvPr>
+          <p:cNvSpPr>
+            <a:spLocks noGrp="1"/>
+          </p:cNvSpPr>
+          <p:nvPr>
+            <p:ph type="body" idx="1"/>
+          </p:nvPr>
+        </p:nvSpPr>
+        <p:spPr/>
+        <p:txBody>
+          <a:bodyPr/>
+          <a:lstStyle/>
+          <a:p>
+            <a:endParaRPr lang="ru-RU"/>
+          </a:p>
+        </p:txBody>
+      </p:sp>
+      <p:sp>
+        <p:nvSpPr>
+          <p:cNvPr id="4" name="Slide Number Placeholder 3">
+            <a:extLst>
+              <a:ext uri="{FF2B5EF4-FFF2-40B4-BE49-F238E27FC236}">
+                <a16:creationId xmlns:a16="http://schemas.microsoft.com/office/drawing/2014/main" id="{02885487-ABA2-1D32-4B32-2CCD96533C2B}"/>
+              </a:ext>
+            </a:extLst>
+          </p:cNvPr>
+          <p:cNvSpPr>
+            <a:spLocks noGrp="1"/>
+          </p:cNvSpPr>
+          <p:nvPr>
+            <p:ph type="sldNum" sz="quarter" idx="10"/>
+          </p:nvPr>
+        </p:nvSpPr>
+        <p:spPr/>
+        <p:txBody>
+          <a:bodyPr/>
+          <a:lstStyle/>
+          <a:p>
+            <a:fld id="{7F33120B-582B-4354-977D-A474A534F6B9}" type="slidenum">
+              <a:rPr lang="ru-RU" smtClean="0"/>
+              <a:t>44</a:t>
+            </a:fld>
+            <a:endParaRPr lang="ru-RU"/>
+          </a:p>
+        </p:txBody>
+      </p:sp>
+      <p:sp>
+        <p:nvSpPr>
+          <p:cNvPr id="5" name="Header Placeholder 4">
+            <a:extLst>
+              <a:ext uri="{FF2B5EF4-FFF2-40B4-BE49-F238E27FC236}">
+                <a16:creationId xmlns:a16="http://schemas.microsoft.com/office/drawing/2014/main" id="{D2F733CD-B231-C48B-828B-243958BBC0F7}"/>
+              </a:ext>
+            </a:extLst>
+          </p:cNvPr>
+          <p:cNvSpPr>
+            <a:spLocks noGrp="1"/>
+          </p:cNvSpPr>
+          <p:nvPr>
+            <p:ph type="hdr" sz="quarter" idx="11"/>
+          </p:nvPr>
+        </p:nvSpPr>
+        <p:spPr/>
+        <p:txBody>
+          <a:bodyPr/>
+          <a:lstStyle/>
+          <a:p>
+            <a:r>
+              <a:rPr lang="ru-RU"/>
+              <a:t>Основы построения файловых систем</a:t>
+            </a:r>
+          </a:p>
+        </p:txBody>
+      </p:sp>
+    </p:spTree>
+    <p:extLst>
+      <p:ext uri="{BB962C8B-B14F-4D97-AF65-F5344CB8AC3E}">
+        <p14:creationId xmlns:p14="http://schemas.microsoft.com/office/powerpoint/2010/main" val="959702152"/>
+      </p:ext>
+    </p:extLst>
+  </p:cSld>
+  <p:clrMapOvr>
+    <a:masterClrMapping/>
+  </p:clrMapOvr>
+</p:notes>
+</file>
+
+<file path=ppt/notesSlides/notesSlide45.xml><?xml version="1.0" encoding="utf-8"?>
+<p:notes xmlns:a="http://schemas.openxmlformats.org/drawingml/2006/main" xmlns:r="http://schemas.openxmlformats.org/officeDocument/2006/relationships" xmlns:p="http://schemas.openxmlformats.org/presentationml/2006/main">
+  <p:cSld>
+    <p:spTree>
+      <p:nvGrpSpPr>
+        <p:cNvPr id="1" name="">
+          <a:extLst>
+            <a:ext uri="{FF2B5EF4-FFF2-40B4-BE49-F238E27FC236}">
+              <a16:creationId xmlns:a16="http://schemas.microsoft.com/office/drawing/2014/main" id="{9D6A73E2-2FE1-0CFA-B4AC-98D828A7EE1A}"/>
+            </a:ext>
+          </a:extLst>
+        </p:cNvPr>
+        <p:cNvGrpSpPr/>
+        <p:nvPr/>
+      </p:nvGrpSpPr>
+      <p:grpSpPr>
+        <a:xfrm>
+          <a:off x="0" y="0"/>
+          <a:ext cx="0" cy="0"/>
+          <a:chOff x="0" y="0"/>
+          <a:chExt cx="0" cy="0"/>
+        </a:xfrm>
+      </p:grpSpPr>
+      <p:sp>
+        <p:nvSpPr>
+          <p:cNvPr id="2" name="Slide Image Placeholder 1">
+            <a:extLst>
+              <a:ext uri="{FF2B5EF4-FFF2-40B4-BE49-F238E27FC236}">
+                <a16:creationId xmlns:a16="http://schemas.microsoft.com/office/drawing/2014/main" id="{FCAA8571-4982-18EC-0F27-DD4119B8E193}"/>
+              </a:ext>
+            </a:extLst>
+          </p:cNvPr>
+          <p:cNvSpPr>
+            <a:spLocks noGrp="1" noRot="1" noChangeAspect="1"/>
+          </p:cNvSpPr>
+          <p:nvPr>
+            <p:ph type="sldImg"/>
+          </p:nvPr>
+        </p:nvSpPr>
+        <p:spPr/>
+      </p:sp>
+      <p:sp>
+        <p:nvSpPr>
+          <p:cNvPr id="3" name="Notes Placeholder 2">
+            <a:extLst>
+              <a:ext uri="{FF2B5EF4-FFF2-40B4-BE49-F238E27FC236}">
+                <a16:creationId xmlns:a16="http://schemas.microsoft.com/office/drawing/2014/main" id="{FF913DB5-D571-3BAE-0257-37577E265603}"/>
+              </a:ext>
+            </a:extLst>
+          </p:cNvPr>
+          <p:cNvSpPr>
+            <a:spLocks noGrp="1"/>
+          </p:cNvSpPr>
+          <p:nvPr>
+            <p:ph type="body" idx="1"/>
+          </p:nvPr>
+        </p:nvSpPr>
+        <p:spPr/>
+        <p:txBody>
+          <a:bodyPr/>
+          <a:lstStyle/>
+          <a:p>
+            <a:endParaRPr lang="ru-RU"/>
+          </a:p>
+        </p:txBody>
+      </p:sp>
+      <p:sp>
+        <p:nvSpPr>
+          <p:cNvPr id="4" name="Slide Number Placeholder 3">
+            <a:extLst>
+              <a:ext uri="{FF2B5EF4-FFF2-40B4-BE49-F238E27FC236}">
+                <a16:creationId xmlns:a16="http://schemas.microsoft.com/office/drawing/2014/main" id="{2465F3C6-845F-75A9-69F9-EF0A5A3BBC6E}"/>
+              </a:ext>
+            </a:extLst>
+          </p:cNvPr>
+          <p:cNvSpPr>
+            <a:spLocks noGrp="1"/>
+          </p:cNvSpPr>
+          <p:nvPr>
+            <p:ph type="sldNum" sz="quarter" idx="10"/>
+          </p:nvPr>
+        </p:nvSpPr>
+        <p:spPr/>
+        <p:txBody>
+          <a:bodyPr/>
+          <a:lstStyle/>
+          <a:p>
+            <a:fld id="{7F33120B-582B-4354-977D-A474A534F6B9}" type="slidenum">
+              <a:rPr lang="ru-RU" smtClean="0"/>
+              <a:t>45</a:t>
+            </a:fld>
+            <a:endParaRPr lang="ru-RU"/>
+          </a:p>
+        </p:txBody>
+      </p:sp>
+      <p:sp>
+        <p:nvSpPr>
+          <p:cNvPr id="5" name="Header Placeholder 4">
+            <a:extLst>
+              <a:ext uri="{FF2B5EF4-FFF2-40B4-BE49-F238E27FC236}">
+                <a16:creationId xmlns:a16="http://schemas.microsoft.com/office/drawing/2014/main" id="{DABEBE51-DF74-31FF-B9B6-A31ECB1EA7FE}"/>
+              </a:ext>
+            </a:extLst>
+          </p:cNvPr>
+          <p:cNvSpPr>
+            <a:spLocks noGrp="1"/>
+          </p:cNvSpPr>
+          <p:nvPr>
+            <p:ph type="hdr" sz="quarter" idx="11"/>
+          </p:nvPr>
+        </p:nvSpPr>
+        <p:spPr/>
+        <p:txBody>
+          <a:bodyPr/>
+          <a:lstStyle/>
+          <a:p>
+            <a:r>
+              <a:rPr lang="ru-RU"/>
+              <a:t>Основы построения файловых систем</a:t>
+            </a:r>
+          </a:p>
+        </p:txBody>
+      </p:sp>
+    </p:spTree>
+    <p:extLst>
+      <p:ext uri="{BB962C8B-B14F-4D97-AF65-F5344CB8AC3E}">
+        <p14:creationId xmlns:p14="http://schemas.microsoft.com/office/powerpoint/2010/main" val="2139896101"/>
+      </p:ext>
+    </p:extLst>
+  </p:cSld>
+  <p:clrMapOvr>
+    <a:masterClrMapping/>
+  </p:clrMapOvr>
+</p:notes>
+</file>
+
+<file path=ppt/notesSlides/notesSlide46.xml><?xml version="1.0" encoding="utf-8"?>
+<p:notes xmlns:a="http://schemas.openxmlformats.org/drawingml/2006/main" xmlns:r="http://schemas.openxmlformats.org/officeDocument/2006/relationships" xmlns:p="http://schemas.openxmlformats.org/presentationml/2006/main">
+  <p:cSld>
+    <p:spTree>
+      <p:nvGrpSpPr>
+        <p:cNvPr id="1" name="">
+          <a:extLst>
+            <a:ext uri="{FF2B5EF4-FFF2-40B4-BE49-F238E27FC236}">
+              <a16:creationId xmlns:a16="http://schemas.microsoft.com/office/drawing/2014/main" id="{5FC092FB-980A-8E45-91F4-53DD4D336E65}"/>
+            </a:ext>
+          </a:extLst>
+        </p:cNvPr>
+        <p:cNvGrpSpPr/>
+        <p:nvPr/>
+      </p:nvGrpSpPr>
+      <p:grpSpPr>
+        <a:xfrm>
+          <a:off x="0" y="0"/>
+          <a:ext cx="0" cy="0"/>
+          <a:chOff x="0" y="0"/>
+          <a:chExt cx="0" cy="0"/>
+        </a:xfrm>
+      </p:grpSpPr>
+      <p:sp>
+        <p:nvSpPr>
+          <p:cNvPr id="2" name="Slide Image Placeholder 1">
+            <a:extLst>
+              <a:ext uri="{FF2B5EF4-FFF2-40B4-BE49-F238E27FC236}">
+                <a16:creationId xmlns:a16="http://schemas.microsoft.com/office/drawing/2014/main" id="{287EDE03-0D88-3566-22AA-8DE0CC786138}"/>
+              </a:ext>
+            </a:extLst>
+          </p:cNvPr>
+          <p:cNvSpPr>
+            <a:spLocks noGrp="1" noRot="1" noChangeAspect="1"/>
+          </p:cNvSpPr>
+          <p:nvPr>
+            <p:ph type="sldImg"/>
+          </p:nvPr>
+        </p:nvSpPr>
+        <p:spPr/>
+      </p:sp>
+      <p:sp>
+        <p:nvSpPr>
+          <p:cNvPr id="3" name="Notes Placeholder 2">
+            <a:extLst>
+              <a:ext uri="{FF2B5EF4-FFF2-40B4-BE49-F238E27FC236}">
+                <a16:creationId xmlns:a16="http://schemas.microsoft.com/office/drawing/2014/main" id="{8132114F-2EC3-CBA8-B0CC-742AD60B3A41}"/>
+              </a:ext>
+            </a:extLst>
+          </p:cNvPr>
+          <p:cNvSpPr>
+            <a:spLocks noGrp="1"/>
+          </p:cNvSpPr>
+          <p:nvPr>
+            <p:ph type="body" idx="1"/>
+          </p:nvPr>
+        </p:nvSpPr>
+        <p:spPr/>
+        <p:txBody>
+          <a:bodyPr/>
+          <a:lstStyle/>
+          <a:p>
+            <a:endParaRPr lang="ru-RU"/>
+          </a:p>
+        </p:txBody>
+      </p:sp>
+      <p:sp>
+        <p:nvSpPr>
+          <p:cNvPr id="4" name="Slide Number Placeholder 3">
+            <a:extLst>
+              <a:ext uri="{FF2B5EF4-FFF2-40B4-BE49-F238E27FC236}">
+                <a16:creationId xmlns:a16="http://schemas.microsoft.com/office/drawing/2014/main" id="{223055E3-7D35-C911-C7B2-28B5CB74E7C5}"/>
+              </a:ext>
+            </a:extLst>
+          </p:cNvPr>
+          <p:cNvSpPr>
+            <a:spLocks noGrp="1"/>
+          </p:cNvSpPr>
+          <p:nvPr>
+            <p:ph type="sldNum" sz="quarter" idx="10"/>
+          </p:nvPr>
+        </p:nvSpPr>
+        <p:spPr/>
+        <p:txBody>
+          <a:bodyPr/>
+          <a:lstStyle/>
+          <a:p>
+            <a:fld id="{7F33120B-582B-4354-977D-A474A534F6B9}" type="slidenum">
+              <a:rPr lang="ru-RU" smtClean="0"/>
+              <a:t>46</a:t>
+            </a:fld>
+            <a:endParaRPr lang="ru-RU"/>
+          </a:p>
+        </p:txBody>
+      </p:sp>
+      <p:sp>
+        <p:nvSpPr>
+          <p:cNvPr id="5" name="Header Placeholder 4">
+            <a:extLst>
+              <a:ext uri="{FF2B5EF4-FFF2-40B4-BE49-F238E27FC236}">
+                <a16:creationId xmlns:a16="http://schemas.microsoft.com/office/drawing/2014/main" id="{2406D7B8-8A9F-41D6-0782-C932D44762BC}"/>
+              </a:ext>
+            </a:extLst>
+          </p:cNvPr>
+          <p:cNvSpPr>
+            <a:spLocks noGrp="1"/>
+          </p:cNvSpPr>
+          <p:nvPr>
+            <p:ph type="hdr" sz="quarter" idx="11"/>
+          </p:nvPr>
+        </p:nvSpPr>
+        <p:spPr/>
+        <p:txBody>
+          <a:bodyPr/>
+          <a:lstStyle/>
+          <a:p>
+            <a:r>
+              <a:rPr lang="ru-RU"/>
+              <a:t>Основы построения файловых систем</a:t>
+            </a:r>
+          </a:p>
+        </p:txBody>
+      </p:sp>
+    </p:spTree>
+    <p:extLst>
+      <p:ext uri="{BB962C8B-B14F-4D97-AF65-F5344CB8AC3E}">
+        <p14:creationId xmlns:p14="http://schemas.microsoft.com/office/powerpoint/2010/main" val="478098378"/>
+      </p:ext>
+    </p:extLst>
+  </p:cSld>
+  <p:clrMapOvr>
+    <a:masterClrMapping/>
+  </p:clrMapOvr>
+</p:notes>
+</file>
+
+<file path=ppt/notesSlides/notesSlide47.xml><?xml version="1.0" encoding="utf-8"?>
+<p:notes xmlns:a="http://schemas.openxmlformats.org/drawingml/2006/main" xmlns:r="http://schemas.openxmlformats.org/officeDocument/2006/relationships" xmlns:p="http://schemas.openxmlformats.org/presentationml/2006/main">
+  <p:cSld>
+    <p:spTree>
+      <p:nvGrpSpPr>
+        <p:cNvPr id="1" name="">
+          <a:extLst>
+            <a:ext uri="{FF2B5EF4-FFF2-40B4-BE49-F238E27FC236}">
+              <a16:creationId xmlns:a16="http://schemas.microsoft.com/office/drawing/2014/main" id="{D0ABD61D-F333-3A6B-13E7-4D006B6538C6}"/>
+            </a:ext>
+          </a:extLst>
+        </p:cNvPr>
+        <p:cNvGrpSpPr/>
+        <p:nvPr/>
+      </p:nvGrpSpPr>
+      <p:grpSpPr>
+        <a:xfrm>
+          <a:off x="0" y="0"/>
+          <a:ext cx="0" cy="0"/>
+          <a:chOff x="0" y="0"/>
+          <a:chExt cx="0" cy="0"/>
+        </a:xfrm>
+      </p:grpSpPr>
+      <p:sp>
+        <p:nvSpPr>
+          <p:cNvPr id="2" name="Slide Image Placeholder 1">
+            <a:extLst>
+              <a:ext uri="{FF2B5EF4-FFF2-40B4-BE49-F238E27FC236}">
+                <a16:creationId xmlns:a16="http://schemas.microsoft.com/office/drawing/2014/main" id="{58AE53F7-2DF3-D7F9-54C7-AAC14CF42DDA}"/>
+              </a:ext>
+            </a:extLst>
+          </p:cNvPr>
+          <p:cNvSpPr>
+            <a:spLocks noGrp="1" noRot="1" noChangeAspect="1"/>
+          </p:cNvSpPr>
+          <p:nvPr>
+            <p:ph type="sldImg"/>
+          </p:nvPr>
+        </p:nvSpPr>
+        <p:spPr/>
+      </p:sp>
+      <p:sp>
+        <p:nvSpPr>
+          <p:cNvPr id="3" name="Notes Placeholder 2">
+            <a:extLst>
+              <a:ext uri="{FF2B5EF4-FFF2-40B4-BE49-F238E27FC236}">
+                <a16:creationId xmlns:a16="http://schemas.microsoft.com/office/drawing/2014/main" id="{9A864A0A-A5AE-11B8-A87F-D38904FCF823}"/>
+              </a:ext>
+            </a:extLst>
+          </p:cNvPr>
+          <p:cNvSpPr>
+            <a:spLocks noGrp="1"/>
+          </p:cNvSpPr>
+          <p:nvPr>
+            <p:ph type="body" idx="1"/>
+          </p:nvPr>
+        </p:nvSpPr>
+        <p:spPr/>
+        <p:txBody>
+          <a:bodyPr/>
+          <a:lstStyle/>
+          <a:p>
+            <a:endParaRPr lang="ru-RU"/>
+          </a:p>
+        </p:txBody>
+      </p:sp>
+      <p:sp>
+        <p:nvSpPr>
+          <p:cNvPr id="4" name="Slide Number Placeholder 3">
+            <a:extLst>
+              <a:ext uri="{FF2B5EF4-FFF2-40B4-BE49-F238E27FC236}">
+                <a16:creationId xmlns:a16="http://schemas.microsoft.com/office/drawing/2014/main" id="{386A813B-9693-C2DF-24F9-908E9209F6A9}"/>
+              </a:ext>
+            </a:extLst>
+          </p:cNvPr>
+          <p:cNvSpPr>
+            <a:spLocks noGrp="1"/>
+          </p:cNvSpPr>
+          <p:nvPr>
+            <p:ph type="sldNum" sz="quarter" idx="10"/>
+          </p:nvPr>
+        </p:nvSpPr>
+        <p:spPr/>
+        <p:txBody>
+          <a:bodyPr/>
+          <a:lstStyle/>
+          <a:p>
+            <a:fld id="{7F33120B-582B-4354-977D-A474A534F6B9}" type="slidenum">
+              <a:rPr lang="ru-RU" smtClean="0"/>
+              <a:t>47</a:t>
+            </a:fld>
+            <a:endParaRPr lang="ru-RU"/>
+          </a:p>
+        </p:txBody>
+      </p:sp>
+      <p:sp>
+        <p:nvSpPr>
+          <p:cNvPr id="5" name="Header Placeholder 4">
+            <a:extLst>
+              <a:ext uri="{FF2B5EF4-FFF2-40B4-BE49-F238E27FC236}">
+                <a16:creationId xmlns:a16="http://schemas.microsoft.com/office/drawing/2014/main" id="{85FA515F-3BC6-576C-F45F-84AE976CB34C}"/>
+              </a:ext>
+            </a:extLst>
+          </p:cNvPr>
+          <p:cNvSpPr>
+            <a:spLocks noGrp="1"/>
+          </p:cNvSpPr>
+          <p:nvPr>
+            <p:ph type="hdr" sz="quarter" idx="11"/>
+          </p:nvPr>
+        </p:nvSpPr>
+        <p:spPr/>
+        <p:txBody>
+          <a:bodyPr/>
+          <a:lstStyle/>
+          <a:p>
+            <a:r>
+              <a:rPr lang="ru-RU"/>
+              <a:t>Основы построения файловых систем</a:t>
+            </a:r>
+          </a:p>
+        </p:txBody>
+      </p:sp>
+    </p:spTree>
+    <p:extLst>
+      <p:ext uri="{BB962C8B-B14F-4D97-AF65-F5344CB8AC3E}">
+        <p14:creationId xmlns:p14="http://schemas.microsoft.com/office/powerpoint/2010/main" val="357032983"/>
+      </p:ext>
+    </p:extLst>
+  </p:cSld>
+  <p:clrMapOvr>
+    <a:masterClrMapping/>
+  </p:clrMapOvr>
+</p:notes>
+</file>
+
+<file path=ppt/notesSlides/notesSlide48.xml><?xml version="1.0" encoding="utf-8"?>
+<p:notes xmlns:a="http://schemas.openxmlformats.org/drawingml/2006/main" xmlns:r="http://schemas.openxmlformats.org/officeDocument/2006/relationships" xmlns:p="http://schemas.openxmlformats.org/presentationml/2006/main">
+  <p:cSld>
+    <p:spTree>
+      <p:nvGrpSpPr>
+        <p:cNvPr id="1" name="">
+          <a:extLst>
+            <a:ext uri="{FF2B5EF4-FFF2-40B4-BE49-F238E27FC236}">
+              <a16:creationId xmlns:a16="http://schemas.microsoft.com/office/drawing/2014/main" id="{E004D792-0E99-92AB-D152-55DF97FF23C0}"/>
+            </a:ext>
+          </a:extLst>
+        </p:cNvPr>
+        <p:cNvGrpSpPr/>
+        <p:nvPr/>
+      </p:nvGrpSpPr>
+      <p:grpSpPr>
+        <a:xfrm>
+          <a:off x="0" y="0"/>
+          <a:ext cx="0" cy="0"/>
+          <a:chOff x="0" y="0"/>
+          <a:chExt cx="0" cy="0"/>
+        </a:xfrm>
+      </p:grpSpPr>
+      <p:sp>
+        <p:nvSpPr>
+          <p:cNvPr id="2" name="Slide Image Placeholder 1">
+            <a:extLst>
+              <a:ext uri="{FF2B5EF4-FFF2-40B4-BE49-F238E27FC236}">
+                <a16:creationId xmlns:a16="http://schemas.microsoft.com/office/drawing/2014/main" id="{6B67511D-D9F2-20C6-29CB-28BFBA5A241F}"/>
+              </a:ext>
+            </a:extLst>
+          </p:cNvPr>
+          <p:cNvSpPr>
+            <a:spLocks noGrp="1" noRot="1" noChangeAspect="1"/>
+          </p:cNvSpPr>
+          <p:nvPr>
+            <p:ph type="sldImg"/>
+          </p:nvPr>
+        </p:nvSpPr>
+        <p:spPr/>
+      </p:sp>
+      <p:sp>
+        <p:nvSpPr>
+          <p:cNvPr id="3" name="Notes Placeholder 2">
+            <a:extLst>
+              <a:ext uri="{FF2B5EF4-FFF2-40B4-BE49-F238E27FC236}">
+                <a16:creationId xmlns:a16="http://schemas.microsoft.com/office/drawing/2014/main" id="{15CB702F-CDE1-201C-4CC4-0372ACDF10DE}"/>
+              </a:ext>
+            </a:extLst>
+          </p:cNvPr>
+          <p:cNvSpPr>
+            <a:spLocks noGrp="1"/>
+          </p:cNvSpPr>
+          <p:nvPr>
+            <p:ph type="body" idx="1"/>
+          </p:nvPr>
+        </p:nvSpPr>
+        <p:spPr/>
+        <p:txBody>
+          <a:bodyPr/>
+          <a:lstStyle/>
+          <a:p>
+            <a:endParaRPr lang="ru-RU"/>
+          </a:p>
+        </p:txBody>
+      </p:sp>
+      <p:sp>
+        <p:nvSpPr>
+          <p:cNvPr id="4" name="Slide Number Placeholder 3">
+            <a:extLst>
+              <a:ext uri="{FF2B5EF4-FFF2-40B4-BE49-F238E27FC236}">
+                <a16:creationId xmlns:a16="http://schemas.microsoft.com/office/drawing/2014/main" id="{069EEAC2-C010-8310-68A3-F348F266F137}"/>
+              </a:ext>
+            </a:extLst>
+          </p:cNvPr>
+          <p:cNvSpPr>
+            <a:spLocks noGrp="1"/>
+          </p:cNvSpPr>
+          <p:nvPr>
+            <p:ph type="sldNum" sz="quarter" idx="10"/>
+          </p:nvPr>
+        </p:nvSpPr>
+        <p:spPr/>
+        <p:txBody>
+          <a:bodyPr/>
+          <a:lstStyle/>
+          <a:p>
+            <a:fld id="{7F33120B-582B-4354-977D-A474A534F6B9}" type="slidenum">
+              <a:rPr lang="ru-RU" smtClean="0"/>
+              <a:t>48</a:t>
+            </a:fld>
+            <a:endParaRPr lang="ru-RU"/>
+          </a:p>
+        </p:txBody>
+      </p:sp>
+      <p:sp>
+        <p:nvSpPr>
+          <p:cNvPr id="5" name="Header Placeholder 4">
+            <a:extLst>
+              <a:ext uri="{FF2B5EF4-FFF2-40B4-BE49-F238E27FC236}">
+                <a16:creationId xmlns:a16="http://schemas.microsoft.com/office/drawing/2014/main" id="{1E793BD7-9AD0-79C8-DE95-BDF0D62ADA9E}"/>
+              </a:ext>
+            </a:extLst>
+          </p:cNvPr>
+          <p:cNvSpPr>
+            <a:spLocks noGrp="1"/>
+          </p:cNvSpPr>
+          <p:nvPr>
+            <p:ph type="hdr" sz="quarter" idx="11"/>
+          </p:nvPr>
+        </p:nvSpPr>
+        <p:spPr/>
+        <p:txBody>
+          <a:bodyPr/>
+          <a:lstStyle/>
+          <a:p>
+            <a:r>
+              <a:rPr lang="ru-RU"/>
+              <a:t>Основы построения файловых систем</a:t>
+            </a:r>
+          </a:p>
+        </p:txBody>
+      </p:sp>
+    </p:spTree>
+    <p:extLst>
+      <p:ext uri="{BB962C8B-B14F-4D97-AF65-F5344CB8AC3E}">
+        <p14:creationId xmlns:p14="http://schemas.microsoft.com/office/powerpoint/2010/main" val="24212508"/>
+      </p:ext>
+    </p:extLst>
+  </p:cSld>
+  <p:clrMapOvr>
+    <a:masterClrMapping/>
+  </p:clrMapOvr>
+</p:notes>
+</file>
+
+<file path=ppt/notesSlides/notesSlide49.xml><?xml version="1.0" encoding="utf-8"?>
+<p:notes xmlns:a="http://schemas.openxmlformats.org/drawingml/2006/main" xmlns:r="http://schemas.openxmlformats.org/officeDocument/2006/relationships" xmlns:p="http://schemas.openxmlformats.org/presentationml/2006/main">
+  <p:cSld>
+    <p:spTree>
+      <p:nvGrpSpPr>
+        <p:cNvPr id="1" name="">
+          <a:extLst>
+            <a:ext uri="{FF2B5EF4-FFF2-40B4-BE49-F238E27FC236}">
+              <a16:creationId xmlns:a16="http://schemas.microsoft.com/office/drawing/2014/main" id="{CF464442-78F3-6C71-F1C0-C00B0790FED4}"/>
+            </a:ext>
+          </a:extLst>
+        </p:cNvPr>
+        <p:cNvGrpSpPr/>
+        <p:nvPr/>
+      </p:nvGrpSpPr>
+      <p:grpSpPr>
+        <a:xfrm>
+          <a:off x="0" y="0"/>
+          <a:ext cx="0" cy="0"/>
+          <a:chOff x="0" y="0"/>
+          <a:chExt cx="0" cy="0"/>
+        </a:xfrm>
+      </p:grpSpPr>
+      <p:sp>
+        <p:nvSpPr>
+          <p:cNvPr id="2" name="Slide Image Placeholder 1">
+            <a:extLst>
+              <a:ext uri="{FF2B5EF4-FFF2-40B4-BE49-F238E27FC236}">
+                <a16:creationId xmlns:a16="http://schemas.microsoft.com/office/drawing/2014/main" id="{FBF2189A-885A-FE16-0188-DE4A7E8A2FF9}"/>
+              </a:ext>
+            </a:extLst>
+          </p:cNvPr>
+          <p:cNvSpPr>
+            <a:spLocks noGrp="1" noRot="1" noChangeAspect="1"/>
+          </p:cNvSpPr>
+          <p:nvPr>
+            <p:ph type="sldImg"/>
+          </p:nvPr>
+        </p:nvSpPr>
+        <p:spPr/>
+      </p:sp>
+      <p:sp>
+        <p:nvSpPr>
+          <p:cNvPr id="3" name="Notes Placeholder 2">
+            <a:extLst>
+              <a:ext uri="{FF2B5EF4-FFF2-40B4-BE49-F238E27FC236}">
+                <a16:creationId xmlns:a16="http://schemas.microsoft.com/office/drawing/2014/main" id="{9C1A11DF-DE93-E358-8901-02C0D2488E33}"/>
+              </a:ext>
+            </a:extLst>
+          </p:cNvPr>
+          <p:cNvSpPr>
+            <a:spLocks noGrp="1"/>
+          </p:cNvSpPr>
+          <p:nvPr>
+            <p:ph type="body" idx="1"/>
+          </p:nvPr>
+        </p:nvSpPr>
+        <p:spPr/>
+        <p:txBody>
+          <a:bodyPr/>
+          <a:lstStyle/>
+          <a:p>
+            <a:endParaRPr lang="ru-RU"/>
+          </a:p>
+        </p:txBody>
+      </p:sp>
+      <p:sp>
+        <p:nvSpPr>
+          <p:cNvPr id="4" name="Slide Number Placeholder 3">
+            <a:extLst>
+              <a:ext uri="{FF2B5EF4-FFF2-40B4-BE49-F238E27FC236}">
+                <a16:creationId xmlns:a16="http://schemas.microsoft.com/office/drawing/2014/main" id="{316C0335-42A1-5E02-38D6-42A817558074}"/>
+              </a:ext>
+            </a:extLst>
+          </p:cNvPr>
+          <p:cNvSpPr>
+            <a:spLocks noGrp="1"/>
+          </p:cNvSpPr>
+          <p:nvPr>
+            <p:ph type="sldNum" sz="quarter" idx="10"/>
+          </p:nvPr>
+        </p:nvSpPr>
+        <p:spPr/>
+        <p:txBody>
+          <a:bodyPr/>
+          <a:lstStyle/>
+          <a:p>
+            <a:fld id="{7F33120B-582B-4354-977D-A474A534F6B9}" type="slidenum">
+              <a:rPr lang="ru-RU" smtClean="0"/>
+              <a:t>49</a:t>
+            </a:fld>
+            <a:endParaRPr lang="ru-RU"/>
+          </a:p>
+        </p:txBody>
+      </p:sp>
+      <p:sp>
+        <p:nvSpPr>
+          <p:cNvPr id="5" name="Header Placeholder 4">
+            <a:extLst>
+              <a:ext uri="{FF2B5EF4-FFF2-40B4-BE49-F238E27FC236}">
+                <a16:creationId xmlns:a16="http://schemas.microsoft.com/office/drawing/2014/main" id="{6251B635-6237-5749-4CEA-7C5C8F11648E}"/>
+              </a:ext>
+            </a:extLst>
+          </p:cNvPr>
+          <p:cNvSpPr>
+            <a:spLocks noGrp="1"/>
+          </p:cNvSpPr>
+          <p:nvPr>
+            <p:ph type="hdr" sz="quarter" idx="11"/>
+          </p:nvPr>
+        </p:nvSpPr>
+        <p:spPr/>
+        <p:txBody>
+          <a:bodyPr/>
+          <a:lstStyle/>
+          <a:p>
+            <a:r>
+              <a:rPr lang="ru-RU"/>
+              <a:t>Основы построения файловых систем</a:t>
+            </a:r>
+          </a:p>
+        </p:txBody>
+      </p:sp>
+    </p:spTree>
+    <p:extLst>
+      <p:ext uri="{BB962C8B-B14F-4D97-AF65-F5344CB8AC3E}">
+        <p14:creationId xmlns:p14="http://schemas.microsoft.com/office/powerpoint/2010/main" val="4177766270"/>
       </p:ext>
     </p:extLst>
   </p:cSld>
@@ -5836,7 +6795,7 @@
           <a:p>
             <a:fld id="{12C63722-5D9F-4E99-9720-9B6A0C7BB1C9}" type="datetimeFigureOut">
               <a:rPr lang="ru-RU" smtClean="0"/>
-              <a:t>23.10.2025</a:t>
+              <a:t>19.10.2026</a:t>
             </a:fld>
             <a:endParaRPr lang="ru-RU"/>
           </a:p>
@@ -6006,7 +6965,7 @@
           <a:p>
             <a:fld id="{12C63722-5D9F-4E99-9720-9B6A0C7BB1C9}" type="datetimeFigureOut">
               <a:rPr lang="ru-RU" smtClean="0"/>
-              <a:t>23.10.2025</a:t>
+              <a:t>19.10.2026</a:t>
             </a:fld>
             <a:endParaRPr lang="ru-RU"/>
           </a:p>
@@ -6186,7 +7145,7 @@
           <a:p>
             <a:fld id="{12C63722-5D9F-4E99-9720-9B6A0C7BB1C9}" type="datetimeFigureOut">
               <a:rPr lang="ru-RU" smtClean="0"/>
-              <a:t>23.10.2025</a:t>
+              <a:t>19.10.2026</a:t>
             </a:fld>
             <a:endParaRPr lang="ru-RU"/>
           </a:p>
@@ -6378,7 +7337,7 @@
           <a:p>
             <a:fld id="{8C218C88-2408-4CFC-B25C-07450930B282}" type="datetimeFigureOut">
               <a:rPr lang="ru-RU" smtClean="0"/>
-              <a:t>23.10.2025</a:t>
+              <a:t>19.10.2026</a:t>
             </a:fld>
             <a:endParaRPr lang="ru-RU"/>
           </a:p>
@@ -6548,7 +7507,7 @@
           <a:p>
             <a:fld id="{8C218C88-2408-4CFC-B25C-07450930B282}" type="datetimeFigureOut">
               <a:rPr lang="ru-RU" smtClean="0"/>
-              <a:t>23.10.2025</a:t>
+              <a:t>19.10.2026</a:t>
             </a:fld>
             <a:endParaRPr lang="ru-RU"/>
           </a:p>
@@ -6794,7 +7753,7 @@
           <a:p>
             <a:fld id="{8C218C88-2408-4CFC-B25C-07450930B282}" type="datetimeFigureOut">
               <a:rPr lang="ru-RU" smtClean="0"/>
-              <a:t>23.10.2025</a:t>
+              <a:t>19.10.2026</a:t>
             </a:fld>
             <a:endParaRPr lang="ru-RU"/>
           </a:p>
@@ -7026,7 +7985,7 @@
           <a:p>
             <a:fld id="{8C218C88-2408-4CFC-B25C-07450930B282}" type="datetimeFigureOut">
               <a:rPr lang="ru-RU" smtClean="0"/>
-              <a:t>23.10.2025</a:t>
+              <a:t>19.10.2026</a:t>
             </a:fld>
             <a:endParaRPr lang="ru-RU"/>
           </a:p>
@@ -7393,7 +8352,7 @@
           <a:p>
             <a:fld id="{8C218C88-2408-4CFC-B25C-07450930B282}" type="datetimeFigureOut">
               <a:rPr lang="ru-RU" smtClean="0"/>
-              <a:t>23.10.2025</a:t>
+              <a:t>19.10.2026</a:t>
             </a:fld>
             <a:endParaRPr lang="ru-RU"/>
           </a:p>
@@ -7511,7 +8470,7 @@
           <a:p>
             <a:fld id="{8C218C88-2408-4CFC-B25C-07450930B282}" type="datetimeFigureOut">
               <a:rPr lang="ru-RU" smtClean="0"/>
-              <a:t>23.10.2025</a:t>
+              <a:t>19.10.2026</a:t>
             </a:fld>
             <a:endParaRPr lang="ru-RU"/>
           </a:p>
@@ -7606,7 +8565,7 @@
           <a:p>
             <a:fld id="{8C218C88-2408-4CFC-B25C-07450930B282}" type="datetimeFigureOut">
               <a:rPr lang="ru-RU" smtClean="0"/>
-              <a:t>23.10.2025</a:t>
+              <a:t>19.10.2026</a:t>
             </a:fld>
             <a:endParaRPr lang="ru-RU"/>
           </a:p>
@@ -7883,7 +8842,7 @@
           <a:p>
             <a:fld id="{8C218C88-2408-4CFC-B25C-07450930B282}" type="datetimeFigureOut">
               <a:rPr lang="ru-RU" smtClean="0"/>
-              <a:t>23.10.2025</a:t>
+              <a:t>19.10.2026</a:t>
             </a:fld>
             <a:endParaRPr lang="ru-RU"/>
           </a:p>
@@ -8053,7 +9012,7 @@
           <a:p>
             <a:fld id="{12C63722-5D9F-4E99-9720-9B6A0C7BB1C9}" type="datetimeFigureOut">
               <a:rPr lang="ru-RU" smtClean="0"/>
-              <a:t>23.10.2025</a:t>
+              <a:t>19.10.2026</a:t>
             </a:fld>
             <a:endParaRPr lang="ru-RU"/>
           </a:p>
@@ -8306,7 +9265,7 @@
           <a:p>
             <a:fld id="{8C218C88-2408-4CFC-B25C-07450930B282}" type="datetimeFigureOut">
               <a:rPr lang="ru-RU" smtClean="0"/>
-              <a:t>23.10.2025</a:t>
+              <a:t>19.10.2026</a:t>
             </a:fld>
             <a:endParaRPr lang="ru-RU"/>
           </a:p>
@@ -8476,7 +9435,7 @@
           <a:p>
             <a:fld id="{8C218C88-2408-4CFC-B25C-07450930B282}" type="datetimeFigureOut">
               <a:rPr lang="ru-RU" smtClean="0"/>
-              <a:t>23.10.2025</a:t>
+              <a:t>19.10.2026</a:t>
             </a:fld>
             <a:endParaRPr lang="ru-RU"/>
           </a:p>
@@ -8656,7 +9615,7 @@
           <a:p>
             <a:fld id="{8C218C88-2408-4CFC-B25C-07450930B282}" type="datetimeFigureOut">
               <a:rPr lang="ru-RU" smtClean="0"/>
-              <a:t>23.10.2025</a:t>
+              <a:t>19.10.2026</a:t>
             </a:fld>
             <a:endParaRPr lang="ru-RU"/>
           </a:p>
@@ -8902,7 +9861,7 @@
           <a:p>
             <a:fld id="{12C63722-5D9F-4E99-9720-9B6A0C7BB1C9}" type="datetimeFigureOut">
               <a:rPr lang="ru-RU" smtClean="0"/>
-              <a:t>23.10.2025</a:t>
+              <a:t>19.10.2026</a:t>
             </a:fld>
             <a:endParaRPr lang="ru-RU"/>
           </a:p>
@@ -9142,7 +10101,7 @@
           <a:p>
             <a:fld id="{12C63722-5D9F-4E99-9720-9B6A0C7BB1C9}" type="datetimeFigureOut">
               <a:rPr lang="ru-RU" smtClean="0"/>
-              <a:t>23.10.2025</a:t>
+              <a:t>19.10.2026</a:t>
             </a:fld>
             <a:endParaRPr lang="ru-RU"/>
           </a:p>
@@ -9509,7 +10468,7 @@
           <a:p>
             <a:fld id="{12C63722-5D9F-4E99-9720-9B6A0C7BB1C9}" type="datetimeFigureOut">
               <a:rPr lang="ru-RU" smtClean="0"/>
-              <a:t>23.10.2025</a:t>
+              <a:t>19.10.2026</a:t>
             </a:fld>
             <a:endParaRPr lang="ru-RU"/>
           </a:p>
@@ -9627,7 +10586,7 @@
           <a:p>
             <a:fld id="{12C63722-5D9F-4E99-9720-9B6A0C7BB1C9}" type="datetimeFigureOut">
               <a:rPr lang="ru-RU" smtClean="0"/>
-              <a:t>23.10.2025</a:t>
+              <a:t>19.10.2026</a:t>
             </a:fld>
             <a:endParaRPr lang="ru-RU"/>
           </a:p>
@@ -9722,7 +10681,7 @@
           <a:p>
             <a:fld id="{12C63722-5D9F-4E99-9720-9B6A0C7BB1C9}" type="datetimeFigureOut">
               <a:rPr lang="ru-RU" smtClean="0"/>
-              <a:t>23.10.2025</a:t>
+              <a:t>19.10.2026</a:t>
             </a:fld>
             <a:endParaRPr lang="ru-RU"/>
           </a:p>
@@ -9999,7 +10958,7 @@
           <a:p>
             <a:fld id="{12C63722-5D9F-4E99-9720-9B6A0C7BB1C9}" type="datetimeFigureOut">
               <a:rPr lang="ru-RU" smtClean="0"/>
-              <a:t>23.10.2025</a:t>
+              <a:t>19.10.2026</a:t>
             </a:fld>
             <a:endParaRPr lang="ru-RU"/>
           </a:p>
@@ -10252,7 +11211,7 @@
           <a:p>
             <a:fld id="{12C63722-5D9F-4E99-9720-9B6A0C7BB1C9}" type="datetimeFigureOut">
               <a:rPr lang="ru-RU" smtClean="0"/>
-              <a:t>23.10.2025</a:t>
+              <a:t>19.10.2026</a:t>
             </a:fld>
             <a:endParaRPr lang="ru-RU"/>
           </a:p>
@@ -10465,7 +11424,7 @@
           <a:p>
             <a:fld id="{12C63722-5D9F-4E99-9720-9B6A0C7BB1C9}" type="datetimeFigureOut">
               <a:rPr lang="ru-RU" smtClean="0"/>
-              <a:t>23.10.2025</a:t>
+              <a:t>19.10.2026</a:t>
             </a:fld>
             <a:endParaRPr lang="ru-RU"/>
           </a:p>
@@ -11005,7 +11964,7 @@
           <a:p>
             <a:fld id="{8C218C88-2408-4CFC-B25C-07450930B282}" type="datetimeFigureOut">
               <a:rPr lang="ru-RU" smtClean="0"/>
-              <a:t>23.10.2025</a:t>
+              <a:t>19.10.2026</a:t>
             </a:fld>
             <a:endParaRPr lang="ru-RU"/>
           </a:p>
@@ -19611,11 +20570,17 @@
           <p:cNvGraphicFramePr>
             <a:graphicFrameLocks noGrp="1"/>
           </p:cNvGraphicFramePr>
-          <p:nvPr/>
+          <p:nvPr>
+            <p:extLst>
+              <p:ext uri="{D42A27DB-BD31-4B8C-83A1-F6EECF244321}">
+                <p14:modId xmlns:p14="http://schemas.microsoft.com/office/powerpoint/2010/main" val="1584422873"/>
+              </p:ext>
+            </p:extLst>
+          </p:nvPr>
         </p:nvGraphicFramePr>
         <p:xfrm>
           <a:off x="0" y="365760"/>
-          <a:ext cx="12192000" cy="4754880"/>
+          <a:ext cx="12192000" cy="5577840"/>
         </p:xfrm>
         <a:graphic>
           <a:graphicData uri="http://schemas.openxmlformats.org/drawingml/2006/table">
@@ -19913,6 +20878,27 @@
                         <a:rPr lang="en-US" baseline="0" dirty="0"/>
                         <a:t> itself?</a:t>
                       </a:r>
+                    </a:p>
+                    <a:p>
+                      <a:pPr marL="0" indent="0">
+                        <a:buFont typeface="Arial" panose="020B0604020202020204" pitchFamily="34" charset="0"/>
+                        <a:buNone/>
+                      </a:pPr>
+                      <a:endParaRPr lang="en-US" baseline="0" dirty="0"/>
+                    </a:p>
+                    <a:p>
+                      <a:pPr marL="0" indent="0">
+                        <a:buFont typeface="Arial" panose="020B0604020202020204" pitchFamily="34" charset="0"/>
+                        <a:buNone/>
+                      </a:pPr>
+                      <a:endParaRPr lang="en-US" baseline="0" dirty="0"/>
+                    </a:p>
+                    <a:p>
+                      <a:pPr marL="0" indent="0">
+                        <a:buFont typeface="Arial" panose="020B0604020202020204" pitchFamily="34" charset="0"/>
+                        <a:buNone/>
+                      </a:pPr>
+                      <a:endParaRPr lang="en-US" baseline="0" dirty="0"/>
                     </a:p>
                     <a:p>
                       <a:pPr marL="0" indent="0">
@@ -20243,14 +21229,14 @@
           <p:nvPr>
             <p:extLst>
               <p:ext uri="{D42A27DB-BD31-4B8C-83A1-F6EECF244321}">
-                <p14:modId xmlns:p14="http://schemas.microsoft.com/office/powerpoint/2010/main" val="3205141675"/>
+                <p14:modId xmlns:p14="http://schemas.microsoft.com/office/powerpoint/2010/main" val="2779992443"/>
               </p:ext>
             </p:extLst>
           </p:nvPr>
         </p:nvGraphicFramePr>
         <p:xfrm>
           <a:off x="0" y="365760"/>
-          <a:ext cx="12192000" cy="5029200"/>
+          <a:ext cx="12192000" cy="5577840"/>
         </p:xfrm>
         <a:graphic>
           <a:graphicData uri="http://schemas.openxmlformats.org/drawingml/2006/table">
@@ -20629,6 +21615,20 @@
                         <a:rPr lang="en-US" baseline="0" dirty="0"/>
                         <a:t>.</a:t>
                       </a:r>
+                    </a:p>
+                    <a:p>
+                      <a:pPr marL="0" indent="0">
+                        <a:buFont typeface="Arial" panose="020B0604020202020204" pitchFamily="34" charset="0"/>
+                        <a:buNone/>
+                      </a:pPr>
+                      <a:endParaRPr lang="en-US" baseline="0" dirty="0"/>
+                    </a:p>
+                    <a:p>
+                      <a:pPr marL="0" indent="0">
+                        <a:buFont typeface="Arial" panose="020B0604020202020204" pitchFamily="34" charset="0"/>
+                        <a:buNone/>
+                      </a:pPr>
+                      <a:endParaRPr lang="en-US" baseline="0" dirty="0"/>
                     </a:p>
                     <a:p>
                       <a:pPr marL="0" indent="0">
@@ -20776,6 +21776,701 @@
         <p:cNvPr id="1" name="">
           <a:extLst>
             <a:ext uri="{FF2B5EF4-FFF2-40B4-BE49-F238E27FC236}">
+              <a16:creationId xmlns:a16="http://schemas.microsoft.com/office/drawing/2014/main" id="{49CDA2E9-E0AA-C6AC-238C-21A856266959}"/>
+            </a:ext>
+          </a:extLst>
+        </p:cNvPr>
+        <p:cNvGrpSpPr/>
+        <p:nvPr/>
+      </p:nvGrpSpPr>
+      <p:grpSpPr>
+        <a:xfrm>
+          <a:off x="0" y="0"/>
+          <a:ext cx="0" cy="0"/>
+          <a:chOff x="0" y="0"/>
+          <a:chExt cx="0" cy="0"/>
+        </a:xfrm>
+      </p:grpSpPr>
+      <p:graphicFrame>
+        <p:nvGraphicFramePr>
+          <p:cNvPr id="5" name="Table 4">
+            <a:extLst>
+              <a:ext uri="{FF2B5EF4-FFF2-40B4-BE49-F238E27FC236}">
+                <a16:creationId xmlns:a16="http://schemas.microsoft.com/office/drawing/2014/main" id="{769BD822-BE04-5591-D35A-447E201D0789}"/>
+              </a:ext>
+            </a:extLst>
+          </p:cNvPr>
+          <p:cNvGraphicFramePr>
+            <a:graphicFrameLocks noGrp="1"/>
+          </p:cNvGraphicFramePr>
+          <p:nvPr/>
+        </p:nvGraphicFramePr>
+        <p:xfrm>
+          <a:off x="0" y="1"/>
+          <a:ext cx="12192000" cy="365760"/>
+        </p:xfrm>
+        <a:graphic>
+          <a:graphicData uri="http://schemas.openxmlformats.org/drawingml/2006/table">
+            <a:tbl>
+              <a:tblPr firstRow="1" bandRow="1">
+                <a:tableStyleId>{5C22544A-7EE6-4342-B048-85BDC9FD1C3A}</a:tableStyleId>
+              </a:tblPr>
+              <a:tblGrid>
+                <a:gridCol w="12192000">
+                  <a:extLst>
+                    <a:ext uri="{9D8B030D-6E8A-4147-A177-3AD203B41FA5}">
+                      <a16:colId xmlns:a16="http://schemas.microsoft.com/office/drawing/2014/main" val="20000"/>
+                    </a:ext>
+                  </a:extLst>
+                </a:gridCol>
+              </a:tblGrid>
+              <a:tr h="321276">
+                <a:tc>
+                  <a:txBody>
+                    <a:bodyPr/>
+                    <a:lstStyle/>
+                    <a:p>
+                      <a:r>
+                        <a:rPr lang="en-US" sz="1800" dirty="0"/>
+                        <a:t>The basics of file systems</a:t>
+                      </a:r>
+                      <a:endParaRPr lang="ru-RU" dirty="0"/>
+                    </a:p>
+                  </a:txBody>
+                  <a:tcPr/>
+                </a:tc>
+                <a:extLst>
+                  <a:ext uri="{0D108BD9-81ED-4DB2-BD59-A6C34878D82A}">
+                    <a16:rowId xmlns:a16="http://schemas.microsoft.com/office/drawing/2014/main" val="10000"/>
+                  </a:ext>
+                </a:extLst>
+              </a:tr>
+            </a:tbl>
+          </a:graphicData>
+        </a:graphic>
+      </p:graphicFrame>
+      <p:graphicFrame>
+        <p:nvGraphicFramePr>
+          <p:cNvPr id="6" name="Table 5">
+            <a:extLst>
+              <a:ext uri="{FF2B5EF4-FFF2-40B4-BE49-F238E27FC236}">
+                <a16:creationId xmlns:a16="http://schemas.microsoft.com/office/drawing/2014/main" id="{D6CF994E-A764-F142-CD71-BF0AD17DE498}"/>
+              </a:ext>
+            </a:extLst>
+          </p:cNvPr>
+          <p:cNvGraphicFramePr>
+            <a:graphicFrameLocks noGrp="1"/>
+          </p:cNvGraphicFramePr>
+          <p:nvPr/>
+        </p:nvGraphicFramePr>
+        <p:xfrm>
+          <a:off x="0" y="6532604"/>
+          <a:ext cx="12192000" cy="365760"/>
+        </p:xfrm>
+        <a:graphic>
+          <a:graphicData uri="http://schemas.openxmlformats.org/drawingml/2006/table">
+            <a:tbl>
+              <a:tblPr firstRow="1" bandRow="1">
+                <a:tableStyleId>{5C22544A-7EE6-4342-B048-85BDC9FD1C3A}</a:tableStyleId>
+              </a:tblPr>
+              <a:tblGrid>
+                <a:gridCol w="12192000">
+                  <a:extLst>
+                    <a:ext uri="{9D8B030D-6E8A-4147-A177-3AD203B41FA5}">
+                      <a16:colId xmlns:a16="http://schemas.microsoft.com/office/drawing/2014/main" val="20000"/>
+                    </a:ext>
+                  </a:extLst>
+                </a:gridCol>
+              </a:tblGrid>
+              <a:tr h="308094">
+                <a:tc>
+                  <a:txBody>
+                    <a:bodyPr/>
+                    <a:lstStyle/>
+                    <a:p>
+                      <a:endParaRPr lang="ru-RU" dirty="0"/>
+                    </a:p>
+                  </a:txBody>
+                  <a:tcPr/>
+                </a:tc>
+                <a:extLst>
+                  <a:ext uri="{0D108BD9-81ED-4DB2-BD59-A6C34878D82A}">
+                    <a16:rowId xmlns:a16="http://schemas.microsoft.com/office/drawing/2014/main" val="10000"/>
+                  </a:ext>
+                </a:extLst>
+              </a:tr>
+            </a:tbl>
+          </a:graphicData>
+        </a:graphic>
+      </p:graphicFrame>
+      <p:graphicFrame>
+        <p:nvGraphicFramePr>
+          <p:cNvPr id="2" name="Table 1">
+            <a:extLst>
+              <a:ext uri="{FF2B5EF4-FFF2-40B4-BE49-F238E27FC236}">
+                <a16:creationId xmlns:a16="http://schemas.microsoft.com/office/drawing/2014/main" id="{15DFAD1D-63A5-D74A-4528-91B5D0CC0BD4}"/>
+              </a:ext>
+            </a:extLst>
+          </p:cNvPr>
+          <p:cNvGraphicFramePr>
+            <a:graphicFrameLocks noGrp="1"/>
+          </p:cNvGraphicFramePr>
+          <p:nvPr>
+            <p:extLst>
+              <p:ext uri="{D42A27DB-BD31-4B8C-83A1-F6EECF244321}">
+                <p14:modId xmlns:p14="http://schemas.microsoft.com/office/powerpoint/2010/main" val="4232568329"/>
+              </p:ext>
+            </p:extLst>
+          </p:nvPr>
+        </p:nvGraphicFramePr>
+        <p:xfrm>
+          <a:off x="0" y="365760"/>
+          <a:ext cx="12192000" cy="5577840"/>
+        </p:xfrm>
+        <a:graphic>
+          <a:graphicData uri="http://schemas.openxmlformats.org/drawingml/2006/table">
+            <a:tbl>
+              <a:tblPr firstRow="1" bandRow="1">
+                <a:tableStyleId>{3B4B98B0-60AC-42C2-AFA5-B58CD77FA1E5}</a:tableStyleId>
+              </a:tblPr>
+              <a:tblGrid>
+                <a:gridCol w="12192000">
+                  <a:extLst>
+                    <a:ext uri="{9D8B030D-6E8A-4147-A177-3AD203B41FA5}">
+                      <a16:colId xmlns:a16="http://schemas.microsoft.com/office/drawing/2014/main" val="20000"/>
+                    </a:ext>
+                  </a:extLst>
+                </a:gridCol>
+              </a:tblGrid>
+              <a:tr h="216655">
+                <a:tc>
+                  <a:txBody>
+                    <a:bodyPr/>
+                    <a:lstStyle/>
+                    <a:p>
+                      <a:r>
+                        <a:rPr lang="en-US" dirty="0"/>
+                        <a:t>Page cache and </a:t>
+                      </a:r>
+                      <a:r>
+                        <a:rPr lang="en-US" baseline="0" dirty="0"/>
+                        <a:t>writeback</a:t>
+                      </a:r>
+                      <a:endParaRPr lang="ru-RU" dirty="0"/>
+                    </a:p>
+                  </a:txBody>
+                  <a:tcPr/>
+                </a:tc>
+                <a:extLst>
+                  <a:ext uri="{0D108BD9-81ED-4DB2-BD59-A6C34878D82A}">
+                    <a16:rowId xmlns:a16="http://schemas.microsoft.com/office/drawing/2014/main" val="10000"/>
+                  </a:ext>
+                </a:extLst>
+              </a:tr>
+              <a:tr h="433310">
+                <a:tc>
+                  <a:txBody>
+                    <a:bodyPr/>
+                    <a:lstStyle/>
+                    <a:p>
+                      <a:pPr marL="285750" indent="-285750">
+                        <a:buFont typeface="Arial" panose="020B0604020202020204" pitchFamily="34" charset="0"/>
+                        <a:buChar char="•"/>
+                      </a:pPr>
+                      <a:r>
+                        <a:rPr lang="en-US" baseline="0" dirty="0"/>
+                        <a:t>System calls like </a:t>
+                      </a:r>
+                      <a:r>
+                        <a:rPr lang="en-US" baseline="0" dirty="0">
+                          <a:latin typeface="Consolas" panose="020B0609020204030204" pitchFamily="49" charset="0"/>
+                          <a:cs typeface="Consolas" panose="020B0609020204030204" pitchFamily="49" charset="0"/>
+                        </a:rPr>
+                        <a:t>read()</a:t>
+                      </a:r>
+                      <a:r>
+                        <a:rPr lang="en-US" baseline="0" dirty="0"/>
+                        <a:t> and </a:t>
+                      </a:r>
+                      <a:r>
+                        <a:rPr lang="en-US" baseline="0" dirty="0">
+                          <a:latin typeface="Consolas" panose="020B0609020204030204" pitchFamily="49" charset="0"/>
+                          <a:cs typeface="Consolas" panose="020B0609020204030204" pitchFamily="49" charset="0"/>
+                        </a:rPr>
+                        <a:t>write()</a:t>
+                      </a:r>
+                      <a:r>
+                        <a:rPr lang="en-US" baseline="0" dirty="0"/>
+                        <a:t> copy data between application buffers and the page cache in the kernel. The page cache works like a memory-mapped file. File pages are faulted into the page cache when accessed.</a:t>
+                      </a:r>
+                    </a:p>
+                    <a:p>
+                      <a:pPr marL="285750" indent="-285750">
+                        <a:buFont typeface="Arial" panose="020B0604020202020204" pitchFamily="34" charset="0"/>
+                        <a:buChar char="•"/>
+                      </a:pPr>
+                      <a:r>
+                        <a:rPr lang="en-US" baseline="0" dirty="0"/>
+                        <a:t>Unlike CPU instruction that load and store values, system calls have a return value and can signal IO errors.</a:t>
+                      </a:r>
+                      <a:endParaRPr lang="ru-RU" baseline="0" dirty="0"/>
+                    </a:p>
+                    <a:p>
+                      <a:pPr marL="285750" indent="-285750">
+                        <a:buFont typeface="Arial" panose="020B0604020202020204" pitchFamily="34" charset="0"/>
+                        <a:buChar char="•"/>
+                      </a:pPr>
+                      <a:r>
+                        <a:rPr lang="en-US" baseline="0" dirty="0"/>
+                        <a:t>By calling</a:t>
+                      </a:r>
+                      <a:r>
+                        <a:rPr lang="ru-RU" baseline="0" dirty="0"/>
+                        <a:t> </a:t>
+                      </a:r>
+                      <a:r>
+                        <a:rPr lang="en-US" baseline="0" dirty="0" err="1">
+                          <a:latin typeface="Consolas" panose="020B0609020204030204" pitchFamily="49" charset="0"/>
+                          <a:cs typeface="Consolas" panose="020B0609020204030204" pitchFamily="49" charset="0"/>
+                        </a:rPr>
+                        <a:t>fsync</a:t>
+                      </a:r>
+                      <a:r>
+                        <a:rPr lang="en-US" baseline="0" dirty="0">
+                          <a:latin typeface="Consolas" panose="020B0609020204030204" pitchFamily="49" charset="0"/>
+                          <a:cs typeface="Consolas" panose="020B0609020204030204" pitchFamily="49" charset="0"/>
+                        </a:rPr>
+                        <a:t>()</a:t>
+                      </a:r>
+                      <a:r>
+                        <a:rPr lang="en-US" baseline="0" dirty="0"/>
+                        <a:t>, an application requests the page cache to write all dirty (modified) pages to the disk.</a:t>
+                      </a:r>
+                    </a:p>
+                  </a:txBody>
+                  <a:tcPr/>
+                </a:tc>
+                <a:extLst>
+                  <a:ext uri="{0D108BD9-81ED-4DB2-BD59-A6C34878D82A}">
+                    <a16:rowId xmlns:a16="http://schemas.microsoft.com/office/drawing/2014/main" val="10001"/>
+                  </a:ext>
+                </a:extLst>
+              </a:tr>
+              <a:tr h="433310">
+                <a:tc>
+                  <a:txBody>
+                    <a:bodyPr/>
+                    <a:lstStyle/>
+                    <a:p>
+                      <a:pPr marL="0" indent="0">
+                        <a:buFont typeface="Arial" panose="020B0604020202020204" pitchFamily="34" charset="0"/>
+                        <a:buNone/>
+                      </a:pPr>
+                      <a:r>
+                        <a:rPr lang="en-US" baseline="0" dirty="0"/>
+                        <a:t>When can an application detect a write error</a:t>
+                      </a:r>
+                      <a:r>
+                        <a:rPr lang="ru-RU" baseline="0" dirty="0"/>
+                        <a:t>?</a:t>
+                      </a:r>
+                      <a:endParaRPr lang="en-US" baseline="0" dirty="0"/>
+                    </a:p>
+                    <a:p>
+                      <a:pPr marL="285750" indent="-285750">
+                        <a:buFont typeface="Arial" panose="020B0604020202020204" pitchFamily="34" charset="0"/>
+                        <a:buChar char="•"/>
+                      </a:pPr>
+                      <a:r>
+                        <a:rPr lang="en-US" baseline="0" dirty="0"/>
+                        <a:t>When calling</a:t>
+                      </a:r>
+                      <a:r>
+                        <a:rPr lang="ru-RU" baseline="0" dirty="0"/>
+                        <a:t> </a:t>
+                      </a:r>
+                      <a:r>
+                        <a:rPr lang="en-US" baseline="0" dirty="0" err="1">
+                          <a:latin typeface="Consolas" panose="020B0609020204030204" pitchFamily="49" charset="0"/>
+                          <a:cs typeface="Consolas" panose="020B0609020204030204" pitchFamily="49" charset="0"/>
+                        </a:rPr>
+                        <a:t>fsync</a:t>
+                      </a:r>
+                      <a:r>
+                        <a:rPr lang="en-US" baseline="0" dirty="0">
+                          <a:latin typeface="Consolas" panose="020B0609020204030204" pitchFamily="49" charset="0"/>
+                          <a:cs typeface="Consolas" panose="020B0609020204030204" pitchFamily="49" charset="0"/>
+                        </a:rPr>
+                        <a:t>()</a:t>
+                      </a:r>
+                      <a:r>
+                        <a:rPr lang="en-US" baseline="0" dirty="0"/>
+                        <a:t>,</a:t>
+                      </a:r>
+                    </a:p>
+                    <a:p>
+                      <a:pPr marL="285750" indent="-285750">
+                        <a:buFont typeface="Arial" panose="020B0604020202020204" pitchFamily="34" charset="0"/>
+                        <a:buChar char="•"/>
+                      </a:pPr>
+                      <a:r>
+                        <a:rPr lang="en-US" baseline="0" dirty="0"/>
+                        <a:t>When calling</a:t>
+                      </a:r>
+                      <a:r>
+                        <a:rPr lang="ru-RU" baseline="0" dirty="0"/>
+                        <a:t> </a:t>
+                      </a:r>
+                      <a:r>
+                        <a:rPr lang="en-US" baseline="0" dirty="0">
+                          <a:latin typeface="Consolas" panose="020B0609020204030204" pitchFamily="49" charset="0"/>
+                          <a:cs typeface="Consolas" panose="020B0609020204030204" pitchFamily="49" charset="0"/>
+                        </a:rPr>
+                        <a:t>write()</a:t>
+                      </a:r>
+                      <a:r>
+                        <a:rPr lang="ru-RU" baseline="0" dirty="0"/>
+                        <a:t>, </a:t>
+                      </a:r>
+                      <a:r>
+                        <a:rPr lang="en-US" baseline="0" dirty="0"/>
+                        <a:t>if the system is low on RAM and</a:t>
+                      </a:r>
+                      <a:r>
+                        <a:rPr lang="ru-RU" baseline="0" dirty="0"/>
+                        <a:t> </a:t>
+                      </a:r>
+                      <a:r>
+                        <a:rPr lang="en-US" baseline="0" dirty="0">
+                          <a:latin typeface="Consolas" panose="020B0609020204030204" pitchFamily="49" charset="0"/>
+                          <a:cs typeface="Consolas" panose="020B0609020204030204" pitchFamily="49" charset="0"/>
+                        </a:rPr>
+                        <a:t>write()</a:t>
+                      </a:r>
+                      <a:r>
+                        <a:rPr lang="en-US" baseline="0" dirty="0"/>
+                        <a:t> triggers</a:t>
+                      </a:r>
+                      <a:r>
+                        <a:rPr lang="ru-RU" baseline="0" dirty="0"/>
+                        <a:t> </a:t>
+                      </a:r>
+                      <a:r>
+                        <a:rPr lang="en-US" baseline="0" dirty="0"/>
+                        <a:t>writeback,</a:t>
+                      </a:r>
+                    </a:p>
+                    <a:p>
+                      <a:pPr marL="285750" indent="-285750">
+                        <a:buFont typeface="Arial" panose="020B0604020202020204" pitchFamily="34" charset="0"/>
+                        <a:buChar char="•"/>
+                      </a:pPr>
+                      <a:r>
+                        <a:rPr lang="en-US" baseline="0" dirty="0"/>
+                        <a:t>(Possibly) when calling*</a:t>
+                      </a:r>
+                      <a:r>
+                        <a:rPr lang="ru-RU" baseline="0" dirty="0"/>
+                        <a:t> </a:t>
+                      </a:r>
+                      <a:r>
+                        <a:rPr lang="en-US" baseline="0" dirty="0">
+                          <a:latin typeface="Consolas" panose="020B0609020204030204" pitchFamily="49" charset="0"/>
+                          <a:cs typeface="Consolas" panose="020B0609020204030204" pitchFamily="49" charset="0"/>
+                        </a:rPr>
+                        <a:t>close()</a:t>
+                      </a:r>
+                      <a:r>
+                        <a:rPr lang="en-US" baseline="0" dirty="0"/>
+                        <a:t>.</a:t>
+                      </a:r>
+                    </a:p>
+                  </a:txBody>
+                  <a:tcPr/>
+                </a:tc>
+                <a:extLst>
+                  <a:ext uri="{0D108BD9-81ED-4DB2-BD59-A6C34878D82A}">
+                    <a16:rowId xmlns:a16="http://schemas.microsoft.com/office/drawing/2014/main" val="2001293846"/>
+                  </a:ext>
+                </a:extLst>
+              </a:tr>
+              <a:tr h="433310">
+                <a:tc>
+                  <a:txBody>
+                    <a:bodyPr/>
+                    <a:lstStyle/>
+                    <a:p>
+                      <a:pPr marL="0" indent="0">
+                        <a:buFont typeface="Arial" panose="020B0604020202020204" pitchFamily="34" charset="0"/>
+                        <a:buNone/>
+                      </a:pPr>
+                      <a:r>
+                        <a:rPr lang="en-US" baseline="0" dirty="0"/>
+                        <a:t>Why do OSes not do IO immediately in</a:t>
+                      </a:r>
+                      <a:r>
+                        <a:rPr lang="ru-RU" baseline="0" dirty="0"/>
+                        <a:t> </a:t>
+                      </a:r>
+                      <a:r>
+                        <a:rPr lang="en-US" baseline="0" dirty="0">
+                          <a:latin typeface="Consolas" panose="020B0609020204030204" pitchFamily="49" charset="0"/>
+                          <a:cs typeface="Consolas" panose="020B0609020204030204" pitchFamily="49" charset="0"/>
+                        </a:rPr>
+                        <a:t>write()</a:t>
+                      </a:r>
+                      <a:r>
+                        <a:rPr lang="en-US" baseline="0" dirty="0"/>
+                        <a:t> itself?</a:t>
+                      </a:r>
+                    </a:p>
+                    <a:p>
+                      <a:pPr marL="285750" indent="-285750">
+                        <a:buFont typeface="Arial" panose="020B0604020202020204" pitchFamily="34" charset="0"/>
+                        <a:buChar char="•"/>
+                      </a:pPr>
+                      <a:r>
+                        <a:rPr lang="en-US" baseline="0" dirty="0"/>
+                        <a:t>Multiple writes or re-writes to a file may be coalesced into a single write to a disk,</a:t>
+                      </a:r>
+                    </a:p>
+                    <a:p>
+                      <a:pPr marL="285750" indent="-285750">
+                        <a:buFont typeface="Arial" panose="020B0604020202020204" pitchFamily="34" charset="0"/>
+                        <a:buChar char="•"/>
+                      </a:pPr>
+                      <a:r>
+                        <a:rPr lang="en-US" baseline="0" dirty="0"/>
+                        <a:t>It becomes possible to issue fewer IO requests to a disk, and make them longer,</a:t>
+                      </a:r>
+                      <a:endParaRPr lang="ru-RU" baseline="0" dirty="0"/>
+                    </a:p>
+                    <a:p>
+                      <a:pPr marL="285750" indent="-285750">
+                        <a:buFont typeface="Arial" panose="020B0604020202020204" pitchFamily="34" charset="0"/>
+                        <a:buChar char="•"/>
+                      </a:pPr>
+                      <a:r>
+                        <a:rPr lang="en-US" baseline="0" dirty="0"/>
+                        <a:t>File systems can do “delayed allocation” to decrease the fragmentation of files.</a:t>
+                      </a:r>
+                    </a:p>
+                    <a:p>
+                      <a:pPr marL="285750" indent="-285750">
+                        <a:buFont typeface="Arial" panose="020B0604020202020204" pitchFamily="34" charset="0"/>
+                        <a:buChar char="•"/>
+                      </a:pPr>
+                      <a:endParaRPr lang="en-US" baseline="0" dirty="0"/>
+                    </a:p>
+                    <a:p>
+                      <a:pPr marL="0" indent="0">
+                        <a:buFont typeface="Arial" panose="020B0604020202020204" pitchFamily="34" charset="0"/>
+                        <a:buNone/>
+                      </a:pPr>
+                      <a:r>
+                        <a:rPr lang="en-US" baseline="0" dirty="0"/>
+                        <a:t>Delaying the IO also has downsides. For example, it may introduce thrashing and make it impossible to control the time it takes to call </a:t>
+                      </a:r>
+                      <a:r>
+                        <a:rPr lang="en-US" baseline="0" dirty="0">
+                          <a:latin typeface="Consolas" panose="020B0609020204030204" pitchFamily="49" charset="0"/>
+                          <a:cs typeface="Consolas" panose="020B0609020204030204" pitchFamily="49" charset="0"/>
+                        </a:rPr>
+                        <a:t>write()</a:t>
+                      </a:r>
+                      <a:r>
+                        <a:rPr lang="en-US" baseline="0" dirty="0"/>
+                        <a:t> and</a:t>
+                      </a:r>
+                      <a:r>
+                        <a:rPr lang="ru-RU" baseline="0" dirty="0"/>
+                        <a:t> </a:t>
+                      </a:r>
+                      <a:r>
+                        <a:rPr lang="en-US" baseline="0" dirty="0" err="1">
+                          <a:latin typeface="Consolas" panose="020B0609020204030204" pitchFamily="49" charset="0"/>
+                          <a:cs typeface="Consolas" panose="020B0609020204030204" pitchFamily="49" charset="0"/>
+                        </a:rPr>
+                        <a:t>fsync</a:t>
+                      </a:r>
+                      <a:r>
+                        <a:rPr lang="en-US" baseline="0" dirty="0">
+                          <a:latin typeface="Consolas" panose="020B0609020204030204" pitchFamily="49" charset="0"/>
+                          <a:cs typeface="Consolas" panose="020B0609020204030204" pitchFamily="49" charset="0"/>
+                        </a:rPr>
+                        <a:t>()</a:t>
+                      </a:r>
+                      <a:r>
+                        <a:rPr lang="en-US" baseline="0" dirty="0"/>
+                        <a:t>.</a:t>
+                      </a:r>
+                    </a:p>
+                    <a:p>
+                      <a:pPr marL="0" indent="0">
+                        <a:buFont typeface="Arial" panose="020B0604020202020204" pitchFamily="34" charset="0"/>
+                        <a:buNone/>
+                      </a:pPr>
+                      <a:endParaRPr lang="en-US" baseline="0" dirty="0"/>
+                    </a:p>
+                    <a:p>
+                      <a:pPr marL="0" indent="0">
+                        <a:buFont typeface="Arial" panose="020B0604020202020204" pitchFamily="34" charset="0"/>
+                        <a:buNone/>
+                      </a:pPr>
+                      <a:r>
+                        <a:rPr lang="en-US" baseline="0" dirty="0"/>
+                        <a:t>See </a:t>
+                      </a:r>
+                      <a:r>
+                        <a:rPr lang="en-US" baseline="0" dirty="0">
+                          <a:hlinkClick r:id="rId3"/>
+                        </a:rPr>
+                        <a:t>https://github.com/golang/go/issues/79664#issuecomment-5139068484</a:t>
+                      </a:r>
+                      <a:r>
+                        <a:rPr lang="en-US" baseline="0" dirty="0"/>
+                        <a:t> to see how important it is to have uniform latencies.</a:t>
+                      </a:r>
+                    </a:p>
+                  </a:txBody>
+                  <a:tcPr/>
+                </a:tc>
+                <a:extLst>
+                  <a:ext uri="{0D108BD9-81ED-4DB2-BD59-A6C34878D82A}">
+                    <a16:rowId xmlns:a16="http://schemas.microsoft.com/office/drawing/2014/main" val="2418925043"/>
+                  </a:ext>
+                </a:extLst>
+              </a:tr>
+            </a:tbl>
+          </a:graphicData>
+        </a:graphic>
+      </p:graphicFrame>
+      <p:sp>
+        <p:nvSpPr>
+          <p:cNvPr id="3" name="TextBox 2">
+            <a:extLst>
+              <a:ext uri="{FF2B5EF4-FFF2-40B4-BE49-F238E27FC236}">
+                <a16:creationId xmlns:a16="http://schemas.microsoft.com/office/drawing/2014/main" id="{F02B9262-8551-80E3-EC48-4A51EF363446}"/>
+              </a:ext>
+            </a:extLst>
+          </p:cNvPr>
+          <p:cNvSpPr txBox="1"/>
+          <p:nvPr/>
+        </p:nvSpPr>
+        <p:spPr>
+          <a:xfrm>
+            <a:off x="0" y="6092846"/>
+            <a:ext cx="12192000" cy="369332"/>
+          </a:xfrm>
+          <a:prstGeom prst="rect">
+            <a:avLst/>
+          </a:prstGeom>
+          <a:noFill/>
+        </p:spPr>
+        <p:txBody>
+          <a:bodyPr wrap="square" rtlCol="0">
+            <a:spAutoFit/>
+          </a:bodyPr>
+          <a:lstStyle/>
+          <a:p>
+            <a:r>
+              <a:rPr lang="en-CY" i="1" dirty="0">
+                <a:solidFill>
+                  <a:schemeClr val="bg1">
+                    <a:lumMod val="75000"/>
+                  </a:schemeClr>
+                </a:solidFill>
+              </a:rPr>
+              <a:t>* </a:t>
+            </a:r>
+            <a:r>
+              <a:rPr lang="en-GB" i="1" dirty="0">
+                <a:solidFill>
+                  <a:schemeClr val="bg1">
+                    <a:lumMod val="75000"/>
+                  </a:schemeClr>
+                </a:solidFill>
+              </a:rPr>
+              <a:t>T</a:t>
+            </a:r>
+            <a:r>
+              <a:rPr lang="en-CY" i="1" dirty="0">
+                <a:solidFill>
+                  <a:schemeClr val="bg1">
+                    <a:lumMod val="75000"/>
+                  </a:schemeClr>
+                </a:solidFill>
+              </a:rPr>
+              <a:t>his is a very unfortunate API design. The only sure way is to call </a:t>
+            </a:r>
+            <a:r>
+              <a:rPr lang="en-CY" i="1" dirty="0">
+                <a:solidFill>
+                  <a:schemeClr val="bg1">
+                    <a:lumMod val="75000"/>
+                  </a:schemeClr>
+                </a:solidFill>
+                <a:latin typeface="Consolas" panose="020B0609020204030204" pitchFamily="49" charset="0"/>
+                <a:cs typeface="Consolas" panose="020B0609020204030204" pitchFamily="49" charset="0"/>
+              </a:rPr>
+              <a:t>fsync()</a:t>
+            </a:r>
+            <a:r>
+              <a:rPr lang="en-CY" i="1" dirty="0">
+                <a:solidFill>
+                  <a:schemeClr val="bg1">
+                    <a:lumMod val="75000"/>
+                  </a:schemeClr>
+                </a:solidFill>
+              </a:rPr>
+              <a:t> before </a:t>
+            </a:r>
+            <a:r>
+              <a:rPr lang="en-CY" i="1" dirty="0">
+                <a:solidFill>
+                  <a:schemeClr val="bg1">
+                    <a:lumMod val="75000"/>
+                  </a:schemeClr>
+                </a:solidFill>
+                <a:latin typeface="Consolas" panose="020B0609020204030204" pitchFamily="49" charset="0"/>
+                <a:cs typeface="Consolas" panose="020B0609020204030204" pitchFamily="49" charset="0"/>
+              </a:rPr>
+              <a:t>close()</a:t>
+            </a:r>
+            <a:r>
+              <a:rPr lang="en-CY" i="1" dirty="0">
+                <a:solidFill>
+                  <a:schemeClr val="bg1">
+                    <a:lumMod val="75000"/>
+                  </a:schemeClr>
+                </a:solidFill>
+              </a:rPr>
+              <a:t>.</a:t>
+            </a:r>
+          </a:p>
+        </p:txBody>
+      </p:sp>
+    </p:spTree>
+    <p:extLst>
+      <p:ext uri="{BB962C8B-B14F-4D97-AF65-F5344CB8AC3E}">
+        <p14:creationId xmlns:p14="http://schemas.microsoft.com/office/powerpoint/2010/main" val="2349924840"/>
+      </p:ext>
+    </p:extLst>
+  </p:cSld>
+  <p:clrMapOvr>
+    <a:masterClrMapping/>
+  </p:clrMapOvr>
+</p:sld>
+</file>
+
+<file path=ppt/slides/slide26.xml><?xml version="1.0" encoding="utf-8"?>
+<p:sld xmlns:a="http://schemas.openxmlformats.org/drawingml/2006/main" xmlns:r="http://schemas.openxmlformats.org/officeDocument/2006/relationships" xmlns:p="http://schemas.openxmlformats.org/presentationml/2006/main">
+  <p:cSld>
+    <p:spTree>
+      <p:nvGrpSpPr>
+        <p:cNvPr id="1" name="">
+          <a:extLst>
+            <a:ext uri="{FF2B5EF4-FFF2-40B4-BE49-F238E27FC236}">
               <a16:creationId xmlns:a16="http://schemas.microsoft.com/office/drawing/2014/main" id="{0CC491D0-7C51-FFBC-08CF-7F8F403A3AF8}"/>
             </a:ext>
           </a:extLst>
@@ -20918,14 +22613,14 @@
           <p:nvPr>
             <p:extLst>
               <p:ext uri="{D42A27DB-BD31-4B8C-83A1-F6EECF244321}">
-                <p14:modId xmlns:p14="http://schemas.microsoft.com/office/powerpoint/2010/main" val="936725087"/>
+                <p14:modId xmlns:p14="http://schemas.microsoft.com/office/powerpoint/2010/main" val="433596855"/>
               </p:ext>
             </p:extLst>
           </p:nvPr>
         </p:nvGraphicFramePr>
         <p:xfrm>
           <a:off x="0" y="365760"/>
-          <a:ext cx="12192000" cy="5029200"/>
+          <a:ext cx="12192000" cy="5577840"/>
         </p:xfrm>
         <a:graphic>
           <a:graphicData uri="http://schemas.openxmlformats.org/drawingml/2006/table">
@@ -21324,6 +23019,20 @@
                         <a:rPr lang="en-US" baseline="0" dirty="0"/>
                         <a:t>.</a:t>
                       </a:r>
+                    </a:p>
+                    <a:p>
+                      <a:pPr marL="0" indent="0">
+                        <a:buFont typeface="Arial" panose="020B0604020202020204" pitchFamily="34" charset="0"/>
+                        <a:buNone/>
+                      </a:pPr>
+                      <a:endParaRPr lang="en-US" baseline="0" dirty="0"/>
+                    </a:p>
+                    <a:p>
+                      <a:pPr marL="0" indent="0">
+                        <a:buFont typeface="Arial" panose="020B0604020202020204" pitchFamily="34" charset="0"/>
+                        <a:buNone/>
+                      </a:pPr>
+                      <a:endParaRPr lang="en-US" baseline="0" dirty="0"/>
                     </a:p>
                   </a:txBody>
                   <a:tcPr/>
@@ -21456,7 +23165,7 @@
 </p:sld>
 </file>
 
-<file path=ppt/slides/slide26.xml><?xml version="1.0" encoding="utf-8"?>
+<file path=ppt/slides/slide27.xml><?xml version="1.0" encoding="utf-8"?>
 <p:sld xmlns:a="http://schemas.openxmlformats.org/drawingml/2006/main" xmlns:r="http://schemas.openxmlformats.org/officeDocument/2006/relationships" xmlns:p="http://schemas.openxmlformats.org/presentationml/2006/main">
   <p:cSld>
     <p:spTree>
@@ -21892,7 +23601,7 @@
 </p:sld>
 </file>
 
-<file path=ppt/slides/slide27.xml><?xml version="1.0" encoding="utf-8"?>
+<file path=ppt/slides/slide28.xml><?xml version="1.0" encoding="utf-8"?>
 <p:sld xmlns:a="http://schemas.openxmlformats.org/drawingml/2006/main" xmlns:r="http://schemas.openxmlformats.org/officeDocument/2006/relationships" xmlns:p="http://schemas.openxmlformats.org/presentationml/2006/main">
   <p:cSld>
     <p:spTree>
@@ -22341,7 +24050,7 @@
 </p:sld>
 </file>
 
-<file path=ppt/slides/slide28.xml><?xml version="1.0" encoding="utf-8"?>
+<file path=ppt/slides/slide29.xml><?xml version="1.0" encoding="utf-8"?>
 <p:sld xmlns:a="http://schemas.openxmlformats.org/drawingml/2006/main" xmlns:r="http://schemas.openxmlformats.org/officeDocument/2006/relationships" xmlns:p="http://schemas.openxmlformats.org/presentationml/2006/main">
   <p:cSld>
     <p:spTree>
@@ -22553,752 +24262,6 @@
     <p:extLst>
       <p:ext uri="{BB962C8B-B14F-4D97-AF65-F5344CB8AC3E}">
         <p14:creationId xmlns:p14="http://schemas.microsoft.com/office/powerpoint/2010/main" val="607622979"/>
-      </p:ext>
-    </p:extLst>
-  </p:cSld>
-  <p:clrMapOvr>
-    <a:masterClrMapping/>
-  </p:clrMapOvr>
-</p:sld>
-</file>
-
-<file path=ppt/slides/slide29.xml><?xml version="1.0" encoding="utf-8"?>
-<p:sld xmlns:a="http://schemas.openxmlformats.org/drawingml/2006/main" xmlns:r="http://schemas.openxmlformats.org/officeDocument/2006/relationships" xmlns:p="http://schemas.openxmlformats.org/presentationml/2006/main">
-  <p:cSld>
-    <p:spTree>
-      <p:nvGrpSpPr>
-        <p:cNvPr id="1" name=""/>
-        <p:cNvGrpSpPr/>
-        <p:nvPr/>
-      </p:nvGrpSpPr>
-      <p:grpSpPr>
-        <a:xfrm>
-          <a:off x="0" y="0"/>
-          <a:ext cx="0" cy="0"/>
-          <a:chOff x="0" y="0"/>
-          <a:chExt cx="0" cy="0"/>
-        </a:xfrm>
-      </p:grpSpPr>
-      <p:graphicFrame>
-        <p:nvGraphicFramePr>
-          <p:cNvPr id="5" name="Table 4"/>
-          <p:cNvGraphicFramePr>
-            <a:graphicFrameLocks noGrp="1"/>
-          </p:cNvGraphicFramePr>
-          <p:nvPr>
-            <p:extLst>
-              <p:ext uri="{D42A27DB-BD31-4B8C-83A1-F6EECF244321}">
-                <p14:modId xmlns:p14="http://schemas.microsoft.com/office/powerpoint/2010/main" val="2562019265"/>
-              </p:ext>
-            </p:extLst>
-          </p:nvPr>
-        </p:nvGraphicFramePr>
-        <p:xfrm>
-          <a:off x="0" y="1"/>
-          <a:ext cx="12192000" cy="365760"/>
-        </p:xfrm>
-        <a:graphic>
-          <a:graphicData uri="http://schemas.openxmlformats.org/drawingml/2006/table">
-            <a:tbl>
-              <a:tblPr firstRow="1" bandRow="1">
-                <a:tableStyleId>{5C22544A-7EE6-4342-B048-85BDC9FD1C3A}</a:tableStyleId>
-              </a:tblPr>
-              <a:tblGrid>
-                <a:gridCol w="12192000">
-                  <a:extLst>
-                    <a:ext uri="{9D8B030D-6E8A-4147-A177-3AD203B41FA5}">
-                      <a16:colId xmlns:a16="http://schemas.microsoft.com/office/drawing/2014/main" val="20000"/>
-                    </a:ext>
-                  </a:extLst>
-                </a:gridCol>
-              </a:tblGrid>
-              <a:tr h="321276">
-                <a:tc>
-                  <a:txBody>
-                    <a:bodyPr/>
-                    <a:lstStyle/>
-                    <a:p>
-                      <a:r>
-                        <a:rPr lang="en-US" sz="1800" dirty="0"/>
-                        <a:t>The basics of file systems</a:t>
-                      </a:r>
-                      <a:endParaRPr lang="ru-RU" dirty="0"/>
-                    </a:p>
-                  </a:txBody>
-                  <a:tcPr/>
-                </a:tc>
-                <a:extLst>
-                  <a:ext uri="{0D108BD9-81ED-4DB2-BD59-A6C34878D82A}">
-                    <a16:rowId xmlns:a16="http://schemas.microsoft.com/office/drawing/2014/main" val="10000"/>
-                  </a:ext>
-                </a:extLst>
-              </a:tr>
-            </a:tbl>
-          </a:graphicData>
-        </a:graphic>
-      </p:graphicFrame>
-      <p:graphicFrame>
-        <p:nvGraphicFramePr>
-          <p:cNvPr id="6" name="Table 5"/>
-          <p:cNvGraphicFramePr>
-            <a:graphicFrameLocks noGrp="1"/>
-          </p:cNvGraphicFramePr>
-          <p:nvPr>
-            <p:extLst>
-              <p:ext uri="{D42A27DB-BD31-4B8C-83A1-F6EECF244321}">
-                <p14:modId xmlns:p14="http://schemas.microsoft.com/office/powerpoint/2010/main" val="1457081692"/>
-              </p:ext>
-            </p:extLst>
-          </p:nvPr>
-        </p:nvGraphicFramePr>
-        <p:xfrm>
-          <a:off x="0" y="6532604"/>
-          <a:ext cx="12192000" cy="365760"/>
-        </p:xfrm>
-        <a:graphic>
-          <a:graphicData uri="http://schemas.openxmlformats.org/drawingml/2006/table">
-            <a:tbl>
-              <a:tblPr firstRow="1" bandRow="1">
-                <a:tableStyleId>{5C22544A-7EE6-4342-B048-85BDC9FD1C3A}</a:tableStyleId>
-              </a:tblPr>
-              <a:tblGrid>
-                <a:gridCol w="12192000">
-                  <a:extLst>
-                    <a:ext uri="{9D8B030D-6E8A-4147-A177-3AD203B41FA5}">
-                      <a16:colId xmlns:a16="http://schemas.microsoft.com/office/drawing/2014/main" val="20000"/>
-                    </a:ext>
-                  </a:extLst>
-                </a:gridCol>
-              </a:tblGrid>
-              <a:tr h="308094">
-                <a:tc>
-                  <a:txBody>
-                    <a:bodyPr/>
-                    <a:lstStyle/>
-                    <a:p>
-                      <a:endParaRPr lang="ru-RU" dirty="0"/>
-                    </a:p>
-                  </a:txBody>
-                  <a:tcPr/>
-                </a:tc>
-                <a:extLst>
-                  <a:ext uri="{0D108BD9-81ED-4DB2-BD59-A6C34878D82A}">
-                    <a16:rowId xmlns:a16="http://schemas.microsoft.com/office/drawing/2014/main" val="10000"/>
-                  </a:ext>
-                </a:extLst>
-              </a:tr>
-            </a:tbl>
-          </a:graphicData>
-        </a:graphic>
-      </p:graphicFrame>
-      <p:graphicFrame>
-        <p:nvGraphicFramePr>
-          <p:cNvPr id="2" name="Table 1"/>
-          <p:cNvGraphicFramePr>
-            <a:graphicFrameLocks noGrp="1"/>
-          </p:cNvGraphicFramePr>
-          <p:nvPr>
-            <p:extLst>
-              <p:ext uri="{D42A27DB-BD31-4B8C-83A1-F6EECF244321}">
-                <p14:modId xmlns:p14="http://schemas.microsoft.com/office/powerpoint/2010/main" val="2753587560"/>
-              </p:ext>
-            </p:extLst>
-          </p:nvPr>
-        </p:nvGraphicFramePr>
-        <p:xfrm>
-          <a:off x="-2" y="365761"/>
-          <a:ext cx="12192002" cy="3611541"/>
-        </p:xfrm>
-        <a:graphic>
-          <a:graphicData uri="http://schemas.openxmlformats.org/drawingml/2006/table">
-            <a:tbl>
-              <a:tblPr firstRow="1" bandRow="1">
-                <a:tableStyleId>{3B4B98B0-60AC-42C2-AFA5-B58CD77FA1E5}</a:tableStyleId>
-              </a:tblPr>
-              <a:tblGrid>
-                <a:gridCol w="6096001">
-                  <a:extLst>
-                    <a:ext uri="{9D8B030D-6E8A-4147-A177-3AD203B41FA5}">
-                      <a16:colId xmlns:a16="http://schemas.microsoft.com/office/drawing/2014/main" val="20000"/>
-                    </a:ext>
-                  </a:extLst>
-                </a:gridCol>
-                <a:gridCol w="6096001">
-                  <a:extLst>
-                    <a:ext uri="{9D8B030D-6E8A-4147-A177-3AD203B41FA5}">
-                      <a16:colId xmlns:a16="http://schemas.microsoft.com/office/drawing/2014/main" val="20001"/>
-                    </a:ext>
-                  </a:extLst>
-                </a:gridCol>
-              </a:tblGrid>
-              <a:tr h="441621">
-                <a:tc>
-                  <a:txBody>
-                    <a:bodyPr/>
-                    <a:lstStyle/>
-                    <a:p>
-                      <a:r>
-                        <a:rPr lang="en-US" dirty="0"/>
-                        <a:t>POSIX API</a:t>
-                      </a:r>
-                      <a:endParaRPr lang="ru-RU" dirty="0"/>
-                    </a:p>
-                  </a:txBody>
-                  <a:tcPr/>
-                </a:tc>
-                <a:tc>
-                  <a:txBody>
-                    <a:bodyPr/>
-                    <a:lstStyle/>
-                    <a:p>
-                      <a:r>
-                        <a:rPr lang="en-US" dirty="0"/>
-                        <a:t>Windows API</a:t>
-                      </a:r>
-                      <a:endParaRPr lang="ru-RU" dirty="0"/>
-                    </a:p>
-                  </a:txBody>
-                  <a:tcPr/>
-                </a:tc>
-                <a:extLst>
-                  <a:ext uri="{0D108BD9-81ED-4DB2-BD59-A6C34878D82A}">
-                    <a16:rowId xmlns:a16="http://schemas.microsoft.com/office/drawing/2014/main" val="10000"/>
-                  </a:ext>
-                </a:extLst>
-              </a:tr>
-              <a:tr h="441621">
-                <a:tc>
-                  <a:txBody>
-                    <a:bodyPr/>
-                    <a:lstStyle/>
-                    <a:p>
-                      <a:r>
-                        <a:rPr lang="en-US" sz="1600" dirty="0" err="1">
-                          <a:latin typeface="Consolas" panose="020B0609020204030204" pitchFamily="49" charset="0"/>
-                          <a:cs typeface="Consolas" panose="020B0609020204030204" pitchFamily="49" charset="0"/>
-                        </a:rPr>
-                        <a:t>size_t</a:t>
-                      </a:r>
-                      <a:r>
-                        <a:rPr lang="en-US" sz="1600" dirty="0">
-                          <a:latin typeface="Consolas" panose="020B0609020204030204" pitchFamily="49" charset="0"/>
-                          <a:cs typeface="Consolas" panose="020B0609020204030204" pitchFamily="49" charset="0"/>
-                        </a:rPr>
-                        <a:t> read(int </a:t>
-                      </a:r>
-                      <a:r>
-                        <a:rPr lang="en-US" sz="1600" dirty="0" err="1">
-                          <a:latin typeface="Consolas" panose="020B0609020204030204" pitchFamily="49" charset="0"/>
-                          <a:cs typeface="Consolas" panose="020B0609020204030204" pitchFamily="49" charset="0"/>
-                        </a:rPr>
-                        <a:t>fd</a:t>
-                      </a:r>
-                      <a:r>
-                        <a:rPr lang="en-US" sz="1600" dirty="0">
-                          <a:latin typeface="Consolas" panose="020B0609020204030204" pitchFamily="49" charset="0"/>
-                          <a:cs typeface="Consolas" panose="020B0609020204030204" pitchFamily="49" charset="0"/>
-                        </a:rPr>
-                        <a:t>, void *</a:t>
-                      </a:r>
-                      <a:r>
-                        <a:rPr lang="en-US" sz="1600" dirty="0" err="1">
-                          <a:latin typeface="Consolas" panose="020B0609020204030204" pitchFamily="49" charset="0"/>
-                          <a:cs typeface="Consolas" panose="020B0609020204030204" pitchFamily="49" charset="0"/>
-                        </a:rPr>
-                        <a:t>buf</a:t>
-                      </a:r>
-                      <a:r>
-                        <a:rPr lang="en-US" sz="1600" dirty="0">
-                          <a:latin typeface="Consolas" panose="020B0609020204030204" pitchFamily="49" charset="0"/>
-                          <a:cs typeface="Consolas" panose="020B0609020204030204" pitchFamily="49" charset="0"/>
-                        </a:rPr>
-                        <a:t>, </a:t>
-                      </a:r>
-                      <a:r>
-                        <a:rPr lang="en-US" sz="1600" dirty="0" err="1">
-                          <a:latin typeface="Consolas" panose="020B0609020204030204" pitchFamily="49" charset="0"/>
-                          <a:cs typeface="Consolas" panose="020B0609020204030204" pitchFamily="49" charset="0"/>
-                        </a:rPr>
-                        <a:t>size_t</a:t>
-                      </a:r>
-                      <a:r>
-                        <a:rPr lang="en-US" sz="1600" dirty="0">
-                          <a:latin typeface="Consolas" panose="020B0609020204030204" pitchFamily="49" charset="0"/>
-                          <a:cs typeface="Consolas" panose="020B0609020204030204" pitchFamily="49" charset="0"/>
-                        </a:rPr>
-                        <a:t> count);</a:t>
-                      </a:r>
-                      <a:endParaRPr lang="ru-RU" sz="1600" dirty="0">
-                        <a:latin typeface="Consolas" panose="020B0609020204030204" pitchFamily="49" charset="0"/>
-                        <a:cs typeface="Consolas" panose="020B0609020204030204" pitchFamily="49" charset="0"/>
-                      </a:endParaRPr>
-                    </a:p>
-                  </a:txBody>
-                  <a:tcPr/>
-                </a:tc>
-                <a:tc>
-                  <a:txBody>
-                    <a:bodyPr/>
-                    <a:lstStyle/>
-                    <a:p>
-                      <a:r>
-                        <a:rPr lang="en-US" sz="1400" dirty="0">
-                          <a:latin typeface="Consolas" panose="020B0609020204030204" pitchFamily="49" charset="0"/>
-                          <a:cs typeface="Consolas" panose="020B0609020204030204" pitchFamily="49" charset="0"/>
-                        </a:rPr>
-                        <a:t>BOOL WINAPI </a:t>
-                      </a:r>
-                      <a:r>
-                        <a:rPr lang="en-US" sz="1400" dirty="0" err="1">
-                          <a:latin typeface="Consolas" panose="020B0609020204030204" pitchFamily="49" charset="0"/>
-                          <a:cs typeface="Consolas" panose="020B0609020204030204" pitchFamily="49" charset="0"/>
-                        </a:rPr>
-                        <a:t>ReadFile</a:t>
-                      </a:r>
-                      <a:r>
-                        <a:rPr lang="en-US" sz="1400" dirty="0">
-                          <a:latin typeface="Consolas" panose="020B0609020204030204" pitchFamily="49" charset="0"/>
-                          <a:cs typeface="Consolas" panose="020B0609020204030204" pitchFamily="49" charset="0"/>
-                        </a:rPr>
-                        <a:t>(</a:t>
-                      </a:r>
-                    </a:p>
-                    <a:p>
-                      <a:r>
-                        <a:rPr lang="en-US" sz="1400" dirty="0">
-                          <a:latin typeface="Consolas" panose="020B0609020204030204" pitchFamily="49" charset="0"/>
-                          <a:cs typeface="Consolas" panose="020B0609020204030204" pitchFamily="49" charset="0"/>
-                        </a:rPr>
-                        <a:t>  _In_        HANDLE          </a:t>
-                      </a:r>
-                      <a:r>
-                        <a:rPr lang="en-US" sz="1400" dirty="0" err="1">
-                          <a:latin typeface="Consolas" panose="020B0609020204030204" pitchFamily="49" charset="0"/>
-                          <a:cs typeface="Consolas" panose="020B0609020204030204" pitchFamily="49" charset="0"/>
-                        </a:rPr>
-                        <a:t>hFile</a:t>
-                      </a:r>
-                      <a:r>
-                        <a:rPr lang="en-US" sz="1400" dirty="0">
-                          <a:latin typeface="Consolas" panose="020B0609020204030204" pitchFamily="49" charset="0"/>
-                          <a:cs typeface="Consolas" panose="020B0609020204030204" pitchFamily="49" charset="0"/>
-                        </a:rPr>
-                        <a:t>,</a:t>
-                      </a:r>
-                    </a:p>
-                    <a:p>
-                      <a:r>
-                        <a:rPr lang="en-US" sz="1400" dirty="0">
-                          <a:latin typeface="Consolas" panose="020B0609020204030204" pitchFamily="49" charset="0"/>
-                          <a:cs typeface="Consolas" panose="020B0609020204030204" pitchFamily="49" charset="0"/>
-                        </a:rPr>
-                        <a:t>  _Out_       LPVOID          </a:t>
-                      </a:r>
-                      <a:r>
-                        <a:rPr lang="en-US" sz="1400" dirty="0" err="1">
-                          <a:latin typeface="Consolas" panose="020B0609020204030204" pitchFamily="49" charset="0"/>
-                          <a:cs typeface="Consolas" panose="020B0609020204030204" pitchFamily="49" charset="0"/>
-                        </a:rPr>
-                        <a:t>lpBuffer</a:t>
-                      </a:r>
-                      <a:r>
-                        <a:rPr lang="en-US" sz="1400" dirty="0">
-                          <a:latin typeface="Consolas" panose="020B0609020204030204" pitchFamily="49" charset="0"/>
-                          <a:cs typeface="Consolas" panose="020B0609020204030204" pitchFamily="49" charset="0"/>
-                        </a:rPr>
-                        <a:t>,</a:t>
-                      </a:r>
-                    </a:p>
-                    <a:p>
-                      <a:r>
-                        <a:rPr lang="en-US" sz="1400" dirty="0">
-                          <a:latin typeface="Consolas" panose="020B0609020204030204" pitchFamily="49" charset="0"/>
-                          <a:cs typeface="Consolas" panose="020B0609020204030204" pitchFamily="49" charset="0"/>
-                        </a:rPr>
-                        <a:t>  _In_        DWORD           </a:t>
-                      </a:r>
-                      <a:r>
-                        <a:rPr lang="en-US" sz="1400" dirty="0" err="1">
-                          <a:latin typeface="Consolas" panose="020B0609020204030204" pitchFamily="49" charset="0"/>
-                          <a:cs typeface="Consolas" panose="020B0609020204030204" pitchFamily="49" charset="0"/>
-                        </a:rPr>
-                        <a:t>nNumberOfBytesToRead</a:t>
-                      </a:r>
-                      <a:r>
-                        <a:rPr lang="en-US" sz="1400" dirty="0">
-                          <a:latin typeface="Consolas" panose="020B0609020204030204" pitchFamily="49" charset="0"/>
-                          <a:cs typeface="Consolas" panose="020B0609020204030204" pitchFamily="49" charset="0"/>
-                        </a:rPr>
-                        <a:t>,</a:t>
-                      </a:r>
-                    </a:p>
-                    <a:p>
-                      <a:r>
-                        <a:rPr lang="en-US" sz="1400" dirty="0">
-                          <a:latin typeface="Consolas" panose="020B0609020204030204" pitchFamily="49" charset="0"/>
-                          <a:cs typeface="Consolas" panose="020B0609020204030204" pitchFamily="49" charset="0"/>
-                        </a:rPr>
-                        <a:t>  _</a:t>
-                      </a:r>
-                      <a:r>
-                        <a:rPr lang="en-US" sz="1400" dirty="0" err="1">
-                          <a:latin typeface="Consolas" panose="020B0609020204030204" pitchFamily="49" charset="0"/>
-                          <a:cs typeface="Consolas" panose="020B0609020204030204" pitchFamily="49" charset="0"/>
-                        </a:rPr>
-                        <a:t>Out_opt</a:t>
-                      </a:r>
-                      <a:r>
-                        <a:rPr lang="en-US" sz="1400" dirty="0">
-                          <a:latin typeface="Consolas" panose="020B0609020204030204" pitchFamily="49" charset="0"/>
-                          <a:cs typeface="Consolas" panose="020B0609020204030204" pitchFamily="49" charset="0"/>
-                        </a:rPr>
-                        <a:t>_   LPDWORD         </a:t>
-                      </a:r>
-                      <a:r>
-                        <a:rPr lang="en-US" sz="1400" dirty="0" err="1">
-                          <a:latin typeface="Consolas" panose="020B0609020204030204" pitchFamily="49" charset="0"/>
-                          <a:cs typeface="Consolas" panose="020B0609020204030204" pitchFamily="49" charset="0"/>
-                        </a:rPr>
-                        <a:t>lpNumberOfBytesRead</a:t>
-                      </a:r>
-                      <a:r>
-                        <a:rPr lang="en-US" sz="1400" dirty="0">
-                          <a:latin typeface="Consolas" panose="020B0609020204030204" pitchFamily="49" charset="0"/>
-                          <a:cs typeface="Consolas" panose="020B0609020204030204" pitchFamily="49" charset="0"/>
-                        </a:rPr>
-                        <a:t>,</a:t>
-                      </a:r>
-                    </a:p>
-                    <a:p>
-                      <a:r>
-                        <a:rPr lang="en-US" sz="1400" dirty="0">
-                          <a:latin typeface="Consolas" panose="020B0609020204030204" pitchFamily="49" charset="0"/>
-                          <a:cs typeface="Consolas" panose="020B0609020204030204" pitchFamily="49" charset="0"/>
-                        </a:rPr>
-                        <a:t>  _</a:t>
-                      </a:r>
-                      <a:r>
-                        <a:rPr lang="en-US" sz="1400" dirty="0" err="1">
-                          <a:latin typeface="Consolas" panose="020B0609020204030204" pitchFamily="49" charset="0"/>
-                          <a:cs typeface="Consolas" panose="020B0609020204030204" pitchFamily="49" charset="0"/>
-                        </a:rPr>
-                        <a:t>Inout_opt</a:t>
-                      </a:r>
-                      <a:r>
-                        <a:rPr lang="en-US" sz="1400" dirty="0">
-                          <a:latin typeface="Consolas" panose="020B0609020204030204" pitchFamily="49" charset="0"/>
-                          <a:cs typeface="Consolas" panose="020B0609020204030204" pitchFamily="49" charset="0"/>
-                        </a:rPr>
-                        <a:t>_ LPOVERLAPPED    </a:t>
-                      </a:r>
-                      <a:r>
-                        <a:rPr lang="en-US" sz="1400" dirty="0" err="1">
-                          <a:latin typeface="Consolas" panose="020B0609020204030204" pitchFamily="49" charset="0"/>
-                          <a:cs typeface="Consolas" panose="020B0609020204030204" pitchFamily="49" charset="0"/>
-                        </a:rPr>
-                        <a:t>lpOverlapped</a:t>
-                      </a:r>
-                      <a:endParaRPr lang="en-US" sz="1400" dirty="0">
-                        <a:latin typeface="Consolas" panose="020B0609020204030204" pitchFamily="49" charset="0"/>
-                        <a:cs typeface="Consolas" panose="020B0609020204030204" pitchFamily="49" charset="0"/>
-                      </a:endParaRPr>
-                    </a:p>
-                    <a:p>
-                      <a:r>
-                        <a:rPr lang="en-US" sz="1400" dirty="0">
-                          <a:latin typeface="Consolas" panose="020B0609020204030204" pitchFamily="49" charset="0"/>
-                          <a:cs typeface="Consolas" panose="020B0609020204030204" pitchFamily="49" charset="0"/>
-                        </a:rPr>
-                        <a:t>);</a:t>
-                      </a:r>
-                      <a:endParaRPr lang="ru-RU" sz="1400" dirty="0">
-                        <a:latin typeface="Consolas" panose="020B0609020204030204" pitchFamily="49" charset="0"/>
-                        <a:cs typeface="Consolas" panose="020B0609020204030204" pitchFamily="49" charset="0"/>
-                      </a:endParaRPr>
-                    </a:p>
-                  </a:txBody>
-                  <a:tcPr/>
-                </a:tc>
-                <a:extLst>
-                  <a:ext uri="{0D108BD9-81ED-4DB2-BD59-A6C34878D82A}">
-                    <a16:rowId xmlns:a16="http://schemas.microsoft.com/office/drawing/2014/main" val="10002"/>
-                  </a:ext>
-                </a:extLst>
-              </a:tr>
-              <a:tr h="441621">
-                <a:tc>
-                  <a:txBody>
-                    <a:bodyPr/>
-                    <a:lstStyle/>
-                    <a:p>
-                      <a:r>
-                        <a:rPr lang="en-US" sz="1600" dirty="0" err="1">
-                          <a:latin typeface="Consolas" panose="020B0609020204030204" pitchFamily="49" charset="0"/>
-                          <a:cs typeface="Consolas" panose="020B0609020204030204" pitchFamily="49" charset="0"/>
-                        </a:rPr>
-                        <a:t>size_t</a:t>
-                      </a:r>
-                      <a:r>
-                        <a:rPr lang="en-US" sz="1600" dirty="0">
-                          <a:latin typeface="Consolas" panose="020B0609020204030204" pitchFamily="49" charset="0"/>
-                          <a:cs typeface="Consolas" panose="020B0609020204030204" pitchFamily="49" charset="0"/>
-                        </a:rPr>
-                        <a:t> write(int </a:t>
-                      </a:r>
-                      <a:r>
-                        <a:rPr lang="en-US" sz="1600" dirty="0" err="1">
-                          <a:latin typeface="Consolas" panose="020B0609020204030204" pitchFamily="49" charset="0"/>
-                          <a:cs typeface="Consolas" panose="020B0609020204030204" pitchFamily="49" charset="0"/>
-                        </a:rPr>
-                        <a:t>fd</a:t>
-                      </a:r>
-                      <a:r>
-                        <a:rPr lang="en-US" sz="1600" dirty="0">
-                          <a:latin typeface="Consolas" panose="020B0609020204030204" pitchFamily="49" charset="0"/>
-                          <a:cs typeface="Consolas" panose="020B0609020204030204" pitchFamily="49" charset="0"/>
-                        </a:rPr>
-                        <a:t>, const</a:t>
-                      </a:r>
-                      <a:r>
-                        <a:rPr lang="en-US" sz="1600" baseline="0" dirty="0">
-                          <a:latin typeface="Consolas" panose="020B0609020204030204" pitchFamily="49" charset="0"/>
-                          <a:cs typeface="Consolas" panose="020B0609020204030204" pitchFamily="49" charset="0"/>
-                        </a:rPr>
-                        <a:t> void *</a:t>
-                      </a:r>
-                      <a:r>
-                        <a:rPr lang="en-US" sz="1600" baseline="0" dirty="0" err="1">
-                          <a:latin typeface="Consolas" panose="020B0609020204030204" pitchFamily="49" charset="0"/>
-                          <a:cs typeface="Consolas" panose="020B0609020204030204" pitchFamily="49" charset="0"/>
-                        </a:rPr>
-                        <a:t>buf</a:t>
-                      </a:r>
-                      <a:r>
-                        <a:rPr lang="en-US" sz="1600" baseline="0" dirty="0">
-                          <a:latin typeface="Consolas" panose="020B0609020204030204" pitchFamily="49" charset="0"/>
-                          <a:cs typeface="Consolas" panose="020B0609020204030204" pitchFamily="49" charset="0"/>
-                        </a:rPr>
-                        <a:t>, </a:t>
-                      </a:r>
-                      <a:r>
-                        <a:rPr lang="en-US" sz="1600" baseline="0" dirty="0" err="1">
-                          <a:latin typeface="Consolas" panose="020B0609020204030204" pitchFamily="49" charset="0"/>
-                          <a:cs typeface="Consolas" panose="020B0609020204030204" pitchFamily="49" charset="0"/>
-                        </a:rPr>
-                        <a:t>size_t</a:t>
-                      </a:r>
-                      <a:r>
-                        <a:rPr lang="en-US" sz="1600" baseline="0" dirty="0">
-                          <a:latin typeface="Consolas" panose="020B0609020204030204" pitchFamily="49" charset="0"/>
-                          <a:cs typeface="Consolas" panose="020B0609020204030204" pitchFamily="49" charset="0"/>
-                        </a:rPr>
-                        <a:t> count);</a:t>
-                      </a:r>
-                      <a:endParaRPr lang="ru-RU" sz="1600" dirty="0">
-                        <a:latin typeface="Consolas" panose="020B0609020204030204" pitchFamily="49" charset="0"/>
-                        <a:cs typeface="Consolas" panose="020B0609020204030204" pitchFamily="49" charset="0"/>
-                      </a:endParaRPr>
-                    </a:p>
-                  </a:txBody>
-                  <a:tcPr/>
-                </a:tc>
-                <a:tc>
-                  <a:txBody>
-                    <a:bodyPr/>
-                    <a:lstStyle/>
-                    <a:p>
-                      <a:r>
-                        <a:rPr lang="en-US" sz="1400" dirty="0">
-                          <a:latin typeface="Consolas" panose="020B0609020204030204" pitchFamily="49" charset="0"/>
-                          <a:cs typeface="Consolas" panose="020B0609020204030204" pitchFamily="49" charset="0"/>
-                        </a:rPr>
-                        <a:t>BOOL WINAPI </a:t>
-                      </a:r>
-                      <a:r>
-                        <a:rPr lang="en-US" sz="1400" dirty="0" err="1">
-                          <a:latin typeface="Consolas" panose="020B0609020204030204" pitchFamily="49" charset="0"/>
-                          <a:cs typeface="Consolas" panose="020B0609020204030204" pitchFamily="49" charset="0"/>
-                        </a:rPr>
-                        <a:t>WriteFile</a:t>
-                      </a:r>
-                      <a:r>
-                        <a:rPr lang="en-US" sz="1400" dirty="0">
-                          <a:latin typeface="Consolas" panose="020B0609020204030204" pitchFamily="49" charset="0"/>
-                          <a:cs typeface="Consolas" panose="020B0609020204030204" pitchFamily="49" charset="0"/>
-                        </a:rPr>
-                        <a:t>(</a:t>
-                      </a:r>
-                    </a:p>
-                    <a:p>
-                      <a:r>
-                        <a:rPr lang="en-US" sz="1400" dirty="0">
-                          <a:latin typeface="Consolas" panose="020B0609020204030204" pitchFamily="49" charset="0"/>
-                          <a:cs typeface="Consolas" panose="020B0609020204030204" pitchFamily="49" charset="0"/>
-                        </a:rPr>
-                        <a:t>  _In_        HANDLE          </a:t>
-                      </a:r>
-                      <a:r>
-                        <a:rPr lang="en-US" sz="1400" dirty="0" err="1">
-                          <a:latin typeface="Consolas" panose="020B0609020204030204" pitchFamily="49" charset="0"/>
-                          <a:cs typeface="Consolas" panose="020B0609020204030204" pitchFamily="49" charset="0"/>
-                        </a:rPr>
-                        <a:t>hFile</a:t>
-                      </a:r>
-                      <a:r>
-                        <a:rPr lang="en-US" sz="1400" dirty="0">
-                          <a:latin typeface="Consolas" panose="020B0609020204030204" pitchFamily="49" charset="0"/>
-                          <a:cs typeface="Consolas" panose="020B0609020204030204" pitchFamily="49" charset="0"/>
-                        </a:rPr>
-                        <a:t>,</a:t>
-                      </a:r>
-                    </a:p>
-                    <a:p>
-                      <a:r>
-                        <a:rPr lang="en-US" sz="1400" dirty="0">
-                          <a:latin typeface="Consolas" panose="020B0609020204030204" pitchFamily="49" charset="0"/>
-                          <a:cs typeface="Consolas" panose="020B0609020204030204" pitchFamily="49" charset="0"/>
-                        </a:rPr>
-                        <a:t>  _In_        LPCVOID         </a:t>
-                      </a:r>
-                      <a:r>
-                        <a:rPr lang="en-US" sz="1400" dirty="0" err="1">
-                          <a:latin typeface="Consolas" panose="020B0609020204030204" pitchFamily="49" charset="0"/>
-                          <a:cs typeface="Consolas" panose="020B0609020204030204" pitchFamily="49" charset="0"/>
-                        </a:rPr>
-                        <a:t>lpBuffer</a:t>
-                      </a:r>
-                      <a:r>
-                        <a:rPr lang="en-US" sz="1400" dirty="0">
-                          <a:latin typeface="Consolas" panose="020B0609020204030204" pitchFamily="49" charset="0"/>
-                          <a:cs typeface="Consolas" panose="020B0609020204030204" pitchFamily="49" charset="0"/>
-                        </a:rPr>
-                        <a:t>,</a:t>
-                      </a:r>
-                    </a:p>
-                    <a:p>
-                      <a:r>
-                        <a:rPr lang="en-US" sz="1400" dirty="0">
-                          <a:latin typeface="Consolas" panose="020B0609020204030204" pitchFamily="49" charset="0"/>
-                          <a:cs typeface="Consolas" panose="020B0609020204030204" pitchFamily="49" charset="0"/>
-                        </a:rPr>
-                        <a:t>  _In_        DWORD           </a:t>
-                      </a:r>
-                      <a:r>
-                        <a:rPr lang="en-US" sz="1400" dirty="0" err="1">
-                          <a:latin typeface="Consolas" panose="020B0609020204030204" pitchFamily="49" charset="0"/>
-                          <a:cs typeface="Consolas" panose="020B0609020204030204" pitchFamily="49" charset="0"/>
-                        </a:rPr>
-                        <a:t>nNumberOfBytesToWrite</a:t>
-                      </a:r>
-                      <a:r>
-                        <a:rPr lang="en-US" sz="1400" dirty="0">
-                          <a:latin typeface="Consolas" panose="020B0609020204030204" pitchFamily="49" charset="0"/>
-                          <a:cs typeface="Consolas" panose="020B0609020204030204" pitchFamily="49" charset="0"/>
-                        </a:rPr>
-                        <a:t>,</a:t>
-                      </a:r>
-                    </a:p>
-                    <a:p>
-                      <a:r>
-                        <a:rPr lang="en-US" sz="1400" dirty="0">
-                          <a:latin typeface="Consolas" panose="020B0609020204030204" pitchFamily="49" charset="0"/>
-                          <a:cs typeface="Consolas" panose="020B0609020204030204" pitchFamily="49" charset="0"/>
-                        </a:rPr>
-                        <a:t>  _</a:t>
-                      </a:r>
-                      <a:r>
-                        <a:rPr lang="en-US" sz="1400" dirty="0" err="1">
-                          <a:latin typeface="Consolas" panose="020B0609020204030204" pitchFamily="49" charset="0"/>
-                          <a:cs typeface="Consolas" panose="020B0609020204030204" pitchFamily="49" charset="0"/>
-                        </a:rPr>
-                        <a:t>Out_opt</a:t>
-                      </a:r>
-                      <a:r>
-                        <a:rPr lang="en-US" sz="1400" dirty="0">
-                          <a:latin typeface="Consolas" panose="020B0609020204030204" pitchFamily="49" charset="0"/>
-                          <a:cs typeface="Consolas" panose="020B0609020204030204" pitchFamily="49" charset="0"/>
-                        </a:rPr>
-                        <a:t>_   LPDWORD         </a:t>
-                      </a:r>
-                      <a:r>
-                        <a:rPr lang="en-US" sz="1400" dirty="0" err="1">
-                          <a:latin typeface="Consolas" panose="020B0609020204030204" pitchFamily="49" charset="0"/>
-                          <a:cs typeface="Consolas" panose="020B0609020204030204" pitchFamily="49" charset="0"/>
-                        </a:rPr>
-                        <a:t>lpNumberOfBytesWritten</a:t>
-                      </a:r>
-                      <a:r>
-                        <a:rPr lang="en-US" sz="1400" dirty="0">
-                          <a:latin typeface="Consolas" panose="020B0609020204030204" pitchFamily="49" charset="0"/>
-                          <a:cs typeface="Consolas" panose="020B0609020204030204" pitchFamily="49" charset="0"/>
-                        </a:rPr>
-                        <a:t>,</a:t>
-                      </a:r>
-                    </a:p>
-                    <a:p>
-                      <a:r>
-                        <a:rPr lang="en-US" sz="1400" dirty="0">
-                          <a:latin typeface="Consolas" panose="020B0609020204030204" pitchFamily="49" charset="0"/>
-                          <a:cs typeface="Consolas" panose="020B0609020204030204" pitchFamily="49" charset="0"/>
-                        </a:rPr>
-                        <a:t>  _</a:t>
-                      </a:r>
-                      <a:r>
-                        <a:rPr lang="en-US" sz="1400" dirty="0" err="1">
-                          <a:latin typeface="Consolas" panose="020B0609020204030204" pitchFamily="49" charset="0"/>
-                          <a:cs typeface="Consolas" panose="020B0609020204030204" pitchFamily="49" charset="0"/>
-                        </a:rPr>
-                        <a:t>Inout_opt</a:t>
-                      </a:r>
-                      <a:r>
-                        <a:rPr lang="en-US" sz="1400" dirty="0">
-                          <a:latin typeface="Consolas" panose="020B0609020204030204" pitchFamily="49" charset="0"/>
-                          <a:cs typeface="Consolas" panose="020B0609020204030204" pitchFamily="49" charset="0"/>
-                        </a:rPr>
-                        <a:t>_ LPOVERLAPPED    </a:t>
-                      </a:r>
-                      <a:r>
-                        <a:rPr lang="en-US" sz="1400" dirty="0" err="1">
-                          <a:latin typeface="Consolas" panose="020B0609020204030204" pitchFamily="49" charset="0"/>
-                          <a:cs typeface="Consolas" panose="020B0609020204030204" pitchFamily="49" charset="0"/>
-                        </a:rPr>
-                        <a:t>lpOverlapped</a:t>
-                      </a:r>
-                      <a:endParaRPr lang="en-US" sz="1400" dirty="0">
-                        <a:latin typeface="Consolas" panose="020B0609020204030204" pitchFamily="49" charset="0"/>
-                        <a:cs typeface="Consolas" panose="020B0609020204030204" pitchFamily="49" charset="0"/>
-                      </a:endParaRPr>
-                    </a:p>
-                    <a:p>
-                      <a:r>
-                        <a:rPr lang="en-US" sz="1400" dirty="0">
-                          <a:latin typeface="Consolas" panose="020B0609020204030204" pitchFamily="49" charset="0"/>
-                          <a:cs typeface="Consolas" panose="020B0609020204030204" pitchFamily="49" charset="0"/>
-                        </a:rPr>
-                        <a:t>);</a:t>
-                      </a:r>
-                      <a:endParaRPr lang="ru-RU" sz="1400" dirty="0">
-                        <a:latin typeface="Consolas" panose="020B0609020204030204" pitchFamily="49" charset="0"/>
-                        <a:cs typeface="Consolas" panose="020B0609020204030204" pitchFamily="49" charset="0"/>
-                      </a:endParaRPr>
-                    </a:p>
-                  </a:txBody>
-                  <a:tcPr/>
-                </a:tc>
-                <a:extLst>
-                  <a:ext uri="{0D108BD9-81ED-4DB2-BD59-A6C34878D82A}">
-                    <a16:rowId xmlns:a16="http://schemas.microsoft.com/office/drawing/2014/main" val="10003"/>
-                  </a:ext>
-                </a:extLst>
-              </a:tr>
-            </a:tbl>
-          </a:graphicData>
-        </a:graphic>
-      </p:graphicFrame>
-    </p:spTree>
-    <p:extLst>
-      <p:ext uri="{BB962C8B-B14F-4D97-AF65-F5344CB8AC3E}">
-        <p14:creationId xmlns:p14="http://schemas.microsoft.com/office/powerpoint/2010/main" val="3014771138"/>
       </p:ext>
     </p:extLst>
   </p:cSld>
@@ -23785,6 +24748,752 @@
   <p:cSld>
     <p:spTree>
       <p:nvGrpSpPr>
+        <p:cNvPr id="1" name=""/>
+        <p:cNvGrpSpPr/>
+        <p:nvPr/>
+      </p:nvGrpSpPr>
+      <p:grpSpPr>
+        <a:xfrm>
+          <a:off x="0" y="0"/>
+          <a:ext cx="0" cy="0"/>
+          <a:chOff x="0" y="0"/>
+          <a:chExt cx="0" cy="0"/>
+        </a:xfrm>
+      </p:grpSpPr>
+      <p:graphicFrame>
+        <p:nvGraphicFramePr>
+          <p:cNvPr id="5" name="Table 4"/>
+          <p:cNvGraphicFramePr>
+            <a:graphicFrameLocks noGrp="1"/>
+          </p:cNvGraphicFramePr>
+          <p:nvPr>
+            <p:extLst>
+              <p:ext uri="{D42A27DB-BD31-4B8C-83A1-F6EECF244321}">
+                <p14:modId xmlns:p14="http://schemas.microsoft.com/office/powerpoint/2010/main" val="2562019265"/>
+              </p:ext>
+            </p:extLst>
+          </p:nvPr>
+        </p:nvGraphicFramePr>
+        <p:xfrm>
+          <a:off x="0" y="1"/>
+          <a:ext cx="12192000" cy="365760"/>
+        </p:xfrm>
+        <a:graphic>
+          <a:graphicData uri="http://schemas.openxmlformats.org/drawingml/2006/table">
+            <a:tbl>
+              <a:tblPr firstRow="1" bandRow="1">
+                <a:tableStyleId>{5C22544A-7EE6-4342-B048-85BDC9FD1C3A}</a:tableStyleId>
+              </a:tblPr>
+              <a:tblGrid>
+                <a:gridCol w="12192000">
+                  <a:extLst>
+                    <a:ext uri="{9D8B030D-6E8A-4147-A177-3AD203B41FA5}">
+                      <a16:colId xmlns:a16="http://schemas.microsoft.com/office/drawing/2014/main" val="20000"/>
+                    </a:ext>
+                  </a:extLst>
+                </a:gridCol>
+              </a:tblGrid>
+              <a:tr h="321276">
+                <a:tc>
+                  <a:txBody>
+                    <a:bodyPr/>
+                    <a:lstStyle/>
+                    <a:p>
+                      <a:r>
+                        <a:rPr lang="en-US" sz="1800" dirty="0"/>
+                        <a:t>The basics of file systems</a:t>
+                      </a:r>
+                      <a:endParaRPr lang="ru-RU" dirty="0"/>
+                    </a:p>
+                  </a:txBody>
+                  <a:tcPr/>
+                </a:tc>
+                <a:extLst>
+                  <a:ext uri="{0D108BD9-81ED-4DB2-BD59-A6C34878D82A}">
+                    <a16:rowId xmlns:a16="http://schemas.microsoft.com/office/drawing/2014/main" val="10000"/>
+                  </a:ext>
+                </a:extLst>
+              </a:tr>
+            </a:tbl>
+          </a:graphicData>
+        </a:graphic>
+      </p:graphicFrame>
+      <p:graphicFrame>
+        <p:nvGraphicFramePr>
+          <p:cNvPr id="6" name="Table 5"/>
+          <p:cNvGraphicFramePr>
+            <a:graphicFrameLocks noGrp="1"/>
+          </p:cNvGraphicFramePr>
+          <p:nvPr>
+            <p:extLst>
+              <p:ext uri="{D42A27DB-BD31-4B8C-83A1-F6EECF244321}">
+                <p14:modId xmlns:p14="http://schemas.microsoft.com/office/powerpoint/2010/main" val="1457081692"/>
+              </p:ext>
+            </p:extLst>
+          </p:nvPr>
+        </p:nvGraphicFramePr>
+        <p:xfrm>
+          <a:off x="0" y="6532604"/>
+          <a:ext cx="12192000" cy="365760"/>
+        </p:xfrm>
+        <a:graphic>
+          <a:graphicData uri="http://schemas.openxmlformats.org/drawingml/2006/table">
+            <a:tbl>
+              <a:tblPr firstRow="1" bandRow="1">
+                <a:tableStyleId>{5C22544A-7EE6-4342-B048-85BDC9FD1C3A}</a:tableStyleId>
+              </a:tblPr>
+              <a:tblGrid>
+                <a:gridCol w="12192000">
+                  <a:extLst>
+                    <a:ext uri="{9D8B030D-6E8A-4147-A177-3AD203B41FA5}">
+                      <a16:colId xmlns:a16="http://schemas.microsoft.com/office/drawing/2014/main" val="20000"/>
+                    </a:ext>
+                  </a:extLst>
+                </a:gridCol>
+              </a:tblGrid>
+              <a:tr h="308094">
+                <a:tc>
+                  <a:txBody>
+                    <a:bodyPr/>
+                    <a:lstStyle/>
+                    <a:p>
+                      <a:endParaRPr lang="ru-RU" dirty="0"/>
+                    </a:p>
+                  </a:txBody>
+                  <a:tcPr/>
+                </a:tc>
+                <a:extLst>
+                  <a:ext uri="{0D108BD9-81ED-4DB2-BD59-A6C34878D82A}">
+                    <a16:rowId xmlns:a16="http://schemas.microsoft.com/office/drawing/2014/main" val="10000"/>
+                  </a:ext>
+                </a:extLst>
+              </a:tr>
+            </a:tbl>
+          </a:graphicData>
+        </a:graphic>
+      </p:graphicFrame>
+      <p:graphicFrame>
+        <p:nvGraphicFramePr>
+          <p:cNvPr id="2" name="Table 1"/>
+          <p:cNvGraphicFramePr>
+            <a:graphicFrameLocks noGrp="1"/>
+          </p:cNvGraphicFramePr>
+          <p:nvPr>
+            <p:extLst>
+              <p:ext uri="{D42A27DB-BD31-4B8C-83A1-F6EECF244321}">
+                <p14:modId xmlns:p14="http://schemas.microsoft.com/office/powerpoint/2010/main" val="3810033519"/>
+              </p:ext>
+            </p:extLst>
+          </p:nvPr>
+        </p:nvGraphicFramePr>
+        <p:xfrm>
+          <a:off x="-2" y="365761"/>
+          <a:ext cx="12192002" cy="3611541"/>
+        </p:xfrm>
+        <a:graphic>
+          <a:graphicData uri="http://schemas.openxmlformats.org/drawingml/2006/table">
+            <a:tbl>
+              <a:tblPr firstRow="1" bandRow="1">
+                <a:tableStyleId>{3B4B98B0-60AC-42C2-AFA5-B58CD77FA1E5}</a:tableStyleId>
+              </a:tblPr>
+              <a:tblGrid>
+                <a:gridCol w="6096001">
+                  <a:extLst>
+                    <a:ext uri="{9D8B030D-6E8A-4147-A177-3AD203B41FA5}">
+                      <a16:colId xmlns:a16="http://schemas.microsoft.com/office/drawing/2014/main" val="20000"/>
+                    </a:ext>
+                  </a:extLst>
+                </a:gridCol>
+                <a:gridCol w="6096001">
+                  <a:extLst>
+                    <a:ext uri="{9D8B030D-6E8A-4147-A177-3AD203B41FA5}">
+                      <a16:colId xmlns:a16="http://schemas.microsoft.com/office/drawing/2014/main" val="20001"/>
+                    </a:ext>
+                  </a:extLst>
+                </a:gridCol>
+              </a:tblGrid>
+              <a:tr h="441621">
+                <a:tc>
+                  <a:txBody>
+                    <a:bodyPr/>
+                    <a:lstStyle/>
+                    <a:p>
+                      <a:r>
+                        <a:rPr lang="en-US" dirty="0"/>
+                        <a:t>POSIX API</a:t>
+                      </a:r>
+                      <a:endParaRPr lang="ru-RU" dirty="0"/>
+                    </a:p>
+                  </a:txBody>
+                  <a:tcPr/>
+                </a:tc>
+                <a:tc>
+                  <a:txBody>
+                    <a:bodyPr/>
+                    <a:lstStyle/>
+                    <a:p>
+                      <a:r>
+                        <a:rPr lang="en-US" dirty="0"/>
+                        <a:t>Windows API</a:t>
+                      </a:r>
+                      <a:endParaRPr lang="ru-RU" dirty="0"/>
+                    </a:p>
+                  </a:txBody>
+                  <a:tcPr/>
+                </a:tc>
+                <a:extLst>
+                  <a:ext uri="{0D108BD9-81ED-4DB2-BD59-A6C34878D82A}">
+                    <a16:rowId xmlns:a16="http://schemas.microsoft.com/office/drawing/2014/main" val="10000"/>
+                  </a:ext>
+                </a:extLst>
+              </a:tr>
+              <a:tr h="441621">
+                <a:tc>
+                  <a:txBody>
+                    <a:bodyPr/>
+                    <a:lstStyle/>
+                    <a:p>
+                      <a:r>
+                        <a:rPr lang="en-US" sz="1600" dirty="0" err="1">
+                          <a:latin typeface="Consolas" panose="020B0609020204030204" pitchFamily="49" charset="0"/>
+                          <a:cs typeface="Consolas" panose="020B0609020204030204" pitchFamily="49" charset="0"/>
+                        </a:rPr>
+                        <a:t>ssize_t</a:t>
+                      </a:r>
+                      <a:r>
+                        <a:rPr lang="en-US" sz="1600" dirty="0">
+                          <a:latin typeface="Consolas" panose="020B0609020204030204" pitchFamily="49" charset="0"/>
+                          <a:cs typeface="Consolas" panose="020B0609020204030204" pitchFamily="49" charset="0"/>
+                        </a:rPr>
+                        <a:t> read(int </a:t>
+                      </a:r>
+                      <a:r>
+                        <a:rPr lang="en-US" sz="1600" dirty="0" err="1">
+                          <a:latin typeface="Consolas" panose="020B0609020204030204" pitchFamily="49" charset="0"/>
+                          <a:cs typeface="Consolas" panose="020B0609020204030204" pitchFamily="49" charset="0"/>
+                        </a:rPr>
+                        <a:t>fd</a:t>
+                      </a:r>
+                      <a:r>
+                        <a:rPr lang="en-US" sz="1600" dirty="0">
+                          <a:latin typeface="Consolas" panose="020B0609020204030204" pitchFamily="49" charset="0"/>
+                          <a:cs typeface="Consolas" panose="020B0609020204030204" pitchFamily="49" charset="0"/>
+                        </a:rPr>
+                        <a:t>, void *</a:t>
+                      </a:r>
+                      <a:r>
+                        <a:rPr lang="en-US" sz="1600" dirty="0" err="1">
+                          <a:latin typeface="Consolas" panose="020B0609020204030204" pitchFamily="49" charset="0"/>
+                          <a:cs typeface="Consolas" panose="020B0609020204030204" pitchFamily="49" charset="0"/>
+                        </a:rPr>
+                        <a:t>buf</a:t>
+                      </a:r>
+                      <a:r>
+                        <a:rPr lang="en-US" sz="1600" dirty="0">
+                          <a:latin typeface="Consolas" panose="020B0609020204030204" pitchFamily="49" charset="0"/>
+                          <a:cs typeface="Consolas" panose="020B0609020204030204" pitchFamily="49" charset="0"/>
+                        </a:rPr>
+                        <a:t>, </a:t>
+                      </a:r>
+                      <a:r>
+                        <a:rPr lang="en-US" sz="1600" dirty="0" err="1">
+                          <a:latin typeface="Consolas" panose="020B0609020204030204" pitchFamily="49" charset="0"/>
+                          <a:cs typeface="Consolas" panose="020B0609020204030204" pitchFamily="49" charset="0"/>
+                        </a:rPr>
+                        <a:t>size_t</a:t>
+                      </a:r>
+                      <a:r>
+                        <a:rPr lang="en-US" sz="1600" dirty="0">
+                          <a:latin typeface="Consolas" panose="020B0609020204030204" pitchFamily="49" charset="0"/>
+                          <a:cs typeface="Consolas" panose="020B0609020204030204" pitchFamily="49" charset="0"/>
+                        </a:rPr>
+                        <a:t> count);</a:t>
+                      </a:r>
+                      <a:endParaRPr lang="ru-RU" sz="1600" dirty="0">
+                        <a:latin typeface="Consolas" panose="020B0609020204030204" pitchFamily="49" charset="0"/>
+                        <a:cs typeface="Consolas" panose="020B0609020204030204" pitchFamily="49" charset="0"/>
+                      </a:endParaRPr>
+                    </a:p>
+                  </a:txBody>
+                  <a:tcPr/>
+                </a:tc>
+                <a:tc>
+                  <a:txBody>
+                    <a:bodyPr/>
+                    <a:lstStyle/>
+                    <a:p>
+                      <a:r>
+                        <a:rPr lang="en-US" sz="1400" dirty="0">
+                          <a:latin typeface="Consolas" panose="020B0609020204030204" pitchFamily="49" charset="0"/>
+                          <a:cs typeface="Consolas" panose="020B0609020204030204" pitchFamily="49" charset="0"/>
+                        </a:rPr>
+                        <a:t>BOOL WINAPI </a:t>
+                      </a:r>
+                      <a:r>
+                        <a:rPr lang="en-US" sz="1400" dirty="0" err="1">
+                          <a:latin typeface="Consolas" panose="020B0609020204030204" pitchFamily="49" charset="0"/>
+                          <a:cs typeface="Consolas" panose="020B0609020204030204" pitchFamily="49" charset="0"/>
+                        </a:rPr>
+                        <a:t>ReadFile</a:t>
+                      </a:r>
+                      <a:r>
+                        <a:rPr lang="en-US" sz="1400" dirty="0">
+                          <a:latin typeface="Consolas" panose="020B0609020204030204" pitchFamily="49" charset="0"/>
+                          <a:cs typeface="Consolas" panose="020B0609020204030204" pitchFamily="49" charset="0"/>
+                        </a:rPr>
+                        <a:t>(</a:t>
+                      </a:r>
+                    </a:p>
+                    <a:p>
+                      <a:r>
+                        <a:rPr lang="en-US" sz="1400" dirty="0">
+                          <a:latin typeface="Consolas" panose="020B0609020204030204" pitchFamily="49" charset="0"/>
+                          <a:cs typeface="Consolas" panose="020B0609020204030204" pitchFamily="49" charset="0"/>
+                        </a:rPr>
+                        <a:t>  _In_        HANDLE          </a:t>
+                      </a:r>
+                      <a:r>
+                        <a:rPr lang="en-US" sz="1400" dirty="0" err="1">
+                          <a:latin typeface="Consolas" panose="020B0609020204030204" pitchFamily="49" charset="0"/>
+                          <a:cs typeface="Consolas" panose="020B0609020204030204" pitchFamily="49" charset="0"/>
+                        </a:rPr>
+                        <a:t>hFile</a:t>
+                      </a:r>
+                      <a:r>
+                        <a:rPr lang="en-US" sz="1400" dirty="0">
+                          <a:latin typeface="Consolas" panose="020B0609020204030204" pitchFamily="49" charset="0"/>
+                          <a:cs typeface="Consolas" panose="020B0609020204030204" pitchFamily="49" charset="0"/>
+                        </a:rPr>
+                        <a:t>,</a:t>
+                      </a:r>
+                    </a:p>
+                    <a:p>
+                      <a:r>
+                        <a:rPr lang="en-US" sz="1400" dirty="0">
+                          <a:latin typeface="Consolas" panose="020B0609020204030204" pitchFamily="49" charset="0"/>
+                          <a:cs typeface="Consolas" panose="020B0609020204030204" pitchFamily="49" charset="0"/>
+                        </a:rPr>
+                        <a:t>  _Out_       LPVOID          </a:t>
+                      </a:r>
+                      <a:r>
+                        <a:rPr lang="en-US" sz="1400" dirty="0" err="1">
+                          <a:latin typeface="Consolas" panose="020B0609020204030204" pitchFamily="49" charset="0"/>
+                          <a:cs typeface="Consolas" panose="020B0609020204030204" pitchFamily="49" charset="0"/>
+                        </a:rPr>
+                        <a:t>lpBuffer</a:t>
+                      </a:r>
+                      <a:r>
+                        <a:rPr lang="en-US" sz="1400" dirty="0">
+                          <a:latin typeface="Consolas" panose="020B0609020204030204" pitchFamily="49" charset="0"/>
+                          <a:cs typeface="Consolas" panose="020B0609020204030204" pitchFamily="49" charset="0"/>
+                        </a:rPr>
+                        <a:t>,</a:t>
+                      </a:r>
+                    </a:p>
+                    <a:p>
+                      <a:r>
+                        <a:rPr lang="en-US" sz="1400" dirty="0">
+                          <a:latin typeface="Consolas" panose="020B0609020204030204" pitchFamily="49" charset="0"/>
+                          <a:cs typeface="Consolas" panose="020B0609020204030204" pitchFamily="49" charset="0"/>
+                        </a:rPr>
+                        <a:t>  _In_        DWORD           </a:t>
+                      </a:r>
+                      <a:r>
+                        <a:rPr lang="en-US" sz="1400" dirty="0" err="1">
+                          <a:latin typeface="Consolas" panose="020B0609020204030204" pitchFamily="49" charset="0"/>
+                          <a:cs typeface="Consolas" panose="020B0609020204030204" pitchFamily="49" charset="0"/>
+                        </a:rPr>
+                        <a:t>nNumberOfBytesToRead</a:t>
+                      </a:r>
+                      <a:r>
+                        <a:rPr lang="en-US" sz="1400" dirty="0">
+                          <a:latin typeface="Consolas" panose="020B0609020204030204" pitchFamily="49" charset="0"/>
+                          <a:cs typeface="Consolas" panose="020B0609020204030204" pitchFamily="49" charset="0"/>
+                        </a:rPr>
+                        <a:t>,</a:t>
+                      </a:r>
+                    </a:p>
+                    <a:p>
+                      <a:r>
+                        <a:rPr lang="en-US" sz="1400" dirty="0">
+                          <a:latin typeface="Consolas" panose="020B0609020204030204" pitchFamily="49" charset="0"/>
+                          <a:cs typeface="Consolas" panose="020B0609020204030204" pitchFamily="49" charset="0"/>
+                        </a:rPr>
+                        <a:t>  _</a:t>
+                      </a:r>
+                      <a:r>
+                        <a:rPr lang="en-US" sz="1400" dirty="0" err="1">
+                          <a:latin typeface="Consolas" panose="020B0609020204030204" pitchFamily="49" charset="0"/>
+                          <a:cs typeface="Consolas" panose="020B0609020204030204" pitchFamily="49" charset="0"/>
+                        </a:rPr>
+                        <a:t>Out_opt</a:t>
+                      </a:r>
+                      <a:r>
+                        <a:rPr lang="en-US" sz="1400" dirty="0">
+                          <a:latin typeface="Consolas" panose="020B0609020204030204" pitchFamily="49" charset="0"/>
+                          <a:cs typeface="Consolas" panose="020B0609020204030204" pitchFamily="49" charset="0"/>
+                        </a:rPr>
+                        <a:t>_   LPDWORD         </a:t>
+                      </a:r>
+                      <a:r>
+                        <a:rPr lang="en-US" sz="1400" dirty="0" err="1">
+                          <a:latin typeface="Consolas" panose="020B0609020204030204" pitchFamily="49" charset="0"/>
+                          <a:cs typeface="Consolas" panose="020B0609020204030204" pitchFamily="49" charset="0"/>
+                        </a:rPr>
+                        <a:t>lpNumberOfBytesRead</a:t>
+                      </a:r>
+                      <a:r>
+                        <a:rPr lang="en-US" sz="1400" dirty="0">
+                          <a:latin typeface="Consolas" panose="020B0609020204030204" pitchFamily="49" charset="0"/>
+                          <a:cs typeface="Consolas" panose="020B0609020204030204" pitchFamily="49" charset="0"/>
+                        </a:rPr>
+                        <a:t>,</a:t>
+                      </a:r>
+                    </a:p>
+                    <a:p>
+                      <a:r>
+                        <a:rPr lang="en-US" sz="1400" dirty="0">
+                          <a:latin typeface="Consolas" panose="020B0609020204030204" pitchFamily="49" charset="0"/>
+                          <a:cs typeface="Consolas" panose="020B0609020204030204" pitchFamily="49" charset="0"/>
+                        </a:rPr>
+                        <a:t>  _</a:t>
+                      </a:r>
+                      <a:r>
+                        <a:rPr lang="en-US" sz="1400" dirty="0" err="1">
+                          <a:latin typeface="Consolas" panose="020B0609020204030204" pitchFamily="49" charset="0"/>
+                          <a:cs typeface="Consolas" panose="020B0609020204030204" pitchFamily="49" charset="0"/>
+                        </a:rPr>
+                        <a:t>Inout_opt</a:t>
+                      </a:r>
+                      <a:r>
+                        <a:rPr lang="en-US" sz="1400" dirty="0">
+                          <a:latin typeface="Consolas" panose="020B0609020204030204" pitchFamily="49" charset="0"/>
+                          <a:cs typeface="Consolas" panose="020B0609020204030204" pitchFamily="49" charset="0"/>
+                        </a:rPr>
+                        <a:t>_ LPOVERLAPPED    </a:t>
+                      </a:r>
+                      <a:r>
+                        <a:rPr lang="en-US" sz="1400" dirty="0" err="1">
+                          <a:latin typeface="Consolas" panose="020B0609020204030204" pitchFamily="49" charset="0"/>
+                          <a:cs typeface="Consolas" panose="020B0609020204030204" pitchFamily="49" charset="0"/>
+                        </a:rPr>
+                        <a:t>lpOverlapped</a:t>
+                      </a:r>
+                      <a:endParaRPr lang="en-US" sz="1400" dirty="0">
+                        <a:latin typeface="Consolas" panose="020B0609020204030204" pitchFamily="49" charset="0"/>
+                        <a:cs typeface="Consolas" panose="020B0609020204030204" pitchFamily="49" charset="0"/>
+                      </a:endParaRPr>
+                    </a:p>
+                    <a:p>
+                      <a:r>
+                        <a:rPr lang="en-US" sz="1400" dirty="0">
+                          <a:latin typeface="Consolas" panose="020B0609020204030204" pitchFamily="49" charset="0"/>
+                          <a:cs typeface="Consolas" panose="020B0609020204030204" pitchFamily="49" charset="0"/>
+                        </a:rPr>
+                        <a:t>);</a:t>
+                      </a:r>
+                      <a:endParaRPr lang="ru-RU" sz="1400" dirty="0">
+                        <a:latin typeface="Consolas" panose="020B0609020204030204" pitchFamily="49" charset="0"/>
+                        <a:cs typeface="Consolas" panose="020B0609020204030204" pitchFamily="49" charset="0"/>
+                      </a:endParaRPr>
+                    </a:p>
+                  </a:txBody>
+                  <a:tcPr/>
+                </a:tc>
+                <a:extLst>
+                  <a:ext uri="{0D108BD9-81ED-4DB2-BD59-A6C34878D82A}">
+                    <a16:rowId xmlns:a16="http://schemas.microsoft.com/office/drawing/2014/main" val="10002"/>
+                  </a:ext>
+                </a:extLst>
+              </a:tr>
+              <a:tr h="441621">
+                <a:tc>
+                  <a:txBody>
+                    <a:bodyPr/>
+                    <a:lstStyle/>
+                    <a:p>
+                      <a:r>
+                        <a:rPr lang="en-US" sz="1600" dirty="0" err="1">
+                          <a:latin typeface="Consolas" panose="020B0609020204030204" pitchFamily="49" charset="0"/>
+                          <a:cs typeface="Consolas" panose="020B0609020204030204" pitchFamily="49" charset="0"/>
+                        </a:rPr>
+                        <a:t>ssize_t</a:t>
+                      </a:r>
+                      <a:r>
+                        <a:rPr lang="en-US" sz="1600" dirty="0">
+                          <a:latin typeface="Consolas" panose="020B0609020204030204" pitchFamily="49" charset="0"/>
+                          <a:cs typeface="Consolas" panose="020B0609020204030204" pitchFamily="49" charset="0"/>
+                        </a:rPr>
+                        <a:t> write(int </a:t>
+                      </a:r>
+                      <a:r>
+                        <a:rPr lang="en-US" sz="1600" dirty="0" err="1">
+                          <a:latin typeface="Consolas" panose="020B0609020204030204" pitchFamily="49" charset="0"/>
+                          <a:cs typeface="Consolas" panose="020B0609020204030204" pitchFamily="49" charset="0"/>
+                        </a:rPr>
+                        <a:t>fd</a:t>
+                      </a:r>
+                      <a:r>
+                        <a:rPr lang="en-US" sz="1600" dirty="0">
+                          <a:latin typeface="Consolas" panose="020B0609020204030204" pitchFamily="49" charset="0"/>
+                          <a:cs typeface="Consolas" panose="020B0609020204030204" pitchFamily="49" charset="0"/>
+                        </a:rPr>
+                        <a:t>, const</a:t>
+                      </a:r>
+                      <a:r>
+                        <a:rPr lang="en-US" sz="1600" baseline="0" dirty="0">
+                          <a:latin typeface="Consolas" panose="020B0609020204030204" pitchFamily="49" charset="0"/>
+                          <a:cs typeface="Consolas" panose="020B0609020204030204" pitchFamily="49" charset="0"/>
+                        </a:rPr>
+                        <a:t> void *</a:t>
+                      </a:r>
+                      <a:r>
+                        <a:rPr lang="en-US" sz="1600" baseline="0" dirty="0" err="1">
+                          <a:latin typeface="Consolas" panose="020B0609020204030204" pitchFamily="49" charset="0"/>
+                          <a:cs typeface="Consolas" panose="020B0609020204030204" pitchFamily="49" charset="0"/>
+                        </a:rPr>
+                        <a:t>buf</a:t>
+                      </a:r>
+                      <a:r>
+                        <a:rPr lang="en-US" sz="1600" baseline="0" dirty="0">
+                          <a:latin typeface="Consolas" panose="020B0609020204030204" pitchFamily="49" charset="0"/>
+                          <a:cs typeface="Consolas" panose="020B0609020204030204" pitchFamily="49" charset="0"/>
+                        </a:rPr>
+                        <a:t>, </a:t>
+                      </a:r>
+                      <a:r>
+                        <a:rPr lang="en-US" sz="1600" baseline="0" dirty="0" err="1">
+                          <a:latin typeface="Consolas" panose="020B0609020204030204" pitchFamily="49" charset="0"/>
+                          <a:cs typeface="Consolas" panose="020B0609020204030204" pitchFamily="49" charset="0"/>
+                        </a:rPr>
+                        <a:t>size_t</a:t>
+                      </a:r>
+                      <a:r>
+                        <a:rPr lang="en-US" sz="1600" baseline="0" dirty="0">
+                          <a:latin typeface="Consolas" panose="020B0609020204030204" pitchFamily="49" charset="0"/>
+                          <a:cs typeface="Consolas" panose="020B0609020204030204" pitchFamily="49" charset="0"/>
+                        </a:rPr>
+                        <a:t> count);</a:t>
+                      </a:r>
+                      <a:endParaRPr lang="ru-RU" sz="1600" dirty="0">
+                        <a:latin typeface="Consolas" panose="020B0609020204030204" pitchFamily="49" charset="0"/>
+                        <a:cs typeface="Consolas" panose="020B0609020204030204" pitchFamily="49" charset="0"/>
+                      </a:endParaRPr>
+                    </a:p>
+                  </a:txBody>
+                  <a:tcPr/>
+                </a:tc>
+                <a:tc>
+                  <a:txBody>
+                    <a:bodyPr/>
+                    <a:lstStyle/>
+                    <a:p>
+                      <a:r>
+                        <a:rPr lang="en-US" sz="1400" dirty="0">
+                          <a:latin typeface="Consolas" panose="020B0609020204030204" pitchFamily="49" charset="0"/>
+                          <a:cs typeface="Consolas" panose="020B0609020204030204" pitchFamily="49" charset="0"/>
+                        </a:rPr>
+                        <a:t>BOOL WINAPI </a:t>
+                      </a:r>
+                      <a:r>
+                        <a:rPr lang="en-US" sz="1400" dirty="0" err="1">
+                          <a:latin typeface="Consolas" panose="020B0609020204030204" pitchFamily="49" charset="0"/>
+                          <a:cs typeface="Consolas" panose="020B0609020204030204" pitchFamily="49" charset="0"/>
+                        </a:rPr>
+                        <a:t>WriteFile</a:t>
+                      </a:r>
+                      <a:r>
+                        <a:rPr lang="en-US" sz="1400" dirty="0">
+                          <a:latin typeface="Consolas" panose="020B0609020204030204" pitchFamily="49" charset="0"/>
+                          <a:cs typeface="Consolas" panose="020B0609020204030204" pitchFamily="49" charset="0"/>
+                        </a:rPr>
+                        <a:t>(</a:t>
+                      </a:r>
+                    </a:p>
+                    <a:p>
+                      <a:r>
+                        <a:rPr lang="en-US" sz="1400" dirty="0">
+                          <a:latin typeface="Consolas" panose="020B0609020204030204" pitchFamily="49" charset="0"/>
+                          <a:cs typeface="Consolas" panose="020B0609020204030204" pitchFamily="49" charset="0"/>
+                        </a:rPr>
+                        <a:t>  _In_        HANDLE          </a:t>
+                      </a:r>
+                      <a:r>
+                        <a:rPr lang="en-US" sz="1400" dirty="0" err="1">
+                          <a:latin typeface="Consolas" panose="020B0609020204030204" pitchFamily="49" charset="0"/>
+                          <a:cs typeface="Consolas" panose="020B0609020204030204" pitchFamily="49" charset="0"/>
+                        </a:rPr>
+                        <a:t>hFile</a:t>
+                      </a:r>
+                      <a:r>
+                        <a:rPr lang="en-US" sz="1400" dirty="0">
+                          <a:latin typeface="Consolas" panose="020B0609020204030204" pitchFamily="49" charset="0"/>
+                          <a:cs typeface="Consolas" panose="020B0609020204030204" pitchFamily="49" charset="0"/>
+                        </a:rPr>
+                        <a:t>,</a:t>
+                      </a:r>
+                    </a:p>
+                    <a:p>
+                      <a:r>
+                        <a:rPr lang="en-US" sz="1400" dirty="0">
+                          <a:latin typeface="Consolas" panose="020B0609020204030204" pitchFamily="49" charset="0"/>
+                          <a:cs typeface="Consolas" panose="020B0609020204030204" pitchFamily="49" charset="0"/>
+                        </a:rPr>
+                        <a:t>  _In_        LPCVOID         </a:t>
+                      </a:r>
+                      <a:r>
+                        <a:rPr lang="en-US" sz="1400" dirty="0" err="1">
+                          <a:latin typeface="Consolas" panose="020B0609020204030204" pitchFamily="49" charset="0"/>
+                          <a:cs typeface="Consolas" panose="020B0609020204030204" pitchFamily="49" charset="0"/>
+                        </a:rPr>
+                        <a:t>lpBuffer</a:t>
+                      </a:r>
+                      <a:r>
+                        <a:rPr lang="en-US" sz="1400" dirty="0">
+                          <a:latin typeface="Consolas" panose="020B0609020204030204" pitchFamily="49" charset="0"/>
+                          <a:cs typeface="Consolas" panose="020B0609020204030204" pitchFamily="49" charset="0"/>
+                        </a:rPr>
+                        <a:t>,</a:t>
+                      </a:r>
+                    </a:p>
+                    <a:p>
+                      <a:r>
+                        <a:rPr lang="en-US" sz="1400" dirty="0">
+                          <a:latin typeface="Consolas" panose="020B0609020204030204" pitchFamily="49" charset="0"/>
+                          <a:cs typeface="Consolas" panose="020B0609020204030204" pitchFamily="49" charset="0"/>
+                        </a:rPr>
+                        <a:t>  _In_        DWORD           </a:t>
+                      </a:r>
+                      <a:r>
+                        <a:rPr lang="en-US" sz="1400" dirty="0" err="1">
+                          <a:latin typeface="Consolas" panose="020B0609020204030204" pitchFamily="49" charset="0"/>
+                          <a:cs typeface="Consolas" panose="020B0609020204030204" pitchFamily="49" charset="0"/>
+                        </a:rPr>
+                        <a:t>nNumberOfBytesToWrite</a:t>
+                      </a:r>
+                      <a:r>
+                        <a:rPr lang="en-US" sz="1400" dirty="0">
+                          <a:latin typeface="Consolas" panose="020B0609020204030204" pitchFamily="49" charset="0"/>
+                          <a:cs typeface="Consolas" panose="020B0609020204030204" pitchFamily="49" charset="0"/>
+                        </a:rPr>
+                        <a:t>,</a:t>
+                      </a:r>
+                    </a:p>
+                    <a:p>
+                      <a:r>
+                        <a:rPr lang="en-US" sz="1400" dirty="0">
+                          <a:latin typeface="Consolas" panose="020B0609020204030204" pitchFamily="49" charset="0"/>
+                          <a:cs typeface="Consolas" panose="020B0609020204030204" pitchFamily="49" charset="0"/>
+                        </a:rPr>
+                        <a:t>  _</a:t>
+                      </a:r>
+                      <a:r>
+                        <a:rPr lang="en-US" sz="1400" dirty="0" err="1">
+                          <a:latin typeface="Consolas" panose="020B0609020204030204" pitchFamily="49" charset="0"/>
+                          <a:cs typeface="Consolas" panose="020B0609020204030204" pitchFamily="49" charset="0"/>
+                        </a:rPr>
+                        <a:t>Out_opt</a:t>
+                      </a:r>
+                      <a:r>
+                        <a:rPr lang="en-US" sz="1400" dirty="0">
+                          <a:latin typeface="Consolas" panose="020B0609020204030204" pitchFamily="49" charset="0"/>
+                          <a:cs typeface="Consolas" panose="020B0609020204030204" pitchFamily="49" charset="0"/>
+                        </a:rPr>
+                        <a:t>_   LPDWORD         </a:t>
+                      </a:r>
+                      <a:r>
+                        <a:rPr lang="en-US" sz="1400" dirty="0" err="1">
+                          <a:latin typeface="Consolas" panose="020B0609020204030204" pitchFamily="49" charset="0"/>
+                          <a:cs typeface="Consolas" panose="020B0609020204030204" pitchFamily="49" charset="0"/>
+                        </a:rPr>
+                        <a:t>lpNumberOfBytesWritten</a:t>
+                      </a:r>
+                      <a:r>
+                        <a:rPr lang="en-US" sz="1400" dirty="0">
+                          <a:latin typeface="Consolas" panose="020B0609020204030204" pitchFamily="49" charset="0"/>
+                          <a:cs typeface="Consolas" panose="020B0609020204030204" pitchFamily="49" charset="0"/>
+                        </a:rPr>
+                        <a:t>,</a:t>
+                      </a:r>
+                    </a:p>
+                    <a:p>
+                      <a:r>
+                        <a:rPr lang="en-US" sz="1400" dirty="0">
+                          <a:latin typeface="Consolas" panose="020B0609020204030204" pitchFamily="49" charset="0"/>
+                          <a:cs typeface="Consolas" panose="020B0609020204030204" pitchFamily="49" charset="0"/>
+                        </a:rPr>
+                        <a:t>  _</a:t>
+                      </a:r>
+                      <a:r>
+                        <a:rPr lang="en-US" sz="1400" dirty="0" err="1">
+                          <a:latin typeface="Consolas" panose="020B0609020204030204" pitchFamily="49" charset="0"/>
+                          <a:cs typeface="Consolas" panose="020B0609020204030204" pitchFamily="49" charset="0"/>
+                        </a:rPr>
+                        <a:t>Inout_opt</a:t>
+                      </a:r>
+                      <a:r>
+                        <a:rPr lang="en-US" sz="1400" dirty="0">
+                          <a:latin typeface="Consolas" panose="020B0609020204030204" pitchFamily="49" charset="0"/>
+                          <a:cs typeface="Consolas" panose="020B0609020204030204" pitchFamily="49" charset="0"/>
+                        </a:rPr>
+                        <a:t>_ LPOVERLAPPED    </a:t>
+                      </a:r>
+                      <a:r>
+                        <a:rPr lang="en-US" sz="1400" dirty="0" err="1">
+                          <a:latin typeface="Consolas" panose="020B0609020204030204" pitchFamily="49" charset="0"/>
+                          <a:cs typeface="Consolas" panose="020B0609020204030204" pitchFamily="49" charset="0"/>
+                        </a:rPr>
+                        <a:t>lpOverlapped</a:t>
+                      </a:r>
+                      <a:endParaRPr lang="en-US" sz="1400" dirty="0">
+                        <a:latin typeface="Consolas" panose="020B0609020204030204" pitchFamily="49" charset="0"/>
+                        <a:cs typeface="Consolas" panose="020B0609020204030204" pitchFamily="49" charset="0"/>
+                      </a:endParaRPr>
+                    </a:p>
+                    <a:p>
+                      <a:r>
+                        <a:rPr lang="en-US" sz="1400" dirty="0">
+                          <a:latin typeface="Consolas" panose="020B0609020204030204" pitchFamily="49" charset="0"/>
+                          <a:cs typeface="Consolas" panose="020B0609020204030204" pitchFamily="49" charset="0"/>
+                        </a:rPr>
+                        <a:t>);</a:t>
+                      </a:r>
+                      <a:endParaRPr lang="ru-RU" sz="1400" dirty="0">
+                        <a:latin typeface="Consolas" panose="020B0609020204030204" pitchFamily="49" charset="0"/>
+                        <a:cs typeface="Consolas" panose="020B0609020204030204" pitchFamily="49" charset="0"/>
+                      </a:endParaRPr>
+                    </a:p>
+                  </a:txBody>
+                  <a:tcPr/>
+                </a:tc>
+                <a:extLst>
+                  <a:ext uri="{0D108BD9-81ED-4DB2-BD59-A6C34878D82A}">
+                    <a16:rowId xmlns:a16="http://schemas.microsoft.com/office/drawing/2014/main" val="10003"/>
+                  </a:ext>
+                </a:extLst>
+              </a:tr>
+            </a:tbl>
+          </a:graphicData>
+        </a:graphic>
+      </p:graphicFrame>
+    </p:spTree>
+    <p:extLst>
+      <p:ext uri="{BB962C8B-B14F-4D97-AF65-F5344CB8AC3E}">
+        <p14:creationId xmlns:p14="http://schemas.microsoft.com/office/powerpoint/2010/main" val="3014771138"/>
+      </p:ext>
+    </p:extLst>
+  </p:cSld>
+  <p:clrMapOvr>
+    <a:masterClrMapping/>
+  </p:clrMapOvr>
+</p:sld>
+</file>
+
+<file path=ppt/slides/slide31.xml><?xml version="1.0" encoding="utf-8"?>
+<p:sld xmlns:a="http://schemas.openxmlformats.org/drawingml/2006/main" xmlns:r="http://schemas.openxmlformats.org/officeDocument/2006/relationships" xmlns:p="http://schemas.openxmlformats.org/presentationml/2006/main">
+  <p:cSld>
+    <p:spTree>
+      <p:nvGrpSpPr>
         <p:cNvPr id="1" name="">
           <a:extLst>
             <a:ext uri="{FF2B5EF4-FFF2-40B4-BE49-F238E27FC236}">
@@ -23930,7 +25639,7 @@
           <p:nvPr>
             <p:extLst>
               <p:ext uri="{D42A27DB-BD31-4B8C-83A1-F6EECF244321}">
-                <p14:modId xmlns:p14="http://schemas.microsoft.com/office/powerpoint/2010/main" val="402608981"/>
+                <p14:modId xmlns:p14="http://schemas.microsoft.com/office/powerpoint/2010/main" val="145358153"/>
               </p:ext>
             </p:extLst>
           </p:nvPr>
@@ -24007,7 +25716,7 @@
                           <a:latin typeface="Consolas" panose="020B0609020204030204" pitchFamily="49" charset="0"/>
                           <a:cs typeface="Consolas" panose="020B0609020204030204" pitchFamily="49" charset="0"/>
                         </a:rPr>
-                        <a:t>size_t</a:t>
+                        <a:t>ssize_t</a:t>
                       </a:r>
                       <a:r>
                         <a:rPr lang="en-US" sz="1600" dirty="0">
@@ -24281,7 +25990,7 @@
                           <a:latin typeface="Consolas" panose="020B0609020204030204" pitchFamily="49" charset="0"/>
                           <a:cs typeface="Consolas" panose="020B0609020204030204" pitchFamily="49" charset="0"/>
                         </a:rPr>
-                        <a:t>size_t</a:t>
+                        <a:t>ssize_t</a:t>
                       </a:r>
                       <a:r>
                         <a:rPr lang="en-US" sz="1600" dirty="0">
@@ -24568,7 +26277,7 @@
 </p:sld>
 </file>
 
-<file path=ppt/slides/slide31.xml><?xml version="1.0" encoding="utf-8"?>
+<file path=ppt/slides/slide32.xml><?xml version="1.0" encoding="utf-8"?>
 <p:sld xmlns:a="http://schemas.openxmlformats.org/drawingml/2006/main" xmlns:r="http://schemas.openxmlformats.org/officeDocument/2006/relationships" xmlns:p="http://schemas.openxmlformats.org/presentationml/2006/main">
   <p:cSld>
     <p:spTree>
@@ -24998,7 +26707,7 @@
 </p:sld>
 </file>
 
-<file path=ppt/slides/slide32.xml><?xml version="1.0" encoding="utf-8"?>
+<file path=ppt/slides/slide33.xml><?xml version="1.0" encoding="utf-8"?>
 <p:sld xmlns:a="http://schemas.openxmlformats.org/drawingml/2006/main" xmlns:r="http://schemas.openxmlformats.org/officeDocument/2006/relationships" xmlns:p="http://schemas.openxmlformats.org/presentationml/2006/main">
   <p:cSld>
     <p:spTree>
@@ -26682,7 +28391,7 @@
 </p:sld>
 </file>
 
-<file path=ppt/slides/slide33.xml><?xml version="1.0" encoding="utf-8"?>
+<file path=ppt/slides/slide34.xml><?xml version="1.0" encoding="utf-8"?>
 <p:sld xmlns:a="http://schemas.openxmlformats.org/drawingml/2006/main" xmlns:r="http://schemas.openxmlformats.org/officeDocument/2006/relationships" xmlns:p="http://schemas.openxmlformats.org/presentationml/2006/main">
   <p:cSld>
     <p:spTree>
@@ -28555,7 +30264,7 @@
 </p:sld>
 </file>
 
-<file path=ppt/slides/slide34.xml><?xml version="1.0" encoding="utf-8"?>
+<file path=ppt/slides/slide35.xml><?xml version="1.0" encoding="utf-8"?>
 <p:sld xmlns:a="http://schemas.openxmlformats.org/drawingml/2006/main" xmlns:r="http://schemas.openxmlformats.org/officeDocument/2006/relationships" xmlns:p="http://schemas.openxmlformats.org/presentationml/2006/main">
   <p:cSld>
     <p:spTree>
@@ -29619,7 +31328,7 @@
 </p:sld>
 </file>
 
-<file path=ppt/slides/slide35.xml><?xml version="1.0" encoding="utf-8"?>
+<file path=ppt/slides/slide36.xml><?xml version="1.0" encoding="utf-8"?>
 <p:sld xmlns:a="http://schemas.openxmlformats.org/drawingml/2006/main" xmlns:r="http://schemas.openxmlformats.org/officeDocument/2006/relationships" xmlns:p="http://schemas.openxmlformats.org/presentationml/2006/main">
   <p:cSld>
     <p:spTree>
@@ -31357,7 +33066,7 @@
 </p:sld>
 </file>
 
-<file path=ppt/slides/slide36.xml><?xml version="1.0" encoding="utf-8"?>
+<file path=ppt/slides/slide37.xml><?xml version="1.0" encoding="utf-8"?>
 <p:sld xmlns:a="http://schemas.openxmlformats.org/drawingml/2006/main" xmlns:r="http://schemas.openxmlformats.org/officeDocument/2006/relationships" xmlns:p="http://schemas.openxmlformats.org/presentationml/2006/main">
   <p:cSld>
     <p:spTree>
@@ -31697,7 +33406,7 @@
 </p:sld>
 </file>
 
-<file path=ppt/slides/slide37.xml><?xml version="1.0" encoding="utf-8"?>
+<file path=ppt/slides/slide38.xml><?xml version="1.0" encoding="utf-8"?>
 <p:sld xmlns:a="http://schemas.openxmlformats.org/drawingml/2006/main" xmlns:r="http://schemas.openxmlformats.org/officeDocument/2006/relationships" xmlns:p="http://schemas.openxmlformats.org/presentationml/2006/main">
   <p:cSld>
     <p:spTree>
@@ -32082,7 +33791,7 @@
 </p:sld>
 </file>
 
-<file path=ppt/slides/slide38.xml><?xml version="1.0" encoding="utf-8"?>
+<file path=ppt/slides/slide39.xml><?xml version="1.0" encoding="utf-8"?>
 <p:sld xmlns:a="http://schemas.openxmlformats.org/drawingml/2006/main" xmlns:r="http://schemas.openxmlformats.org/officeDocument/2006/relationships" xmlns:p="http://schemas.openxmlformats.org/presentationml/2006/main">
   <p:cSld>
     <p:spTree>
@@ -32520,7 +34229,382 @@
 </p:sld>
 </file>
 
-<file path=ppt/slides/slide39.xml><?xml version="1.0" encoding="utf-8"?>
+<file path=ppt/slides/slide4.xml><?xml version="1.0" encoding="utf-8"?>
+<p:sld xmlns:a="http://schemas.openxmlformats.org/drawingml/2006/main" xmlns:r="http://schemas.openxmlformats.org/officeDocument/2006/relationships" xmlns:p="http://schemas.openxmlformats.org/presentationml/2006/main">
+  <p:cSld>
+    <p:spTree>
+      <p:nvGrpSpPr>
+        <p:cNvPr id="1" name=""/>
+        <p:cNvGrpSpPr/>
+        <p:nvPr/>
+      </p:nvGrpSpPr>
+      <p:grpSpPr>
+        <a:xfrm>
+          <a:off x="0" y="0"/>
+          <a:ext cx="0" cy="0"/>
+          <a:chOff x="0" y="0"/>
+          <a:chExt cx="0" cy="0"/>
+        </a:xfrm>
+      </p:grpSpPr>
+      <p:graphicFrame>
+        <p:nvGraphicFramePr>
+          <p:cNvPr id="5" name="Table 4"/>
+          <p:cNvGraphicFramePr>
+            <a:graphicFrameLocks noGrp="1"/>
+          </p:cNvGraphicFramePr>
+          <p:nvPr>
+            <p:extLst>
+              <p:ext uri="{D42A27DB-BD31-4B8C-83A1-F6EECF244321}">
+                <p14:modId xmlns:p14="http://schemas.microsoft.com/office/powerpoint/2010/main" val="4259302632"/>
+              </p:ext>
+            </p:extLst>
+          </p:nvPr>
+        </p:nvGraphicFramePr>
+        <p:xfrm>
+          <a:off x="0" y="1"/>
+          <a:ext cx="12192000" cy="365760"/>
+        </p:xfrm>
+        <a:graphic>
+          <a:graphicData uri="http://schemas.openxmlformats.org/drawingml/2006/table">
+            <a:tbl>
+              <a:tblPr firstRow="1" bandRow="1">
+                <a:tableStyleId>{5C22544A-7EE6-4342-B048-85BDC9FD1C3A}</a:tableStyleId>
+              </a:tblPr>
+              <a:tblGrid>
+                <a:gridCol w="12192000">
+                  <a:extLst>
+                    <a:ext uri="{9D8B030D-6E8A-4147-A177-3AD203B41FA5}">
+                      <a16:colId xmlns:a16="http://schemas.microsoft.com/office/drawing/2014/main" val="20000"/>
+                    </a:ext>
+                  </a:extLst>
+                </a:gridCol>
+              </a:tblGrid>
+              <a:tr h="321276">
+                <a:tc>
+                  <a:txBody>
+                    <a:bodyPr/>
+                    <a:lstStyle/>
+                    <a:p>
+                      <a:r>
+                        <a:rPr lang="en-US" sz="1800" dirty="0"/>
+                        <a:t>The basics of file systems</a:t>
+                      </a:r>
+                      <a:endParaRPr lang="ru-RU" sz="1800" dirty="0"/>
+                    </a:p>
+                  </a:txBody>
+                  <a:tcPr/>
+                </a:tc>
+                <a:extLst>
+                  <a:ext uri="{0D108BD9-81ED-4DB2-BD59-A6C34878D82A}">
+                    <a16:rowId xmlns:a16="http://schemas.microsoft.com/office/drawing/2014/main" val="10000"/>
+                  </a:ext>
+                </a:extLst>
+              </a:tr>
+            </a:tbl>
+          </a:graphicData>
+        </a:graphic>
+      </p:graphicFrame>
+      <p:graphicFrame>
+        <p:nvGraphicFramePr>
+          <p:cNvPr id="6" name="Table 5"/>
+          <p:cNvGraphicFramePr>
+            <a:graphicFrameLocks noGrp="1"/>
+          </p:cNvGraphicFramePr>
+          <p:nvPr>
+            <p:extLst>
+              <p:ext uri="{D42A27DB-BD31-4B8C-83A1-F6EECF244321}">
+                <p14:modId xmlns:p14="http://schemas.microsoft.com/office/powerpoint/2010/main" val="2738830479"/>
+              </p:ext>
+            </p:extLst>
+          </p:nvPr>
+        </p:nvGraphicFramePr>
+        <p:xfrm>
+          <a:off x="0" y="6532604"/>
+          <a:ext cx="12192000" cy="365760"/>
+        </p:xfrm>
+        <a:graphic>
+          <a:graphicData uri="http://schemas.openxmlformats.org/drawingml/2006/table">
+            <a:tbl>
+              <a:tblPr firstRow="1" bandRow="1">
+                <a:tableStyleId>{5C22544A-7EE6-4342-B048-85BDC9FD1C3A}</a:tableStyleId>
+              </a:tblPr>
+              <a:tblGrid>
+                <a:gridCol w="12192000">
+                  <a:extLst>
+                    <a:ext uri="{9D8B030D-6E8A-4147-A177-3AD203B41FA5}">
+                      <a16:colId xmlns:a16="http://schemas.microsoft.com/office/drawing/2014/main" val="20000"/>
+                    </a:ext>
+                  </a:extLst>
+                </a:gridCol>
+              </a:tblGrid>
+              <a:tr h="308094">
+                <a:tc>
+                  <a:txBody>
+                    <a:bodyPr/>
+                    <a:lstStyle/>
+                    <a:p>
+                      <a:endParaRPr lang="ru-RU" dirty="0"/>
+                    </a:p>
+                  </a:txBody>
+                  <a:tcPr/>
+                </a:tc>
+                <a:extLst>
+                  <a:ext uri="{0D108BD9-81ED-4DB2-BD59-A6C34878D82A}">
+                    <a16:rowId xmlns:a16="http://schemas.microsoft.com/office/drawing/2014/main" val="10000"/>
+                  </a:ext>
+                </a:extLst>
+              </a:tr>
+            </a:tbl>
+          </a:graphicData>
+        </a:graphic>
+      </p:graphicFrame>
+      <p:graphicFrame>
+        <p:nvGraphicFramePr>
+          <p:cNvPr id="2" name="Table 1"/>
+          <p:cNvGraphicFramePr>
+            <a:graphicFrameLocks noGrp="1"/>
+          </p:cNvGraphicFramePr>
+          <p:nvPr>
+            <p:extLst>
+              <p:ext uri="{D42A27DB-BD31-4B8C-83A1-F6EECF244321}">
+                <p14:modId xmlns:p14="http://schemas.microsoft.com/office/powerpoint/2010/main" val="2852661041"/>
+              </p:ext>
+            </p:extLst>
+          </p:nvPr>
+        </p:nvGraphicFramePr>
+        <p:xfrm>
+          <a:off x="0" y="365760"/>
+          <a:ext cx="12192000" cy="3840480"/>
+        </p:xfrm>
+        <a:graphic>
+          <a:graphicData uri="http://schemas.openxmlformats.org/drawingml/2006/table">
+            <a:tbl>
+              <a:tblPr firstRow="1" bandRow="1">
+                <a:tableStyleId>{3B4B98B0-60AC-42C2-AFA5-B58CD77FA1E5}</a:tableStyleId>
+              </a:tblPr>
+              <a:tblGrid>
+                <a:gridCol w="12192000">
+                  <a:extLst>
+                    <a:ext uri="{9D8B030D-6E8A-4147-A177-3AD203B41FA5}">
+                      <a16:colId xmlns:a16="http://schemas.microsoft.com/office/drawing/2014/main" val="20000"/>
+                    </a:ext>
+                  </a:extLst>
+                </a:gridCol>
+              </a:tblGrid>
+              <a:tr h="216655">
+                <a:tc>
+                  <a:txBody>
+                    <a:bodyPr/>
+                    <a:lstStyle/>
+                    <a:p>
+                      <a:r>
+                        <a:rPr lang="en-US" dirty="0"/>
+                        <a:t>Virtual memory: why do we need it</a:t>
+                      </a:r>
+                      <a:r>
+                        <a:rPr lang="ru-RU" baseline="0" dirty="0"/>
+                        <a:t>?</a:t>
+                      </a:r>
+                      <a:endParaRPr lang="ru-RU" dirty="0"/>
+                    </a:p>
+                  </a:txBody>
+                  <a:tcPr/>
+                </a:tc>
+                <a:extLst>
+                  <a:ext uri="{0D108BD9-81ED-4DB2-BD59-A6C34878D82A}">
+                    <a16:rowId xmlns:a16="http://schemas.microsoft.com/office/drawing/2014/main" val="10000"/>
+                  </a:ext>
+                </a:extLst>
+              </a:tr>
+              <a:tr h="216655">
+                <a:tc>
+                  <a:txBody>
+                    <a:bodyPr/>
+                    <a:lstStyle/>
+                    <a:p>
+                      <a:pPr marL="342900" marR="0" lvl="0" indent="-342900" algn="l" defTabSz="914400" rtl="0" eaLnBrk="1" fontAlgn="auto" latinLnBrk="0" hangingPunct="1">
+                        <a:lnSpc>
+                          <a:spcPct val="100000"/>
+                        </a:lnSpc>
+                        <a:spcBef>
+                          <a:spcPts val="0"/>
+                        </a:spcBef>
+                        <a:spcAft>
+                          <a:spcPts val="0"/>
+                        </a:spcAft>
+                        <a:buClrTx/>
+                        <a:buSzTx/>
+                        <a:buFont typeface="+mj-lt"/>
+                        <a:buNone/>
+                        <a:tabLst/>
+                        <a:defRPr/>
+                      </a:pPr>
+                      <a:r>
+                        <a:rPr lang="en-US" baseline="0" dirty="0"/>
+                        <a:t>Processes have no direct access to the physical RAM in a computer.</a:t>
+                      </a:r>
+                      <a:endParaRPr lang="ru-RU" baseline="0" dirty="0"/>
+                    </a:p>
+                    <a:p>
+                      <a:pPr marL="342900" marR="0" lvl="0" indent="-342900" algn="l" defTabSz="914400" rtl="0" eaLnBrk="1" fontAlgn="auto" latinLnBrk="0" hangingPunct="1">
+                        <a:lnSpc>
+                          <a:spcPct val="100000"/>
+                        </a:lnSpc>
+                        <a:spcBef>
+                          <a:spcPts val="0"/>
+                        </a:spcBef>
+                        <a:spcAft>
+                          <a:spcPts val="0"/>
+                        </a:spcAft>
+                        <a:buClrTx/>
+                        <a:buSzTx/>
+                        <a:buFont typeface="+mj-lt"/>
+                        <a:buNone/>
+                        <a:tabLst/>
+                        <a:defRPr/>
+                      </a:pPr>
+                      <a:endParaRPr lang="ru-RU" baseline="0" dirty="0"/>
+                    </a:p>
+                    <a:p>
+                      <a:pPr marL="0" marR="0" lvl="0" indent="0" algn="l" defTabSz="914400" rtl="0" eaLnBrk="1" fontAlgn="auto" latinLnBrk="0" hangingPunct="1">
+                        <a:lnSpc>
+                          <a:spcPct val="100000"/>
+                        </a:lnSpc>
+                        <a:spcBef>
+                          <a:spcPts val="0"/>
+                        </a:spcBef>
+                        <a:spcAft>
+                          <a:spcPts val="0"/>
+                        </a:spcAft>
+                        <a:buClrTx/>
+                        <a:buSzTx/>
+                        <a:buFont typeface="+mj-lt"/>
+                        <a:buNone/>
+                        <a:tabLst/>
+                        <a:defRPr/>
+                      </a:pPr>
+                      <a:r>
+                        <a:rPr lang="en-US" baseline="0" dirty="0"/>
+                        <a:t>Instead, the OS supplies them with a virtual address space. Parts of the virtual address space are mapped to the physical memory in a way that is most convenient for the OS</a:t>
+                      </a:r>
+                      <a:r>
+                        <a:rPr lang="ru-RU" baseline="0" dirty="0"/>
+                        <a:t>.</a:t>
+                      </a:r>
+                    </a:p>
+                  </a:txBody>
+                  <a:tcPr/>
+                </a:tc>
+                <a:extLst>
+                  <a:ext uri="{0D108BD9-81ED-4DB2-BD59-A6C34878D82A}">
+                    <a16:rowId xmlns:a16="http://schemas.microsoft.com/office/drawing/2014/main" val="10001"/>
+                  </a:ext>
+                </a:extLst>
+              </a:tr>
+              <a:tr h="216655">
+                <a:tc>
+                  <a:txBody>
+                    <a:bodyPr/>
+                    <a:lstStyle/>
+                    <a:p>
+                      <a:pPr marL="0" indent="0">
+                        <a:buFont typeface="Arial" charset="0"/>
+                        <a:buNone/>
+                      </a:pPr>
+                      <a:r>
+                        <a:rPr lang="en-US" dirty="0"/>
+                        <a:t>What are the benefits of virtual address spaces:</a:t>
+                      </a:r>
+                      <a:endParaRPr lang="en-US" baseline="0" dirty="0"/>
+                    </a:p>
+                    <a:p>
+                      <a:pPr marL="0" indent="0">
+                        <a:buFont typeface="Arial" charset="0"/>
+                        <a:buNone/>
+                      </a:pPr>
+                      <a:endParaRPr lang="ru-RU" dirty="0"/>
+                    </a:p>
+                    <a:p>
+                      <a:pPr marL="342900" indent="-342900">
+                        <a:buFont typeface="+mj-lt"/>
+                        <a:buAutoNum type="arabicPeriod"/>
+                      </a:pPr>
+                      <a:r>
+                        <a:rPr lang="en-US" dirty="0"/>
+                        <a:t>The address space of a process is very simple, and every process has the same address space. Essentially, a process believes it can use all addresses in the range</a:t>
+                      </a:r>
+                      <a:r>
+                        <a:rPr lang="ru-RU" baseline="0" dirty="0"/>
+                        <a:t> </a:t>
+                      </a:r>
+                      <a:r>
+                        <a:rPr lang="en-US" baseline="0" dirty="0">
+                          <a:latin typeface="Consolas" panose="020B0609020204030204" pitchFamily="49" charset="0"/>
+                          <a:cs typeface="Consolas" panose="020B0609020204030204" pitchFamily="49" charset="0"/>
+                        </a:rPr>
+                        <a:t>[0, MAX_ADDR).</a:t>
+                      </a:r>
+                      <a:endParaRPr lang="en-US" baseline="0" dirty="0"/>
+                    </a:p>
+                    <a:p>
+                      <a:pPr marL="342900" indent="-342900">
+                        <a:buFont typeface="+mj-lt"/>
+                        <a:buAutoNum type="arabicPeriod"/>
+                      </a:pPr>
+                      <a:r>
+                        <a:rPr lang="en-US" baseline="0" dirty="0"/>
+                        <a:t>Processes are isolated one from another.</a:t>
+                      </a:r>
+                      <a:endParaRPr lang="ru-RU" baseline="0" dirty="0"/>
+                    </a:p>
+                    <a:p>
+                      <a:pPr marL="342900" indent="-342900">
+                        <a:buFont typeface="+mj-lt"/>
+                        <a:buAutoNum type="arabicPeriod"/>
+                      </a:pPr>
+                      <a:r>
+                        <a:rPr lang="en-US" baseline="0" dirty="0"/>
+                        <a:t>Processes can share memory without even knowing that. For example, it suffices to load shared libraries into the memory only once, and then share them between processes.</a:t>
+                      </a:r>
+                    </a:p>
+                    <a:p>
+                      <a:pPr marL="342900" indent="-342900">
+                        <a:buFont typeface="+mj-lt"/>
+                        <a:buAutoNum type="arabicPeriod"/>
+                      </a:pPr>
+                      <a:r>
+                        <a:rPr lang="en-US" baseline="0" dirty="0"/>
+                        <a:t>The memory of a process can be partially swapped out in a way that is transparent to the process.</a:t>
+                      </a:r>
+                      <a:endParaRPr lang="ru-RU" baseline="0" dirty="0"/>
+                    </a:p>
+                  </a:txBody>
+                  <a:tcPr/>
+                </a:tc>
+                <a:extLst>
+                  <a:ext uri="{0D108BD9-81ED-4DB2-BD59-A6C34878D82A}">
+                    <a16:rowId xmlns:a16="http://schemas.microsoft.com/office/drawing/2014/main" val="10002"/>
+                  </a:ext>
+                </a:extLst>
+              </a:tr>
+            </a:tbl>
+          </a:graphicData>
+        </a:graphic>
+      </p:graphicFrame>
+    </p:spTree>
+    <p:extLst>
+      <p:ext uri="{BB962C8B-B14F-4D97-AF65-F5344CB8AC3E}">
+        <p14:creationId xmlns:p14="http://schemas.microsoft.com/office/powerpoint/2010/main" val="651436505"/>
+      </p:ext>
+    </p:extLst>
+  </p:cSld>
+  <p:clrMapOvr>
+    <a:masterClrMapping/>
+  </p:clrMapOvr>
+</p:sld>
+</file>
+
+<file path=ppt/slides/slide40.xml><?xml version="1.0" encoding="utf-8"?>
 <p:sld xmlns:a="http://schemas.openxmlformats.org/drawingml/2006/main" xmlns:r="http://schemas.openxmlformats.org/officeDocument/2006/relationships" xmlns:p="http://schemas.openxmlformats.org/presentationml/2006/main">
   <p:cSld>
     <p:spTree>
@@ -32658,7 +34742,7 @@
           <p:nvPr>
             <p:extLst>
               <p:ext uri="{D42A27DB-BD31-4B8C-83A1-F6EECF244321}">
-                <p14:modId xmlns:p14="http://schemas.microsoft.com/office/powerpoint/2010/main" val="402990642"/>
+                <p14:modId xmlns:p14="http://schemas.microsoft.com/office/powerpoint/2010/main" val="2641147011"/>
               </p:ext>
             </p:extLst>
           </p:nvPr>
@@ -32727,7 +34811,7 @@
                     <a:p>
                       <a:r>
                         <a:rPr lang="en-US" dirty="0"/>
-                        <a:t>An application and the kernel share a memory are that contains two circular buffers:</a:t>
+                        <a:t>An application and the kernel share a memory are that contains two ring buffers:</a:t>
                       </a:r>
                       <a:endParaRPr lang="ru-RU" dirty="0"/>
                     </a:p>
@@ -33765,382 +35849,7 @@
 </p:sld>
 </file>
 
-<file path=ppt/slides/slide4.xml><?xml version="1.0" encoding="utf-8"?>
-<p:sld xmlns:a="http://schemas.openxmlformats.org/drawingml/2006/main" xmlns:r="http://schemas.openxmlformats.org/officeDocument/2006/relationships" xmlns:p="http://schemas.openxmlformats.org/presentationml/2006/main">
-  <p:cSld>
-    <p:spTree>
-      <p:nvGrpSpPr>
-        <p:cNvPr id="1" name=""/>
-        <p:cNvGrpSpPr/>
-        <p:nvPr/>
-      </p:nvGrpSpPr>
-      <p:grpSpPr>
-        <a:xfrm>
-          <a:off x="0" y="0"/>
-          <a:ext cx="0" cy="0"/>
-          <a:chOff x="0" y="0"/>
-          <a:chExt cx="0" cy="0"/>
-        </a:xfrm>
-      </p:grpSpPr>
-      <p:graphicFrame>
-        <p:nvGraphicFramePr>
-          <p:cNvPr id="5" name="Table 4"/>
-          <p:cNvGraphicFramePr>
-            <a:graphicFrameLocks noGrp="1"/>
-          </p:cNvGraphicFramePr>
-          <p:nvPr>
-            <p:extLst>
-              <p:ext uri="{D42A27DB-BD31-4B8C-83A1-F6EECF244321}">
-                <p14:modId xmlns:p14="http://schemas.microsoft.com/office/powerpoint/2010/main" val="4259302632"/>
-              </p:ext>
-            </p:extLst>
-          </p:nvPr>
-        </p:nvGraphicFramePr>
-        <p:xfrm>
-          <a:off x="0" y="1"/>
-          <a:ext cx="12192000" cy="365760"/>
-        </p:xfrm>
-        <a:graphic>
-          <a:graphicData uri="http://schemas.openxmlformats.org/drawingml/2006/table">
-            <a:tbl>
-              <a:tblPr firstRow="1" bandRow="1">
-                <a:tableStyleId>{5C22544A-7EE6-4342-B048-85BDC9FD1C3A}</a:tableStyleId>
-              </a:tblPr>
-              <a:tblGrid>
-                <a:gridCol w="12192000">
-                  <a:extLst>
-                    <a:ext uri="{9D8B030D-6E8A-4147-A177-3AD203B41FA5}">
-                      <a16:colId xmlns:a16="http://schemas.microsoft.com/office/drawing/2014/main" val="20000"/>
-                    </a:ext>
-                  </a:extLst>
-                </a:gridCol>
-              </a:tblGrid>
-              <a:tr h="321276">
-                <a:tc>
-                  <a:txBody>
-                    <a:bodyPr/>
-                    <a:lstStyle/>
-                    <a:p>
-                      <a:r>
-                        <a:rPr lang="en-US" sz="1800" dirty="0"/>
-                        <a:t>The basics of file systems</a:t>
-                      </a:r>
-                      <a:endParaRPr lang="ru-RU" sz="1800" dirty="0"/>
-                    </a:p>
-                  </a:txBody>
-                  <a:tcPr/>
-                </a:tc>
-                <a:extLst>
-                  <a:ext uri="{0D108BD9-81ED-4DB2-BD59-A6C34878D82A}">
-                    <a16:rowId xmlns:a16="http://schemas.microsoft.com/office/drawing/2014/main" val="10000"/>
-                  </a:ext>
-                </a:extLst>
-              </a:tr>
-            </a:tbl>
-          </a:graphicData>
-        </a:graphic>
-      </p:graphicFrame>
-      <p:graphicFrame>
-        <p:nvGraphicFramePr>
-          <p:cNvPr id="6" name="Table 5"/>
-          <p:cNvGraphicFramePr>
-            <a:graphicFrameLocks noGrp="1"/>
-          </p:cNvGraphicFramePr>
-          <p:nvPr>
-            <p:extLst>
-              <p:ext uri="{D42A27DB-BD31-4B8C-83A1-F6EECF244321}">
-                <p14:modId xmlns:p14="http://schemas.microsoft.com/office/powerpoint/2010/main" val="2738830479"/>
-              </p:ext>
-            </p:extLst>
-          </p:nvPr>
-        </p:nvGraphicFramePr>
-        <p:xfrm>
-          <a:off x="0" y="6532604"/>
-          <a:ext cx="12192000" cy="365760"/>
-        </p:xfrm>
-        <a:graphic>
-          <a:graphicData uri="http://schemas.openxmlformats.org/drawingml/2006/table">
-            <a:tbl>
-              <a:tblPr firstRow="1" bandRow="1">
-                <a:tableStyleId>{5C22544A-7EE6-4342-B048-85BDC9FD1C3A}</a:tableStyleId>
-              </a:tblPr>
-              <a:tblGrid>
-                <a:gridCol w="12192000">
-                  <a:extLst>
-                    <a:ext uri="{9D8B030D-6E8A-4147-A177-3AD203B41FA5}">
-                      <a16:colId xmlns:a16="http://schemas.microsoft.com/office/drawing/2014/main" val="20000"/>
-                    </a:ext>
-                  </a:extLst>
-                </a:gridCol>
-              </a:tblGrid>
-              <a:tr h="308094">
-                <a:tc>
-                  <a:txBody>
-                    <a:bodyPr/>
-                    <a:lstStyle/>
-                    <a:p>
-                      <a:endParaRPr lang="ru-RU" dirty="0"/>
-                    </a:p>
-                  </a:txBody>
-                  <a:tcPr/>
-                </a:tc>
-                <a:extLst>
-                  <a:ext uri="{0D108BD9-81ED-4DB2-BD59-A6C34878D82A}">
-                    <a16:rowId xmlns:a16="http://schemas.microsoft.com/office/drawing/2014/main" val="10000"/>
-                  </a:ext>
-                </a:extLst>
-              </a:tr>
-            </a:tbl>
-          </a:graphicData>
-        </a:graphic>
-      </p:graphicFrame>
-      <p:graphicFrame>
-        <p:nvGraphicFramePr>
-          <p:cNvPr id="2" name="Table 1"/>
-          <p:cNvGraphicFramePr>
-            <a:graphicFrameLocks noGrp="1"/>
-          </p:cNvGraphicFramePr>
-          <p:nvPr>
-            <p:extLst>
-              <p:ext uri="{D42A27DB-BD31-4B8C-83A1-F6EECF244321}">
-                <p14:modId xmlns:p14="http://schemas.microsoft.com/office/powerpoint/2010/main" val="2852661041"/>
-              </p:ext>
-            </p:extLst>
-          </p:nvPr>
-        </p:nvGraphicFramePr>
-        <p:xfrm>
-          <a:off x="0" y="365760"/>
-          <a:ext cx="12192000" cy="3840480"/>
-        </p:xfrm>
-        <a:graphic>
-          <a:graphicData uri="http://schemas.openxmlformats.org/drawingml/2006/table">
-            <a:tbl>
-              <a:tblPr firstRow="1" bandRow="1">
-                <a:tableStyleId>{3B4B98B0-60AC-42C2-AFA5-B58CD77FA1E5}</a:tableStyleId>
-              </a:tblPr>
-              <a:tblGrid>
-                <a:gridCol w="12192000">
-                  <a:extLst>
-                    <a:ext uri="{9D8B030D-6E8A-4147-A177-3AD203B41FA5}">
-                      <a16:colId xmlns:a16="http://schemas.microsoft.com/office/drawing/2014/main" val="20000"/>
-                    </a:ext>
-                  </a:extLst>
-                </a:gridCol>
-              </a:tblGrid>
-              <a:tr h="216655">
-                <a:tc>
-                  <a:txBody>
-                    <a:bodyPr/>
-                    <a:lstStyle/>
-                    <a:p>
-                      <a:r>
-                        <a:rPr lang="en-US" dirty="0"/>
-                        <a:t>Virtual memory: why do we need it</a:t>
-                      </a:r>
-                      <a:r>
-                        <a:rPr lang="ru-RU" baseline="0" dirty="0"/>
-                        <a:t>?</a:t>
-                      </a:r>
-                      <a:endParaRPr lang="ru-RU" dirty="0"/>
-                    </a:p>
-                  </a:txBody>
-                  <a:tcPr/>
-                </a:tc>
-                <a:extLst>
-                  <a:ext uri="{0D108BD9-81ED-4DB2-BD59-A6C34878D82A}">
-                    <a16:rowId xmlns:a16="http://schemas.microsoft.com/office/drawing/2014/main" val="10000"/>
-                  </a:ext>
-                </a:extLst>
-              </a:tr>
-              <a:tr h="216655">
-                <a:tc>
-                  <a:txBody>
-                    <a:bodyPr/>
-                    <a:lstStyle/>
-                    <a:p>
-                      <a:pPr marL="342900" marR="0" lvl="0" indent="-342900" algn="l" defTabSz="914400" rtl="0" eaLnBrk="1" fontAlgn="auto" latinLnBrk="0" hangingPunct="1">
-                        <a:lnSpc>
-                          <a:spcPct val="100000"/>
-                        </a:lnSpc>
-                        <a:spcBef>
-                          <a:spcPts val="0"/>
-                        </a:spcBef>
-                        <a:spcAft>
-                          <a:spcPts val="0"/>
-                        </a:spcAft>
-                        <a:buClrTx/>
-                        <a:buSzTx/>
-                        <a:buFont typeface="+mj-lt"/>
-                        <a:buNone/>
-                        <a:tabLst/>
-                        <a:defRPr/>
-                      </a:pPr>
-                      <a:r>
-                        <a:rPr lang="en-US" baseline="0" dirty="0"/>
-                        <a:t>Processes have no direct access to the physical RAM in a computer.</a:t>
-                      </a:r>
-                      <a:endParaRPr lang="ru-RU" baseline="0" dirty="0"/>
-                    </a:p>
-                    <a:p>
-                      <a:pPr marL="342900" marR="0" lvl="0" indent="-342900" algn="l" defTabSz="914400" rtl="0" eaLnBrk="1" fontAlgn="auto" latinLnBrk="0" hangingPunct="1">
-                        <a:lnSpc>
-                          <a:spcPct val="100000"/>
-                        </a:lnSpc>
-                        <a:spcBef>
-                          <a:spcPts val="0"/>
-                        </a:spcBef>
-                        <a:spcAft>
-                          <a:spcPts val="0"/>
-                        </a:spcAft>
-                        <a:buClrTx/>
-                        <a:buSzTx/>
-                        <a:buFont typeface="+mj-lt"/>
-                        <a:buNone/>
-                        <a:tabLst/>
-                        <a:defRPr/>
-                      </a:pPr>
-                      <a:endParaRPr lang="ru-RU" baseline="0" dirty="0"/>
-                    </a:p>
-                    <a:p>
-                      <a:pPr marL="0" marR="0" lvl="0" indent="0" algn="l" defTabSz="914400" rtl="0" eaLnBrk="1" fontAlgn="auto" latinLnBrk="0" hangingPunct="1">
-                        <a:lnSpc>
-                          <a:spcPct val="100000"/>
-                        </a:lnSpc>
-                        <a:spcBef>
-                          <a:spcPts val="0"/>
-                        </a:spcBef>
-                        <a:spcAft>
-                          <a:spcPts val="0"/>
-                        </a:spcAft>
-                        <a:buClrTx/>
-                        <a:buSzTx/>
-                        <a:buFont typeface="+mj-lt"/>
-                        <a:buNone/>
-                        <a:tabLst/>
-                        <a:defRPr/>
-                      </a:pPr>
-                      <a:r>
-                        <a:rPr lang="en-US" baseline="0" dirty="0"/>
-                        <a:t>Instead, the OS supplies them with a virtual address space. Parts of the virtual address space are mapped to the physical memory in a way that is most convenient for the OS</a:t>
-                      </a:r>
-                      <a:r>
-                        <a:rPr lang="ru-RU" baseline="0" dirty="0"/>
-                        <a:t>.</a:t>
-                      </a:r>
-                    </a:p>
-                  </a:txBody>
-                  <a:tcPr/>
-                </a:tc>
-                <a:extLst>
-                  <a:ext uri="{0D108BD9-81ED-4DB2-BD59-A6C34878D82A}">
-                    <a16:rowId xmlns:a16="http://schemas.microsoft.com/office/drawing/2014/main" val="10001"/>
-                  </a:ext>
-                </a:extLst>
-              </a:tr>
-              <a:tr h="216655">
-                <a:tc>
-                  <a:txBody>
-                    <a:bodyPr/>
-                    <a:lstStyle/>
-                    <a:p>
-                      <a:pPr marL="0" indent="0">
-                        <a:buFont typeface="Arial" charset="0"/>
-                        <a:buNone/>
-                      </a:pPr>
-                      <a:r>
-                        <a:rPr lang="en-US" dirty="0"/>
-                        <a:t>What are the benefits of virtual address spaces:</a:t>
-                      </a:r>
-                      <a:endParaRPr lang="en-US" baseline="0" dirty="0"/>
-                    </a:p>
-                    <a:p>
-                      <a:pPr marL="0" indent="0">
-                        <a:buFont typeface="Arial" charset="0"/>
-                        <a:buNone/>
-                      </a:pPr>
-                      <a:endParaRPr lang="ru-RU" dirty="0"/>
-                    </a:p>
-                    <a:p>
-                      <a:pPr marL="342900" indent="-342900">
-                        <a:buFont typeface="+mj-lt"/>
-                        <a:buAutoNum type="arabicPeriod"/>
-                      </a:pPr>
-                      <a:r>
-                        <a:rPr lang="en-US" dirty="0"/>
-                        <a:t>The address space of a process is very simple, and every process has the same address space. Essentially, a process believes it can use all addresses in the range</a:t>
-                      </a:r>
-                      <a:r>
-                        <a:rPr lang="ru-RU" baseline="0" dirty="0"/>
-                        <a:t> </a:t>
-                      </a:r>
-                      <a:r>
-                        <a:rPr lang="en-US" baseline="0" dirty="0">
-                          <a:latin typeface="Consolas" panose="020B0609020204030204" pitchFamily="49" charset="0"/>
-                          <a:cs typeface="Consolas" panose="020B0609020204030204" pitchFamily="49" charset="0"/>
-                        </a:rPr>
-                        <a:t>[0, MAX_ADDR).</a:t>
-                      </a:r>
-                      <a:endParaRPr lang="en-US" baseline="0" dirty="0"/>
-                    </a:p>
-                    <a:p>
-                      <a:pPr marL="342900" indent="-342900">
-                        <a:buFont typeface="+mj-lt"/>
-                        <a:buAutoNum type="arabicPeriod"/>
-                      </a:pPr>
-                      <a:r>
-                        <a:rPr lang="en-US" baseline="0" dirty="0"/>
-                        <a:t>Processes are isolated one from another.</a:t>
-                      </a:r>
-                      <a:endParaRPr lang="ru-RU" baseline="0" dirty="0"/>
-                    </a:p>
-                    <a:p>
-                      <a:pPr marL="342900" indent="-342900">
-                        <a:buFont typeface="+mj-lt"/>
-                        <a:buAutoNum type="arabicPeriod"/>
-                      </a:pPr>
-                      <a:r>
-                        <a:rPr lang="en-US" baseline="0" dirty="0"/>
-                        <a:t>Processes can share memory without even knowing that. For example, it suffices to load shared libraries into the memory only once, and then share them between processes.</a:t>
-                      </a:r>
-                    </a:p>
-                    <a:p>
-                      <a:pPr marL="342900" indent="-342900">
-                        <a:buFont typeface="+mj-lt"/>
-                        <a:buAutoNum type="arabicPeriod"/>
-                      </a:pPr>
-                      <a:r>
-                        <a:rPr lang="en-US" baseline="0" dirty="0"/>
-                        <a:t>The memory of a process can be partially swapped out in a way that is transparent to the process.</a:t>
-                      </a:r>
-                      <a:endParaRPr lang="ru-RU" baseline="0" dirty="0"/>
-                    </a:p>
-                  </a:txBody>
-                  <a:tcPr/>
-                </a:tc>
-                <a:extLst>
-                  <a:ext uri="{0D108BD9-81ED-4DB2-BD59-A6C34878D82A}">
-                    <a16:rowId xmlns:a16="http://schemas.microsoft.com/office/drawing/2014/main" val="10002"/>
-                  </a:ext>
-                </a:extLst>
-              </a:tr>
-            </a:tbl>
-          </a:graphicData>
-        </a:graphic>
-      </p:graphicFrame>
-    </p:spTree>
-    <p:extLst>
-      <p:ext uri="{BB962C8B-B14F-4D97-AF65-F5344CB8AC3E}">
-        <p14:creationId xmlns:p14="http://schemas.microsoft.com/office/powerpoint/2010/main" val="651436505"/>
-      </p:ext>
-    </p:extLst>
-  </p:cSld>
-  <p:clrMapOvr>
-    <a:masterClrMapping/>
-  </p:clrMapOvr>
-</p:sld>
-</file>
-
-<file path=ppt/slides/slide40.xml><?xml version="1.0" encoding="utf-8"?>
+<file path=ppt/slides/slide41.xml><?xml version="1.0" encoding="utf-8"?>
 <p:sld xmlns:a="http://schemas.openxmlformats.org/drawingml/2006/main" xmlns:r="http://schemas.openxmlformats.org/officeDocument/2006/relationships" xmlns:p="http://schemas.openxmlformats.org/presentationml/2006/main">
   <p:cSld>
     <p:spTree>
@@ -34278,7 +35987,7 @@
           <p:nvPr>
             <p:extLst>
               <p:ext uri="{D42A27DB-BD31-4B8C-83A1-F6EECF244321}">
-                <p14:modId xmlns:p14="http://schemas.microsoft.com/office/powerpoint/2010/main" val="944866178"/>
+                <p14:modId xmlns:p14="http://schemas.microsoft.com/office/powerpoint/2010/main" val="3790111092"/>
               </p:ext>
             </p:extLst>
           </p:nvPr>
@@ -34347,7 +36056,7 @@
                     <a:p>
                       <a:r>
                         <a:rPr lang="en-US" dirty="0"/>
-                        <a:t>An application and the kernel share a memory are that contains two circular buffers:</a:t>
+                        <a:t>An application and the kernel share a memory are that contains two ring buffers:</a:t>
                       </a:r>
                       <a:endParaRPr lang="ru-RU" dirty="0"/>
                     </a:p>
@@ -35481,7 +37190,7 @@
 </p:sld>
 </file>
 
-<file path=ppt/slides/slide41.xml><?xml version="1.0" encoding="utf-8"?>
+<file path=ppt/slides/slide42.xml><?xml version="1.0" encoding="utf-8"?>
 <p:sld xmlns:a="http://schemas.openxmlformats.org/drawingml/2006/main" xmlns:r="http://schemas.openxmlformats.org/officeDocument/2006/relationships" xmlns:p="http://schemas.openxmlformats.org/presentationml/2006/main">
   <p:cSld>
     <p:spTree>
@@ -35619,7 +37328,7 @@
           <p:nvPr>
             <p:extLst>
               <p:ext uri="{D42A27DB-BD31-4B8C-83A1-F6EECF244321}">
-                <p14:modId xmlns:p14="http://schemas.microsoft.com/office/powerpoint/2010/main" val="1018966060"/>
+                <p14:modId xmlns:p14="http://schemas.microsoft.com/office/powerpoint/2010/main" val="126925707"/>
               </p:ext>
             </p:extLst>
           </p:nvPr>
@@ -35688,7 +37397,7 @@
                     <a:p>
                       <a:r>
                         <a:rPr lang="en-US" dirty="0"/>
-                        <a:t>An application and the kernel share a memory are that contains two circular buffers:</a:t>
+                        <a:t>An application and the kernel share a memory are that contains two ring buffers:</a:t>
                       </a:r>
                       <a:endParaRPr lang="ru-RU" dirty="0"/>
                     </a:p>
@@ -37153,7 +38862,7 @@
 </p:sld>
 </file>
 
-<file path=ppt/slides/slide42.xml><?xml version="1.0" encoding="utf-8"?>
+<file path=ppt/slides/slide43.xml><?xml version="1.0" encoding="utf-8"?>
 <p:sld xmlns:a="http://schemas.openxmlformats.org/drawingml/2006/main" xmlns:r="http://schemas.openxmlformats.org/officeDocument/2006/relationships" xmlns:p="http://schemas.openxmlformats.org/presentationml/2006/main">
   <p:cSld>
     <p:spTree>
@@ -37291,7 +39000,7 @@
           <p:nvPr>
             <p:extLst>
               <p:ext uri="{D42A27DB-BD31-4B8C-83A1-F6EECF244321}">
-                <p14:modId xmlns:p14="http://schemas.microsoft.com/office/powerpoint/2010/main" val="664160127"/>
+                <p14:modId xmlns:p14="http://schemas.microsoft.com/office/powerpoint/2010/main" val="2211902384"/>
               </p:ext>
             </p:extLst>
           </p:nvPr>
@@ -37377,7 +39086,7 @@
                       </a:pPr>
                       <a:r>
                         <a:rPr lang="en-US" dirty="0"/>
-                        <a:t>An application and the kernel share a memory are that contains two circular buffers:</a:t>
+                        <a:t>An application and the kernel share a memory are that contains two ring buffers:</a:t>
                       </a:r>
                       <a:endParaRPr lang="ru-RU" dirty="0"/>
                     </a:p>
@@ -37616,7 +39325,7 @@
                       </a:r>
                       <a:r>
                         <a:rPr lang="en-US" dirty="0"/>
-                        <a:t>issue one more write request</a:t>
+                        <a:t>issue the write #0</a:t>
                       </a:r>
                       <a:r>
                         <a:rPr lang="ru-RU" dirty="0"/>
@@ -39020,6 +40729,3117 @@
     <p:extLst>
       <p:ext uri="{BB962C8B-B14F-4D97-AF65-F5344CB8AC3E}">
         <p14:creationId xmlns:p14="http://schemas.microsoft.com/office/powerpoint/2010/main" val="1367526551"/>
+      </p:ext>
+    </p:extLst>
+  </p:cSld>
+  <p:clrMapOvr>
+    <a:masterClrMapping/>
+  </p:clrMapOvr>
+</p:sld>
+</file>
+
+<file path=ppt/slides/slide44.xml><?xml version="1.0" encoding="utf-8"?>
+<p:sld xmlns:a="http://schemas.openxmlformats.org/drawingml/2006/main" xmlns:r="http://schemas.openxmlformats.org/officeDocument/2006/relationships" xmlns:p="http://schemas.openxmlformats.org/presentationml/2006/main">
+  <p:cSld>
+    <p:spTree>
+      <p:nvGrpSpPr>
+        <p:cNvPr id="1" name="">
+          <a:extLst>
+            <a:ext uri="{FF2B5EF4-FFF2-40B4-BE49-F238E27FC236}">
+              <a16:creationId xmlns:a16="http://schemas.microsoft.com/office/drawing/2014/main" id="{4911492B-AE5D-EC45-70E9-C0400E57BA24}"/>
+            </a:ext>
+          </a:extLst>
+        </p:cNvPr>
+        <p:cNvGrpSpPr/>
+        <p:nvPr/>
+      </p:nvGrpSpPr>
+      <p:grpSpPr>
+        <a:xfrm>
+          <a:off x="0" y="0"/>
+          <a:ext cx="0" cy="0"/>
+          <a:chOff x="0" y="0"/>
+          <a:chExt cx="0" cy="0"/>
+        </a:xfrm>
+      </p:grpSpPr>
+      <p:graphicFrame>
+        <p:nvGraphicFramePr>
+          <p:cNvPr id="5" name="Table 4">
+            <a:extLst>
+              <a:ext uri="{FF2B5EF4-FFF2-40B4-BE49-F238E27FC236}">
+                <a16:creationId xmlns:a16="http://schemas.microsoft.com/office/drawing/2014/main" id="{229078B3-1747-1B06-9143-DF4940A7F77E}"/>
+              </a:ext>
+            </a:extLst>
+          </p:cNvPr>
+          <p:cNvGraphicFramePr>
+            <a:graphicFrameLocks noGrp="1"/>
+          </p:cNvGraphicFramePr>
+          <p:nvPr/>
+        </p:nvGraphicFramePr>
+        <p:xfrm>
+          <a:off x="0" y="1"/>
+          <a:ext cx="12192000" cy="365760"/>
+        </p:xfrm>
+        <a:graphic>
+          <a:graphicData uri="http://schemas.openxmlformats.org/drawingml/2006/table">
+            <a:tbl>
+              <a:tblPr firstRow="1" bandRow="1">
+                <a:tableStyleId>{5C22544A-7EE6-4342-B048-85BDC9FD1C3A}</a:tableStyleId>
+              </a:tblPr>
+              <a:tblGrid>
+                <a:gridCol w="12192000">
+                  <a:extLst>
+                    <a:ext uri="{9D8B030D-6E8A-4147-A177-3AD203B41FA5}">
+                      <a16:colId xmlns:a16="http://schemas.microsoft.com/office/drawing/2014/main" val="20000"/>
+                    </a:ext>
+                  </a:extLst>
+                </a:gridCol>
+              </a:tblGrid>
+              <a:tr h="321276">
+                <a:tc>
+                  <a:txBody>
+                    <a:bodyPr/>
+                    <a:lstStyle/>
+                    <a:p>
+                      <a:r>
+                        <a:rPr lang="en-US" sz="1800" dirty="0"/>
+                        <a:t>The basics of file systems</a:t>
+                      </a:r>
+                      <a:endParaRPr lang="ru-RU" dirty="0"/>
+                    </a:p>
+                  </a:txBody>
+                  <a:tcPr/>
+                </a:tc>
+                <a:extLst>
+                  <a:ext uri="{0D108BD9-81ED-4DB2-BD59-A6C34878D82A}">
+                    <a16:rowId xmlns:a16="http://schemas.microsoft.com/office/drawing/2014/main" val="10000"/>
+                  </a:ext>
+                </a:extLst>
+              </a:tr>
+            </a:tbl>
+          </a:graphicData>
+        </a:graphic>
+      </p:graphicFrame>
+      <p:graphicFrame>
+        <p:nvGraphicFramePr>
+          <p:cNvPr id="6" name="Table 5">
+            <a:extLst>
+              <a:ext uri="{FF2B5EF4-FFF2-40B4-BE49-F238E27FC236}">
+                <a16:creationId xmlns:a16="http://schemas.microsoft.com/office/drawing/2014/main" id="{F7DFE407-7257-9868-A38B-2A524FABFC22}"/>
+              </a:ext>
+            </a:extLst>
+          </p:cNvPr>
+          <p:cNvGraphicFramePr>
+            <a:graphicFrameLocks noGrp="1"/>
+          </p:cNvGraphicFramePr>
+          <p:nvPr/>
+        </p:nvGraphicFramePr>
+        <p:xfrm>
+          <a:off x="0" y="6532604"/>
+          <a:ext cx="12192000" cy="365760"/>
+        </p:xfrm>
+        <a:graphic>
+          <a:graphicData uri="http://schemas.openxmlformats.org/drawingml/2006/table">
+            <a:tbl>
+              <a:tblPr firstRow="1" bandRow="1">
+                <a:tableStyleId>{5C22544A-7EE6-4342-B048-85BDC9FD1C3A}</a:tableStyleId>
+              </a:tblPr>
+              <a:tblGrid>
+                <a:gridCol w="12192000">
+                  <a:extLst>
+                    <a:ext uri="{9D8B030D-6E8A-4147-A177-3AD203B41FA5}">
+                      <a16:colId xmlns:a16="http://schemas.microsoft.com/office/drawing/2014/main" val="20000"/>
+                    </a:ext>
+                  </a:extLst>
+                </a:gridCol>
+              </a:tblGrid>
+              <a:tr h="308094">
+                <a:tc>
+                  <a:txBody>
+                    <a:bodyPr/>
+                    <a:lstStyle/>
+                    <a:p>
+                      <a:endParaRPr lang="ru-RU" dirty="0"/>
+                    </a:p>
+                  </a:txBody>
+                  <a:tcPr/>
+                </a:tc>
+                <a:extLst>
+                  <a:ext uri="{0D108BD9-81ED-4DB2-BD59-A6C34878D82A}">
+                    <a16:rowId xmlns:a16="http://schemas.microsoft.com/office/drawing/2014/main" val="10000"/>
+                  </a:ext>
+                </a:extLst>
+              </a:tr>
+            </a:tbl>
+          </a:graphicData>
+        </a:graphic>
+      </p:graphicFrame>
+      <p:graphicFrame>
+        <p:nvGraphicFramePr>
+          <p:cNvPr id="2" name="Table 1">
+            <a:extLst>
+              <a:ext uri="{FF2B5EF4-FFF2-40B4-BE49-F238E27FC236}">
+                <a16:creationId xmlns:a16="http://schemas.microsoft.com/office/drawing/2014/main" id="{7F7538BD-B8D1-7250-B62A-F79B78340869}"/>
+              </a:ext>
+            </a:extLst>
+          </p:cNvPr>
+          <p:cNvGraphicFramePr>
+            <a:graphicFrameLocks noGrp="1"/>
+          </p:cNvGraphicFramePr>
+          <p:nvPr>
+            <p:extLst>
+              <p:ext uri="{D42A27DB-BD31-4B8C-83A1-F6EECF244321}">
+                <p14:modId xmlns:p14="http://schemas.microsoft.com/office/powerpoint/2010/main" val="3467307447"/>
+              </p:ext>
+            </p:extLst>
+          </p:nvPr>
+        </p:nvGraphicFramePr>
+        <p:xfrm>
+          <a:off x="0" y="365762"/>
+          <a:ext cx="12192000" cy="4572000"/>
+        </p:xfrm>
+        <a:graphic>
+          <a:graphicData uri="http://schemas.openxmlformats.org/drawingml/2006/table">
+            <a:tbl>
+              <a:tblPr firstRow="1" bandRow="1">
+                <a:tableStyleId>{3B4B98B0-60AC-42C2-AFA5-B58CD77FA1E5}</a:tableStyleId>
+              </a:tblPr>
+              <a:tblGrid>
+                <a:gridCol w="6096000">
+                  <a:extLst>
+                    <a:ext uri="{9D8B030D-6E8A-4147-A177-3AD203B41FA5}">
+                      <a16:colId xmlns:a16="http://schemas.microsoft.com/office/drawing/2014/main" val="20000"/>
+                    </a:ext>
+                  </a:extLst>
+                </a:gridCol>
+                <a:gridCol w="6096000">
+                  <a:extLst>
+                    <a:ext uri="{9D8B030D-6E8A-4147-A177-3AD203B41FA5}">
+                      <a16:colId xmlns:a16="http://schemas.microsoft.com/office/drawing/2014/main" val="784827009"/>
+                    </a:ext>
+                  </a:extLst>
+                </a:gridCol>
+              </a:tblGrid>
+              <a:tr h="207593">
+                <a:tc gridSpan="2">
+                  <a:txBody>
+                    <a:bodyPr/>
+                    <a:lstStyle/>
+                    <a:p>
+                      <a:r>
+                        <a:rPr lang="en-US" dirty="0" err="1"/>
+                        <a:t>io_uring</a:t>
+                      </a:r>
+                      <a:r>
+                        <a:rPr lang="en-US" dirty="0"/>
+                        <a:t>: registered buffers and linked requests</a:t>
+                      </a:r>
+                      <a:endParaRPr lang="ru-RU" dirty="0"/>
+                    </a:p>
+                  </a:txBody>
+                  <a:tcPr/>
+                </a:tc>
+                <a:tc hMerge="1">
+                  <a:txBody>
+                    <a:bodyPr/>
+                    <a:lstStyle/>
+                    <a:p>
+                      <a:endParaRPr lang="en-CY"/>
+                    </a:p>
+                  </a:txBody>
+                  <a:tcPr/>
+                </a:tc>
+                <a:extLst>
+                  <a:ext uri="{0D108BD9-81ED-4DB2-BD59-A6C34878D82A}">
+                    <a16:rowId xmlns:a16="http://schemas.microsoft.com/office/drawing/2014/main" val="10000"/>
+                  </a:ext>
+                </a:extLst>
+              </a:tr>
+              <a:tr h="207593">
+                <a:tc>
+                  <a:txBody>
+                    <a:bodyPr/>
+                    <a:lstStyle/>
+                    <a:p>
+                      <a:r>
+                        <a:rPr lang="en-US" dirty="0"/>
+                        <a:t>There are several sources of inefficiency when doing a </a:t>
+                      </a:r>
+                      <a:r>
+                        <a:rPr lang="en-US" dirty="0" err="1">
+                          <a:latin typeface="Menlo" panose="020B0609030804020204" pitchFamily="49" charset="0"/>
+                          <a:ea typeface="Menlo" panose="020B0609030804020204" pitchFamily="49" charset="0"/>
+                          <a:cs typeface="Menlo" panose="020B0609030804020204" pitchFamily="49" charset="0"/>
+                        </a:rPr>
+                        <a:t>pread</a:t>
+                      </a:r>
+                      <a:r>
+                        <a:rPr lang="en-US" dirty="0">
+                          <a:latin typeface="Menlo" panose="020B0609030804020204" pitchFamily="49" charset="0"/>
+                          <a:ea typeface="Menlo" panose="020B0609030804020204" pitchFamily="49" charset="0"/>
+                          <a:cs typeface="Menlo" panose="020B0609030804020204" pitchFamily="49" charset="0"/>
+                        </a:rPr>
+                        <a:t>()</a:t>
+                      </a:r>
+                      <a:r>
+                        <a:rPr lang="en-US" dirty="0"/>
+                        <a:t> or a </a:t>
+                      </a:r>
+                      <a:r>
+                        <a:rPr lang="en-US" dirty="0" err="1">
+                          <a:latin typeface="Menlo" panose="020B0609030804020204" pitchFamily="49" charset="0"/>
+                          <a:ea typeface="Menlo" panose="020B0609030804020204" pitchFamily="49" charset="0"/>
+                          <a:cs typeface="Menlo" panose="020B0609030804020204" pitchFamily="49" charset="0"/>
+                        </a:rPr>
+                        <a:t>pwrite</a:t>
+                      </a:r>
+                      <a:r>
+                        <a:rPr lang="en-US" dirty="0">
+                          <a:latin typeface="Menlo" panose="020B0609030804020204" pitchFamily="49" charset="0"/>
+                          <a:ea typeface="Menlo" panose="020B0609030804020204" pitchFamily="49" charset="0"/>
+                          <a:cs typeface="Menlo" panose="020B0609030804020204" pitchFamily="49" charset="0"/>
+                        </a:rPr>
+                        <a:t>()</a:t>
+                      </a:r>
+                      <a:r>
+                        <a:rPr lang="en-US" dirty="0"/>
+                        <a:t>:</a:t>
+                      </a:r>
+                    </a:p>
+                    <a:p>
+                      <a:endParaRPr lang="en-US" dirty="0"/>
+                    </a:p>
+                    <a:p>
+                      <a:pPr marL="342900" indent="-342900">
+                        <a:buFont typeface="+mj-lt"/>
+                        <a:buAutoNum type="arabicPeriod"/>
+                      </a:pPr>
+                      <a:r>
+                        <a:rPr lang="en-US" dirty="0"/>
+                        <a:t>When the IO is buffered, the kernel needs to copy data between application buffers and the </a:t>
+                      </a:r>
+                      <a:r>
+                        <a:rPr lang="en-US" dirty="0" err="1"/>
+                        <a:t>pagecache</a:t>
+                      </a:r>
+                      <a:r>
+                        <a:rPr lang="en-US" dirty="0"/>
+                        <a:t>.</a:t>
+                      </a:r>
+                    </a:p>
+                    <a:p>
+                      <a:pPr marL="342900" indent="-342900">
+                        <a:buFont typeface="+mj-lt"/>
+                        <a:buAutoNum type="arabicPeriod"/>
+                      </a:pPr>
+                      <a:endParaRPr lang="en-US" dirty="0"/>
+                    </a:p>
+                    <a:p>
+                      <a:pPr marL="342900" indent="-342900">
+                        <a:buFont typeface="+mj-lt"/>
+                        <a:buAutoNum type="arabicPeriod"/>
+                      </a:pPr>
+                      <a:endParaRPr lang="en-US" dirty="0"/>
+                    </a:p>
+                    <a:p>
+                      <a:pPr marL="342900" indent="-342900">
+                        <a:buFont typeface="+mj-lt"/>
+                        <a:buAutoNum type="arabicPeriod"/>
+                      </a:pPr>
+                      <a:endParaRPr lang="en-US" dirty="0"/>
+                    </a:p>
+                    <a:p>
+                      <a:pPr marL="342900" indent="-342900">
+                        <a:buFont typeface="+mj-lt"/>
+                        <a:buAutoNum type="arabicPeriod"/>
+                      </a:pPr>
+                      <a:endParaRPr lang="en-US" dirty="0"/>
+                    </a:p>
+                    <a:p>
+                      <a:pPr marL="342900" indent="-342900">
+                        <a:buFont typeface="+mj-lt"/>
+                        <a:buAutoNum type="arabicPeriod"/>
+                      </a:pPr>
+                      <a:endParaRPr lang="en-US" dirty="0"/>
+                    </a:p>
+                    <a:p>
+                      <a:pPr marL="342900" indent="-342900">
+                        <a:buFont typeface="+mj-lt"/>
+                        <a:buAutoNum type="arabicPeriod"/>
+                      </a:pPr>
+                      <a:endParaRPr lang="en-US" dirty="0"/>
+                    </a:p>
+                    <a:p>
+                      <a:pPr marL="342900" indent="-342900">
+                        <a:buFont typeface="+mj-lt"/>
+                        <a:buAutoNum type="arabicPeriod"/>
+                      </a:pPr>
+                      <a:endParaRPr lang="en-US" dirty="0"/>
+                    </a:p>
+                    <a:p>
+                      <a:pPr marL="342900" indent="-342900">
+                        <a:buFont typeface="+mj-lt"/>
+                        <a:buAutoNum type="arabicPeriod"/>
+                      </a:pPr>
+                      <a:endParaRPr lang="en-US" dirty="0"/>
+                    </a:p>
+                    <a:p>
+                      <a:pPr marL="342900" indent="-342900">
+                        <a:buFont typeface="+mj-lt"/>
+                        <a:buAutoNum type="arabicPeriod"/>
+                      </a:pPr>
+                      <a:endParaRPr lang="en-US" dirty="0"/>
+                    </a:p>
+                    <a:p>
+                      <a:pPr marL="342900" indent="-342900">
+                        <a:buFont typeface="+mj-lt"/>
+                        <a:buAutoNum type="arabicPeriod"/>
+                      </a:pPr>
+                      <a:endParaRPr lang="en-US" dirty="0"/>
+                    </a:p>
+                  </a:txBody>
+                  <a:tcPr/>
+                </a:tc>
+                <a:tc>
+                  <a:txBody>
+                    <a:bodyPr/>
+                    <a:lstStyle/>
+                    <a:p>
+                      <a:pPr marL="342900" indent="-342900">
+                        <a:buFont typeface="+mj-lt"/>
+                        <a:buAutoNum type="arabicPeriod"/>
+                      </a:pPr>
+                      <a:endParaRPr lang="ru-RU" dirty="0"/>
+                    </a:p>
+                  </a:txBody>
+                  <a:tcPr/>
+                </a:tc>
+                <a:extLst>
+                  <a:ext uri="{0D108BD9-81ED-4DB2-BD59-A6C34878D82A}">
+                    <a16:rowId xmlns:a16="http://schemas.microsoft.com/office/drawing/2014/main" val="10001"/>
+                  </a:ext>
+                </a:extLst>
+              </a:tr>
+            </a:tbl>
+          </a:graphicData>
+        </a:graphic>
+      </p:graphicFrame>
+    </p:spTree>
+    <p:extLst>
+      <p:ext uri="{BB962C8B-B14F-4D97-AF65-F5344CB8AC3E}">
+        <p14:creationId xmlns:p14="http://schemas.microsoft.com/office/powerpoint/2010/main" val="834678002"/>
+      </p:ext>
+    </p:extLst>
+  </p:cSld>
+  <p:clrMapOvr>
+    <a:masterClrMapping/>
+  </p:clrMapOvr>
+</p:sld>
+</file>
+
+<file path=ppt/slides/slide45.xml><?xml version="1.0" encoding="utf-8"?>
+<p:sld xmlns:a="http://schemas.openxmlformats.org/drawingml/2006/main" xmlns:r="http://schemas.openxmlformats.org/officeDocument/2006/relationships" xmlns:p="http://schemas.openxmlformats.org/presentationml/2006/main">
+  <p:cSld>
+    <p:spTree>
+      <p:nvGrpSpPr>
+        <p:cNvPr id="1" name="">
+          <a:extLst>
+            <a:ext uri="{FF2B5EF4-FFF2-40B4-BE49-F238E27FC236}">
+              <a16:creationId xmlns:a16="http://schemas.microsoft.com/office/drawing/2014/main" id="{7CAA796A-D881-4030-E473-84A731229EE3}"/>
+            </a:ext>
+          </a:extLst>
+        </p:cNvPr>
+        <p:cNvGrpSpPr/>
+        <p:nvPr/>
+      </p:nvGrpSpPr>
+      <p:grpSpPr>
+        <a:xfrm>
+          <a:off x="0" y="0"/>
+          <a:ext cx="0" cy="0"/>
+          <a:chOff x="0" y="0"/>
+          <a:chExt cx="0" cy="0"/>
+        </a:xfrm>
+      </p:grpSpPr>
+      <p:graphicFrame>
+        <p:nvGraphicFramePr>
+          <p:cNvPr id="5" name="Table 4">
+            <a:extLst>
+              <a:ext uri="{FF2B5EF4-FFF2-40B4-BE49-F238E27FC236}">
+                <a16:creationId xmlns:a16="http://schemas.microsoft.com/office/drawing/2014/main" id="{E640D6DB-FC82-E95B-45A1-AC42F571BA09}"/>
+              </a:ext>
+            </a:extLst>
+          </p:cNvPr>
+          <p:cNvGraphicFramePr>
+            <a:graphicFrameLocks noGrp="1"/>
+          </p:cNvGraphicFramePr>
+          <p:nvPr/>
+        </p:nvGraphicFramePr>
+        <p:xfrm>
+          <a:off x="0" y="1"/>
+          <a:ext cx="12192000" cy="365760"/>
+        </p:xfrm>
+        <a:graphic>
+          <a:graphicData uri="http://schemas.openxmlformats.org/drawingml/2006/table">
+            <a:tbl>
+              <a:tblPr firstRow="1" bandRow="1">
+                <a:tableStyleId>{5C22544A-7EE6-4342-B048-85BDC9FD1C3A}</a:tableStyleId>
+              </a:tblPr>
+              <a:tblGrid>
+                <a:gridCol w="12192000">
+                  <a:extLst>
+                    <a:ext uri="{9D8B030D-6E8A-4147-A177-3AD203B41FA5}">
+                      <a16:colId xmlns:a16="http://schemas.microsoft.com/office/drawing/2014/main" val="20000"/>
+                    </a:ext>
+                  </a:extLst>
+                </a:gridCol>
+              </a:tblGrid>
+              <a:tr h="321276">
+                <a:tc>
+                  <a:txBody>
+                    <a:bodyPr/>
+                    <a:lstStyle/>
+                    <a:p>
+                      <a:r>
+                        <a:rPr lang="en-US" sz="1800" dirty="0"/>
+                        <a:t>The basics of file systems</a:t>
+                      </a:r>
+                      <a:endParaRPr lang="ru-RU" dirty="0"/>
+                    </a:p>
+                  </a:txBody>
+                  <a:tcPr/>
+                </a:tc>
+                <a:extLst>
+                  <a:ext uri="{0D108BD9-81ED-4DB2-BD59-A6C34878D82A}">
+                    <a16:rowId xmlns:a16="http://schemas.microsoft.com/office/drawing/2014/main" val="10000"/>
+                  </a:ext>
+                </a:extLst>
+              </a:tr>
+            </a:tbl>
+          </a:graphicData>
+        </a:graphic>
+      </p:graphicFrame>
+      <p:graphicFrame>
+        <p:nvGraphicFramePr>
+          <p:cNvPr id="6" name="Table 5">
+            <a:extLst>
+              <a:ext uri="{FF2B5EF4-FFF2-40B4-BE49-F238E27FC236}">
+                <a16:creationId xmlns:a16="http://schemas.microsoft.com/office/drawing/2014/main" id="{EE06EAD2-6007-BEB1-F359-5DC70CCDF420}"/>
+              </a:ext>
+            </a:extLst>
+          </p:cNvPr>
+          <p:cNvGraphicFramePr>
+            <a:graphicFrameLocks noGrp="1"/>
+          </p:cNvGraphicFramePr>
+          <p:nvPr/>
+        </p:nvGraphicFramePr>
+        <p:xfrm>
+          <a:off x="0" y="6532604"/>
+          <a:ext cx="12192000" cy="365760"/>
+        </p:xfrm>
+        <a:graphic>
+          <a:graphicData uri="http://schemas.openxmlformats.org/drawingml/2006/table">
+            <a:tbl>
+              <a:tblPr firstRow="1" bandRow="1">
+                <a:tableStyleId>{5C22544A-7EE6-4342-B048-85BDC9FD1C3A}</a:tableStyleId>
+              </a:tblPr>
+              <a:tblGrid>
+                <a:gridCol w="12192000">
+                  <a:extLst>
+                    <a:ext uri="{9D8B030D-6E8A-4147-A177-3AD203B41FA5}">
+                      <a16:colId xmlns:a16="http://schemas.microsoft.com/office/drawing/2014/main" val="20000"/>
+                    </a:ext>
+                  </a:extLst>
+                </a:gridCol>
+              </a:tblGrid>
+              <a:tr h="308094">
+                <a:tc>
+                  <a:txBody>
+                    <a:bodyPr/>
+                    <a:lstStyle/>
+                    <a:p>
+                      <a:endParaRPr lang="ru-RU" dirty="0"/>
+                    </a:p>
+                  </a:txBody>
+                  <a:tcPr/>
+                </a:tc>
+                <a:extLst>
+                  <a:ext uri="{0D108BD9-81ED-4DB2-BD59-A6C34878D82A}">
+                    <a16:rowId xmlns:a16="http://schemas.microsoft.com/office/drawing/2014/main" val="10000"/>
+                  </a:ext>
+                </a:extLst>
+              </a:tr>
+            </a:tbl>
+          </a:graphicData>
+        </a:graphic>
+      </p:graphicFrame>
+      <p:graphicFrame>
+        <p:nvGraphicFramePr>
+          <p:cNvPr id="2" name="Table 1">
+            <a:extLst>
+              <a:ext uri="{FF2B5EF4-FFF2-40B4-BE49-F238E27FC236}">
+                <a16:creationId xmlns:a16="http://schemas.microsoft.com/office/drawing/2014/main" id="{489BC70D-4979-BFD0-1963-910D08E513BD}"/>
+              </a:ext>
+            </a:extLst>
+          </p:cNvPr>
+          <p:cNvGraphicFramePr>
+            <a:graphicFrameLocks noGrp="1"/>
+          </p:cNvGraphicFramePr>
+          <p:nvPr>
+            <p:extLst>
+              <p:ext uri="{D42A27DB-BD31-4B8C-83A1-F6EECF244321}">
+                <p14:modId xmlns:p14="http://schemas.microsoft.com/office/powerpoint/2010/main" val="642584019"/>
+              </p:ext>
+            </p:extLst>
+          </p:nvPr>
+        </p:nvGraphicFramePr>
+        <p:xfrm>
+          <a:off x="0" y="365762"/>
+          <a:ext cx="12192000" cy="4572000"/>
+        </p:xfrm>
+        <a:graphic>
+          <a:graphicData uri="http://schemas.openxmlformats.org/drawingml/2006/table">
+            <a:tbl>
+              <a:tblPr firstRow="1" bandRow="1">
+                <a:tableStyleId>{3B4B98B0-60AC-42C2-AFA5-B58CD77FA1E5}</a:tableStyleId>
+              </a:tblPr>
+              <a:tblGrid>
+                <a:gridCol w="6096000">
+                  <a:extLst>
+                    <a:ext uri="{9D8B030D-6E8A-4147-A177-3AD203B41FA5}">
+                      <a16:colId xmlns:a16="http://schemas.microsoft.com/office/drawing/2014/main" val="20000"/>
+                    </a:ext>
+                  </a:extLst>
+                </a:gridCol>
+                <a:gridCol w="6096000">
+                  <a:extLst>
+                    <a:ext uri="{9D8B030D-6E8A-4147-A177-3AD203B41FA5}">
+                      <a16:colId xmlns:a16="http://schemas.microsoft.com/office/drawing/2014/main" val="784827009"/>
+                    </a:ext>
+                  </a:extLst>
+                </a:gridCol>
+              </a:tblGrid>
+              <a:tr h="207593">
+                <a:tc gridSpan="2">
+                  <a:txBody>
+                    <a:bodyPr/>
+                    <a:lstStyle/>
+                    <a:p>
+                      <a:r>
+                        <a:rPr lang="en-US" dirty="0" err="1"/>
+                        <a:t>io_uring</a:t>
+                      </a:r>
+                      <a:r>
+                        <a:rPr lang="en-US" dirty="0"/>
+                        <a:t>: registered buffers and linked requests</a:t>
+                      </a:r>
+                      <a:endParaRPr lang="ru-RU" dirty="0"/>
+                    </a:p>
+                  </a:txBody>
+                  <a:tcPr/>
+                </a:tc>
+                <a:tc hMerge="1">
+                  <a:txBody>
+                    <a:bodyPr/>
+                    <a:lstStyle/>
+                    <a:p>
+                      <a:endParaRPr lang="en-CY"/>
+                    </a:p>
+                  </a:txBody>
+                  <a:tcPr/>
+                </a:tc>
+                <a:extLst>
+                  <a:ext uri="{0D108BD9-81ED-4DB2-BD59-A6C34878D82A}">
+                    <a16:rowId xmlns:a16="http://schemas.microsoft.com/office/drawing/2014/main" val="10000"/>
+                  </a:ext>
+                </a:extLst>
+              </a:tr>
+              <a:tr h="207593">
+                <a:tc>
+                  <a:txBody>
+                    <a:bodyPr/>
+                    <a:lstStyle/>
+                    <a:p>
+                      <a:r>
+                        <a:rPr lang="en-US" dirty="0"/>
+                        <a:t>There are several sources of inefficiency when doing a </a:t>
+                      </a:r>
+                      <a:r>
+                        <a:rPr lang="en-US" dirty="0" err="1">
+                          <a:latin typeface="Menlo" panose="020B0609030804020204" pitchFamily="49" charset="0"/>
+                          <a:ea typeface="Menlo" panose="020B0609030804020204" pitchFamily="49" charset="0"/>
+                          <a:cs typeface="Menlo" panose="020B0609030804020204" pitchFamily="49" charset="0"/>
+                        </a:rPr>
+                        <a:t>pread</a:t>
+                      </a:r>
+                      <a:r>
+                        <a:rPr lang="en-US" dirty="0">
+                          <a:latin typeface="Menlo" panose="020B0609030804020204" pitchFamily="49" charset="0"/>
+                          <a:ea typeface="Menlo" panose="020B0609030804020204" pitchFamily="49" charset="0"/>
+                          <a:cs typeface="Menlo" panose="020B0609030804020204" pitchFamily="49" charset="0"/>
+                        </a:rPr>
+                        <a:t>()</a:t>
+                      </a:r>
+                      <a:r>
+                        <a:rPr lang="en-US" dirty="0"/>
+                        <a:t> or a </a:t>
+                      </a:r>
+                      <a:r>
+                        <a:rPr lang="en-US" dirty="0" err="1">
+                          <a:latin typeface="Menlo" panose="020B0609030804020204" pitchFamily="49" charset="0"/>
+                          <a:ea typeface="Menlo" panose="020B0609030804020204" pitchFamily="49" charset="0"/>
+                          <a:cs typeface="Menlo" panose="020B0609030804020204" pitchFamily="49" charset="0"/>
+                        </a:rPr>
+                        <a:t>pwrite</a:t>
+                      </a:r>
+                      <a:r>
+                        <a:rPr lang="en-US" dirty="0">
+                          <a:latin typeface="Menlo" panose="020B0609030804020204" pitchFamily="49" charset="0"/>
+                          <a:ea typeface="Menlo" panose="020B0609030804020204" pitchFamily="49" charset="0"/>
+                          <a:cs typeface="Menlo" panose="020B0609030804020204" pitchFamily="49" charset="0"/>
+                        </a:rPr>
+                        <a:t>()</a:t>
+                      </a:r>
+                      <a:r>
+                        <a:rPr lang="en-US" dirty="0"/>
+                        <a:t>:</a:t>
+                      </a:r>
+                    </a:p>
+                    <a:p>
+                      <a:endParaRPr lang="en-US" dirty="0"/>
+                    </a:p>
+                    <a:p>
+                      <a:pPr marL="342900" indent="-342900">
+                        <a:buFont typeface="+mj-lt"/>
+                        <a:buAutoNum type="arabicPeriod"/>
+                      </a:pPr>
+                      <a:r>
+                        <a:rPr lang="en-US" dirty="0"/>
+                        <a:t>When the IO is buffered, the kernel needs to copy data between application buffers and the </a:t>
+                      </a:r>
+                      <a:r>
+                        <a:rPr lang="en-US" dirty="0" err="1"/>
+                        <a:t>pagecache</a:t>
+                      </a:r>
+                      <a:r>
+                        <a:rPr lang="en-US" dirty="0"/>
+                        <a:t>.</a:t>
+                      </a:r>
+                    </a:p>
+                    <a:p>
+                      <a:pPr marL="342900" indent="-342900">
+                        <a:buFont typeface="+mj-lt"/>
+                        <a:buAutoNum type="arabicPeriod"/>
+                      </a:pPr>
+                      <a:endParaRPr lang="en-US" dirty="0"/>
+                    </a:p>
+                    <a:p>
+                      <a:pPr marL="342900" indent="-342900">
+                        <a:buFont typeface="+mj-lt"/>
+                        <a:buAutoNum type="arabicPeriod"/>
+                      </a:pPr>
+                      <a:endParaRPr lang="en-US" dirty="0"/>
+                    </a:p>
+                    <a:p>
+                      <a:pPr marL="342900" indent="-342900">
+                        <a:buFont typeface="+mj-lt"/>
+                        <a:buAutoNum type="arabicPeriod"/>
+                      </a:pPr>
+                      <a:endParaRPr lang="en-US" dirty="0"/>
+                    </a:p>
+                    <a:p>
+                      <a:pPr marL="342900" indent="-342900">
+                        <a:buFont typeface="+mj-lt"/>
+                        <a:buAutoNum type="arabicPeriod"/>
+                      </a:pPr>
+                      <a:endParaRPr lang="en-US" dirty="0"/>
+                    </a:p>
+                    <a:p>
+                      <a:pPr marL="342900" indent="-342900">
+                        <a:buFont typeface="+mj-lt"/>
+                        <a:buAutoNum type="arabicPeriod"/>
+                      </a:pPr>
+                      <a:endParaRPr lang="en-US" dirty="0"/>
+                    </a:p>
+                    <a:p>
+                      <a:pPr marL="342900" indent="-342900">
+                        <a:buFont typeface="+mj-lt"/>
+                        <a:buAutoNum type="arabicPeriod"/>
+                      </a:pPr>
+                      <a:endParaRPr lang="en-US" dirty="0"/>
+                    </a:p>
+                    <a:p>
+                      <a:pPr marL="342900" indent="-342900">
+                        <a:buFont typeface="+mj-lt"/>
+                        <a:buAutoNum type="arabicPeriod"/>
+                      </a:pPr>
+                      <a:endParaRPr lang="en-US" dirty="0"/>
+                    </a:p>
+                    <a:p>
+                      <a:pPr marL="342900" indent="-342900">
+                        <a:buFont typeface="+mj-lt"/>
+                        <a:buAutoNum type="arabicPeriod"/>
+                      </a:pPr>
+                      <a:endParaRPr lang="en-US" dirty="0"/>
+                    </a:p>
+                    <a:p>
+                      <a:pPr marL="342900" indent="-342900">
+                        <a:buFont typeface="+mj-lt"/>
+                        <a:buAutoNum type="arabicPeriod"/>
+                      </a:pPr>
+                      <a:endParaRPr lang="en-US" dirty="0"/>
+                    </a:p>
+                    <a:p>
+                      <a:pPr marL="342900" indent="-342900">
+                        <a:buFont typeface="+mj-lt"/>
+                        <a:buAutoNum type="arabicPeriod"/>
+                      </a:pPr>
+                      <a:endParaRPr lang="en-US" dirty="0"/>
+                    </a:p>
+                  </a:txBody>
+                  <a:tcPr/>
+                </a:tc>
+                <a:tc>
+                  <a:txBody>
+                    <a:bodyPr/>
+                    <a:lstStyle/>
+                    <a:p>
+                      <a:pPr marL="342900" indent="-342900">
+                        <a:buFont typeface="+mj-lt"/>
+                        <a:buAutoNum type="arabicPeriod"/>
+                      </a:pPr>
+                      <a:endParaRPr lang="en-US" dirty="0"/>
+                    </a:p>
+                    <a:p>
+                      <a:pPr marL="342900" indent="-342900">
+                        <a:buFont typeface="+mj-lt"/>
+                        <a:buAutoNum type="arabicPeriod"/>
+                      </a:pPr>
+                      <a:endParaRPr lang="en-US" dirty="0"/>
+                    </a:p>
+                    <a:p>
+                      <a:pPr marL="342900" indent="-342900">
+                        <a:buFont typeface="+mj-lt"/>
+                        <a:buAutoNum type="arabicPeriod"/>
+                      </a:pPr>
+                      <a:endParaRPr lang="en-US" dirty="0"/>
+                    </a:p>
+                    <a:p>
+                      <a:pPr marL="342900" indent="-342900">
+                        <a:buFont typeface="Arial" panose="020B0604020202020204" pitchFamily="34" charset="0"/>
+                        <a:buChar char="•"/>
+                      </a:pPr>
+                      <a:r>
+                        <a:rPr lang="en-US" dirty="0">
+                          <a:latin typeface="Menlo" panose="020B0609030804020204" pitchFamily="49" charset="0"/>
+                          <a:ea typeface="Menlo" panose="020B0609030804020204" pitchFamily="49" charset="0"/>
+                          <a:cs typeface="Menlo" panose="020B0609030804020204" pitchFamily="49" charset="0"/>
+                        </a:rPr>
+                        <a:t>O_DIRECT</a:t>
+                      </a:r>
+                      <a:r>
+                        <a:rPr lang="en-US" dirty="0">
+                          <a:latin typeface="+mn-lt"/>
+                          <a:ea typeface="Menlo" panose="020B0609030804020204" pitchFamily="49" charset="0"/>
+                          <a:cs typeface="Menlo" panose="020B0609030804020204" pitchFamily="49" charset="0"/>
+                        </a:rPr>
+                        <a:t> (but remember that </a:t>
+                      </a:r>
+                      <a:r>
+                        <a:rPr lang="en-US" dirty="0" err="1">
+                          <a:latin typeface="Menlo" panose="020B0609030804020204" pitchFamily="49" charset="0"/>
+                          <a:ea typeface="Menlo" panose="020B0609030804020204" pitchFamily="49" charset="0"/>
+                          <a:cs typeface="Menlo" panose="020B0609030804020204" pitchFamily="49" charset="0"/>
+                        </a:rPr>
+                        <a:t>memcpy</a:t>
+                      </a:r>
+                      <a:r>
+                        <a:rPr lang="en-US" dirty="0">
+                          <a:latin typeface="Menlo" panose="020B0609030804020204" pitchFamily="49" charset="0"/>
+                          <a:ea typeface="Menlo" panose="020B0609030804020204" pitchFamily="49" charset="0"/>
+                          <a:cs typeface="Menlo" panose="020B0609030804020204" pitchFamily="49" charset="0"/>
+                        </a:rPr>
+                        <a:t>()</a:t>
+                      </a:r>
+                      <a:r>
+                        <a:rPr lang="en-US" dirty="0">
+                          <a:latin typeface="+mn-lt"/>
+                          <a:ea typeface="Menlo" panose="020B0609030804020204" pitchFamily="49" charset="0"/>
+                          <a:cs typeface="Menlo" panose="020B0609030804020204" pitchFamily="49" charset="0"/>
+                        </a:rPr>
+                        <a:t> is one of the most </a:t>
+                      </a:r>
+                      <a:r>
+                        <a:rPr lang="en-US" dirty="0" err="1">
+                          <a:latin typeface="+mn-lt"/>
+                          <a:ea typeface="Menlo" panose="020B0609030804020204" pitchFamily="49" charset="0"/>
+                          <a:cs typeface="Menlo" panose="020B0609030804020204" pitchFamily="49" charset="0"/>
+                        </a:rPr>
+                        <a:t>optimised</a:t>
+                      </a:r>
+                      <a:r>
+                        <a:rPr lang="en-US" dirty="0">
+                          <a:latin typeface="+mn-lt"/>
+                          <a:ea typeface="Menlo" panose="020B0609030804020204" pitchFamily="49" charset="0"/>
+                          <a:cs typeface="Menlo" panose="020B0609030804020204" pitchFamily="49" charset="0"/>
+                        </a:rPr>
+                        <a:t> operations; x86 even has a dedicated hardware for </a:t>
+                      </a:r>
+                      <a:r>
+                        <a:rPr lang="en-US" dirty="0">
+                          <a:latin typeface="Menlo" panose="020B0609030804020204" pitchFamily="49" charset="0"/>
+                          <a:ea typeface="Menlo" panose="020B0609030804020204" pitchFamily="49" charset="0"/>
+                          <a:cs typeface="Menlo" panose="020B0609030804020204" pitchFamily="49" charset="0"/>
+                        </a:rPr>
+                        <a:t>rep </a:t>
+                      </a:r>
+                      <a:r>
+                        <a:rPr lang="en-US" dirty="0" err="1">
+                          <a:latin typeface="Menlo" panose="020B0609030804020204" pitchFamily="49" charset="0"/>
+                          <a:ea typeface="Menlo" panose="020B0609030804020204" pitchFamily="49" charset="0"/>
+                          <a:cs typeface="Menlo" panose="020B0609030804020204" pitchFamily="49" charset="0"/>
+                        </a:rPr>
+                        <a:t>movsb</a:t>
+                      </a:r>
+                      <a:r>
+                        <a:rPr lang="en-US" dirty="0">
+                          <a:latin typeface="+mn-lt"/>
+                          <a:ea typeface="Menlo" panose="020B0609030804020204" pitchFamily="49" charset="0"/>
+                          <a:cs typeface="Menlo" panose="020B0609030804020204" pitchFamily="49" charset="0"/>
+                        </a:rPr>
+                        <a:t> and </a:t>
+                      </a:r>
+                      <a:r>
+                        <a:rPr lang="en-US" dirty="0">
+                          <a:latin typeface="Menlo" panose="020B0609030804020204" pitchFamily="49" charset="0"/>
+                          <a:ea typeface="Menlo" panose="020B0609030804020204" pitchFamily="49" charset="0"/>
+                          <a:cs typeface="Menlo" panose="020B0609030804020204" pitchFamily="49" charset="0"/>
+                        </a:rPr>
+                        <a:t>rep </a:t>
+                      </a:r>
+                      <a:r>
+                        <a:rPr lang="en-US" dirty="0" err="1">
+                          <a:latin typeface="Menlo" panose="020B0609030804020204" pitchFamily="49" charset="0"/>
+                          <a:ea typeface="Menlo" panose="020B0609030804020204" pitchFamily="49" charset="0"/>
+                          <a:cs typeface="Menlo" panose="020B0609030804020204" pitchFamily="49" charset="0"/>
+                        </a:rPr>
+                        <a:t>stosb</a:t>
+                      </a:r>
+                      <a:r>
+                        <a:rPr lang="en-US" dirty="0">
+                          <a:latin typeface="+mn-lt"/>
+                          <a:ea typeface="Menlo" panose="020B0609030804020204" pitchFamily="49" charset="0"/>
+                          <a:cs typeface="Menlo" panose="020B0609030804020204" pitchFamily="49" charset="0"/>
+                        </a:rPr>
+                        <a:t>)</a:t>
+                      </a:r>
+                      <a:endParaRPr lang="ru-RU" dirty="0">
+                        <a:latin typeface="+mn-lt"/>
+                        <a:ea typeface="Menlo" panose="020B0609030804020204" pitchFamily="49" charset="0"/>
+                        <a:cs typeface="Menlo" panose="020B0609030804020204" pitchFamily="49" charset="0"/>
+                      </a:endParaRPr>
+                    </a:p>
+                  </a:txBody>
+                  <a:tcPr/>
+                </a:tc>
+                <a:extLst>
+                  <a:ext uri="{0D108BD9-81ED-4DB2-BD59-A6C34878D82A}">
+                    <a16:rowId xmlns:a16="http://schemas.microsoft.com/office/drawing/2014/main" val="10001"/>
+                  </a:ext>
+                </a:extLst>
+              </a:tr>
+            </a:tbl>
+          </a:graphicData>
+        </a:graphic>
+      </p:graphicFrame>
+    </p:spTree>
+    <p:extLst>
+      <p:ext uri="{BB962C8B-B14F-4D97-AF65-F5344CB8AC3E}">
+        <p14:creationId xmlns:p14="http://schemas.microsoft.com/office/powerpoint/2010/main" val="1632420804"/>
+      </p:ext>
+    </p:extLst>
+  </p:cSld>
+  <p:clrMapOvr>
+    <a:masterClrMapping/>
+  </p:clrMapOvr>
+</p:sld>
+</file>
+
+<file path=ppt/slides/slide46.xml><?xml version="1.0" encoding="utf-8"?>
+<p:sld xmlns:a="http://schemas.openxmlformats.org/drawingml/2006/main" xmlns:r="http://schemas.openxmlformats.org/officeDocument/2006/relationships" xmlns:p="http://schemas.openxmlformats.org/presentationml/2006/main">
+  <p:cSld>
+    <p:spTree>
+      <p:nvGrpSpPr>
+        <p:cNvPr id="1" name="">
+          <a:extLst>
+            <a:ext uri="{FF2B5EF4-FFF2-40B4-BE49-F238E27FC236}">
+              <a16:creationId xmlns:a16="http://schemas.microsoft.com/office/drawing/2014/main" id="{78B11648-B728-3A40-7606-2153C086D80E}"/>
+            </a:ext>
+          </a:extLst>
+        </p:cNvPr>
+        <p:cNvGrpSpPr/>
+        <p:nvPr/>
+      </p:nvGrpSpPr>
+      <p:grpSpPr>
+        <a:xfrm>
+          <a:off x="0" y="0"/>
+          <a:ext cx="0" cy="0"/>
+          <a:chOff x="0" y="0"/>
+          <a:chExt cx="0" cy="0"/>
+        </a:xfrm>
+      </p:grpSpPr>
+      <p:graphicFrame>
+        <p:nvGraphicFramePr>
+          <p:cNvPr id="5" name="Table 4">
+            <a:extLst>
+              <a:ext uri="{FF2B5EF4-FFF2-40B4-BE49-F238E27FC236}">
+                <a16:creationId xmlns:a16="http://schemas.microsoft.com/office/drawing/2014/main" id="{F02B1DA1-E287-2017-9007-86EAD806684D}"/>
+              </a:ext>
+            </a:extLst>
+          </p:cNvPr>
+          <p:cNvGraphicFramePr>
+            <a:graphicFrameLocks noGrp="1"/>
+          </p:cNvGraphicFramePr>
+          <p:nvPr/>
+        </p:nvGraphicFramePr>
+        <p:xfrm>
+          <a:off x="0" y="1"/>
+          <a:ext cx="12192000" cy="365760"/>
+        </p:xfrm>
+        <a:graphic>
+          <a:graphicData uri="http://schemas.openxmlformats.org/drawingml/2006/table">
+            <a:tbl>
+              <a:tblPr firstRow="1" bandRow="1">
+                <a:tableStyleId>{5C22544A-7EE6-4342-B048-85BDC9FD1C3A}</a:tableStyleId>
+              </a:tblPr>
+              <a:tblGrid>
+                <a:gridCol w="12192000">
+                  <a:extLst>
+                    <a:ext uri="{9D8B030D-6E8A-4147-A177-3AD203B41FA5}">
+                      <a16:colId xmlns:a16="http://schemas.microsoft.com/office/drawing/2014/main" val="20000"/>
+                    </a:ext>
+                  </a:extLst>
+                </a:gridCol>
+              </a:tblGrid>
+              <a:tr h="321276">
+                <a:tc>
+                  <a:txBody>
+                    <a:bodyPr/>
+                    <a:lstStyle/>
+                    <a:p>
+                      <a:r>
+                        <a:rPr lang="en-US" sz="1800" dirty="0"/>
+                        <a:t>The basics of file systems</a:t>
+                      </a:r>
+                      <a:endParaRPr lang="ru-RU" dirty="0"/>
+                    </a:p>
+                  </a:txBody>
+                  <a:tcPr/>
+                </a:tc>
+                <a:extLst>
+                  <a:ext uri="{0D108BD9-81ED-4DB2-BD59-A6C34878D82A}">
+                    <a16:rowId xmlns:a16="http://schemas.microsoft.com/office/drawing/2014/main" val="10000"/>
+                  </a:ext>
+                </a:extLst>
+              </a:tr>
+            </a:tbl>
+          </a:graphicData>
+        </a:graphic>
+      </p:graphicFrame>
+      <p:graphicFrame>
+        <p:nvGraphicFramePr>
+          <p:cNvPr id="6" name="Table 5">
+            <a:extLst>
+              <a:ext uri="{FF2B5EF4-FFF2-40B4-BE49-F238E27FC236}">
+                <a16:creationId xmlns:a16="http://schemas.microsoft.com/office/drawing/2014/main" id="{7000C4F5-4D2C-22CE-B08F-0063F5BA7B7B}"/>
+              </a:ext>
+            </a:extLst>
+          </p:cNvPr>
+          <p:cNvGraphicFramePr>
+            <a:graphicFrameLocks noGrp="1"/>
+          </p:cNvGraphicFramePr>
+          <p:nvPr/>
+        </p:nvGraphicFramePr>
+        <p:xfrm>
+          <a:off x="0" y="6532604"/>
+          <a:ext cx="12192000" cy="365760"/>
+        </p:xfrm>
+        <a:graphic>
+          <a:graphicData uri="http://schemas.openxmlformats.org/drawingml/2006/table">
+            <a:tbl>
+              <a:tblPr firstRow="1" bandRow="1">
+                <a:tableStyleId>{5C22544A-7EE6-4342-B048-85BDC9FD1C3A}</a:tableStyleId>
+              </a:tblPr>
+              <a:tblGrid>
+                <a:gridCol w="12192000">
+                  <a:extLst>
+                    <a:ext uri="{9D8B030D-6E8A-4147-A177-3AD203B41FA5}">
+                      <a16:colId xmlns:a16="http://schemas.microsoft.com/office/drawing/2014/main" val="20000"/>
+                    </a:ext>
+                  </a:extLst>
+                </a:gridCol>
+              </a:tblGrid>
+              <a:tr h="308094">
+                <a:tc>
+                  <a:txBody>
+                    <a:bodyPr/>
+                    <a:lstStyle/>
+                    <a:p>
+                      <a:endParaRPr lang="ru-RU" dirty="0"/>
+                    </a:p>
+                  </a:txBody>
+                  <a:tcPr/>
+                </a:tc>
+                <a:extLst>
+                  <a:ext uri="{0D108BD9-81ED-4DB2-BD59-A6C34878D82A}">
+                    <a16:rowId xmlns:a16="http://schemas.microsoft.com/office/drawing/2014/main" val="10000"/>
+                  </a:ext>
+                </a:extLst>
+              </a:tr>
+            </a:tbl>
+          </a:graphicData>
+        </a:graphic>
+      </p:graphicFrame>
+      <p:graphicFrame>
+        <p:nvGraphicFramePr>
+          <p:cNvPr id="2" name="Table 1">
+            <a:extLst>
+              <a:ext uri="{FF2B5EF4-FFF2-40B4-BE49-F238E27FC236}">
+                <a16:creationId xmlns:a16="http://schemas.microsoft.com/office/drawing/2014/main" id="{B29D7465-5C5A-CC6A-83EB-20D3EA6E1194}"/>
+              </a:ext>
+            </a:extLst>
+          </p:cNvPr>
+          <p:cNvGraphicFramePr>
+            <a:graphicFrameLocks noGrp="1"/>
+          </p:cNvGraphicFramePr>
+          <p:nvPr>
+            <p:extLst>
+              <p:ext uri="{D42A27DB-BD31-4B8C-83A1-F6EECF244321}">
+                <p14:modId xmlns:p14="http://schemas.microsoft.com/office/powerpoint/2010/main" val="2418214555"/>
+              </p:ext>
+            </p:extLst>
+          </p:nvPr>
+        </p:nvGraphicFramePr>
+        <p:xfrm>
+          <a:off x="0" y="365762"/>
+          <a:ext cx="12192000" cy="4572000"/>
+        </p:xfrm>
+        <a:graphic>
+          <a:graphicData uri="http://schemas.openxmlformats.org/drawingml/2006/table">
+            <a:tbl>
+              <a:tblPr firstRow="1" bandRow="1">
+                <a:tableStyleId>{3B4B98B0-60AC-42C2-AFA5-B58CD77FA1E5}</a:tableStyleId>
+              </a:tblPr>
+              <a:tblGrid>
+                <a:gridCol w="6096000">
+                  <a:extLst>
+                    <a:ext uri="{9D8B030D-6E8A-4147-A177-3AD203B41FA5}">
+                      <a16:colId xmlns:a16="http://schemas.microsoft.com/office/drawing/2014/main" val="20000"/>
+                    </a:ext>
+                  </a:extLst>
+                </a:gridCol>
+                <a:gridCol w="6096000">
+                  <a:extLst>
+                    <a:ext uri="{9D8B030D-6E8A-4147-A177-3AD203B41FA5}">
+                      <a16:colId xmlns:a16="http://schemas.microsoft.com/office/drawing/2014/main" val="784827009"/>
+                    </a:ext>
+                  </a:extLst>
+                </a:gridCol>
+              </a:tblGrid>
+              <a:tr h="207593">
+                <a:tc gridSpan="2">
+                  <a:txBody>
+                    <a:bodyPr/>
+                    <a:lstStyle/>
+                    <a:p>
+                      <a:r>
+                        <a:rPr lang="en-US" dirty="0" err="1"/>
+                        <a:t>io_uring</a:t>
+                      </a:r>
+                      <a:r>
+                        <a:rPr lang="en-US" dirty="0"/>
+                        <a:t>: registered buffers and linked requests</a:t>
+                      </a:r>
+                      <a:endParaRPr lang="ru-RU" dirty="0"/>
+                    </a:p>
+                  </a:txBody>
+                  <a:tcPr/>
+                </a:tc>
+                <a:tc hMerge="1">
+                  <a:txBody>
+                    <a:bodyPr/>
+                    <a:lstStyle/>
+                    <a:p>
+                      <a:endParaRPr lang="en-CY"/>
+                    </a:p>
+                  </a:txBody>
+                  <a:tcPr/>
+                </a:tc>
+                <a:extLst>
+                  <a:ext uri="{0D108BD9-81ED-4DB2-BD59-A6C34878D82A}">
+                    <a16:rowId xmlns:a16="http://schemas.microsoft.com/office/drawing/2014/main" val="10000"/>
+                  </a:ext>
+                </a:extLst>
+              </a:tr>
+              <a:tr h="207593">
+                <a:tc>
+                  <a:txBody>
+                    <a:bodyPr/>
+                    <a:lstStyle/>
+                    <a:p>
+                      <a:r>
+                        <a:rPr lang="en-US" dirty="0"/>
+                        <a:t>There are several sources of inefficiency when doing a </a:t>
+                      </a:r>
+                      <a:r>
+                        <a:rPr lang="en-US" dirty="0" err="1">
+                          <a:latin typeface="Menlo" panose="020B0609030804020204" pitchFamily="49" charset="0"/>
+                          <a:ea typeface="Menlo" panose="020B0609030804020204" pitchFamily="49" charset="0"/>
+                          <a:cs typeface="Menlo" panose="020B0609030804020204" pitchFamily="49" charset="0"/>
+                        </a:rPr>
+                        <a:t>pread</a:t>
+                      </a:r>
+                      <a:r>
+                        <a:rPr lang="en-US" dirty="0">
+                          <a:latin typeface="Menlo" panose="020B0609030804020204" pitchFamily="49" charset="0"/>
+                          <a:ea typeface="Menlo" panose="020B0609030804020204" pitchFamily="49" charset="0"/>
+                          <a:cs typeface="Menlo" panose="020B0609030804020204" pitchFamily="49" charset="0"/>
+                        </a:rPr>
+                        <a:t>()</a:t>
+                      </a:r>
+                      <a:r>
+                        <a:rPr lang="en-US" dirty="0"/>
+                        <a:t> or a </a:t>
+                      </a:r>
+                      <a:r>
+                        <a:rPr lang="en-US" dirty="0" err="1">
+                          <a:latin typeface="Menlo" panose="020B0609030804020204" pitchFamily="49" charset="0"/>
+                          <a:ea typeface="Menlo" panose="020B0609030804020204" pitchFamily="49" charset="0"/>
+                          <a:cs typeface="Menlo" panose="020B0609030804020204" pitchFamily="49" charset="0"/>
+                        </a:rPr>
+                        <a:t>pwrite</a:t>
+                      </a:r>
+                      <a:r>
+                        <a:rPr lang="en-US" dirty="0">
+                          <a:latin typeface="Menlo" panose="020B0609030804020204" pitchFamily="49" charset="0"/>
+                          <a:ea typeface="Menlo" panose="020B0609030804020204" pitchFamily="49" charset="0"/>
+                          <a:cs typeface="Menlo" panose="020B0609030804020204" pitchFamily="49" charset="0"/>
+                        </a:rPr>
+                        <a:t>()</a:t>
+                      </a:r>
+                      <a:r>
+                        <a:rPr lang="en-US" dirty="0"/>
+                        <a:t>:</a:t>
+                      </a:r>
+                    </a:p>
+                    <a:p>
+                      <a:endParaRPr lang="en-US" dirty="0"/>
+                    </a:p>
+                    <a:p>
+                      <a:pPr marL="342900" indent="-342900">
+                        <a:buFont typeface="+mj-lt"/>
+                        <a:buAutoNum type="arabicPeriod"/>
+                      </a:pPr>
+                      <a:r>
+                        <a:rPr lang="en-US" dirty="0"/>
+                        <a:t>When the IO is buffered, the kernel needs to copy data between application buffers and the </a:t>
+                      </a:r>
+                      <a:r>
+                        <a:rPr lang="en-US" dirty="0" err="1"/>
+                        <a:t>pagecache</a:t>
+                      </a:r>
+                      <a:r>
+                        <a:rPr lang="en-US" dirty="0"/>
+                        <a:t>.</a:t>
+                      </a:r>
+                    </a:p>
+                    <a:p>
+                      <a:pPr marL="342900" indent="-342900">
+                        <a:buFont typeface="+mj-lt"/>
+                        <a:buAutoNum type="arabicPeriod"/>
+                      </a:pPr>
+                      <a:endParaRPr lang="en-US" dirty="0"/>
+                    </a:p>
+                    <a:p>
+                      <a:pPr marL="342900" indent="-342900">
+                        <a:buFont typeface="+mj-lt"/>
+                        <a:buAutoNum type="arabicPeriod"/>
+                      </a:pPr>
+                      <a:r>
+                        <a:rPr lang="en-US" dirty="0" err="1"/>
+                        <a:t>iovec</a:t>
+                      </a:r>
+                      <a:r>
+                        <a:rPr lang="en-US" dirty="0"/>
+                        <a:t> needs to be copied into the kernel,</a:t>
+                      </a:r>
+                    </a:p>
+                    <a:p>
+                      <a:pPr marL="342900" lvl="0" indent="-342900">
+                        <a:buFont typeface="+mj-lt"/>
+                        <a:buAutoNum type="arabicPeriod"/>
+                      </a:pPr>
+                      <a:endParaRPr lang="en-US" dirty="0"/>
+                    </a:p>
+                    <a:p>
+                      <a:pPr marL="342900" lvl="0" indent="-342900">
+                        <a:buFont typeface="+mj-lt"/>
+                        <a:buAutoNum type="arabicPeriod"/>
+                      </a:pPr>
+                      <a:r>
+                        <a:rPr lang="en-US" dirty="0"/>
+                        <a:t>When </a:t>
+                      </a:r>
+                      <a:r>
+                        <a:rPr lang="en-US" dirty="0">
+                          <a:latin typeface="Menlo" panose="020B0609030804020204" pitchFamily="49" charset="0"/>
+                          <a:ea typeface="Menlo" panose="020B0609030804020204" pitchFamily="49" charset="0"/>
+                          <a:cs typeface="Menlo" panose="020B0609030804020204" pitchFamily="49" charset="0"/>
+                        </a:rPr>
+                        <a:t>O_DIRECT</a:t>
+                      </a:r>
+                      <a:r>
+                        <a:rPr lang="en-US" dirty="0"/>
+                        <a:t> is in effect,</a:t>
+                      </a:r>
+                    </a:p>
+                    <a:p>
+                      <a:pPr marL="800100" lvl="1" indent="-342900">
+                        <a:buFont typeface="+mj-lt"/>
+                        <a:buAutoNum type="alphaLcPeriod"/>
+                      </a:pPr>
+                      <a:r>
+                        <a:rPr lang="en-US" dirty="0"/>
+                        <a:t>user pages need to pinned into memory,</a:t>
+                      </a:r>
+                    </a:p>
+                    <a:p>
+                      <a:pPr marL="800100" lvl="1" indent="-342900">
+                        <a:buFont typeface="+mj-lt"/>
+                        <a:buAutoNum type="alphaLcPeriod"/>
+                      </a:pPr>
+                      <a:r>
+                        <a:rPr lang="en-US" dirty="0"/>
+                        <a:t>prepare the </a:t>
+                      </a:r>
+                      <a:r>
+                        <a:rPr lang="en-US" dirty="0" err="1"/>
+                        <a:t>biovec</a:t>
+                      </a:r>
+                      <a:r>
+                        <a:rPr lang="en-US" dirty="0"/>
+                        <a:t> for issuing a request to the block devices,</a:t>
+                      </a:r>
+                    </a:p>
+                    <a:p>
+                      <a:pPr marL="800100" lvl="1" indent="-342900">
+                        <a:buFont typeface="+mj-lt"/>
+                        <a:buAutoNum type="alphaLcPeriod"/>
+                      </a:pPr>
+                      <a:r>
+                        <a:rPr lang="en-US" dirty="0"/>
+                        <a:t>do the IO,</a:t>
+                      </a:r>
+                    </a:p>
+                    <a:p>
+                      <a:pPr marL="800100" lvl="1" indent="-342900">
+                        <a:buFont typeface="+mj-lt"/>
+                        <a:buAutoNum type="alphaLcPeriod"/>
+                      </a:pPr>
+                      <a:r>
+                        <a:rPr lang="en-US" dirty="0"/>
+                        <a:t>free the </a:t>
+                      </a:r>
+                      <a:r>
+                        <a:rPr lang="en-US" dirty="0" err="1"/>
+                        <a:t>biovec</a:t>
+                      </a:r>
+                      <a:r>
+                        <a:rPr lang="en-US" dirty="0"/>
+                        <a:t>,</a:t>
+                      </a:r>
+                    </a:p>
+                    <a:p>
+                      <a:pPr marL="800100" lvl="1" indent="-342900">
+                        <a:buFont typeface="+mj-lt"/>
+                        <a:buAutoNum type="alphaLcPeriod"/>
+                      </a:pPr>
+                      <a:r>
+                        <a:rPr lang="en-US" dirty="0"/>
+                        <a:t>unpin user pages.</a:t>
+                      </a:r>
+                      <a:endParaRPr lang="ru-RU" dirty="0"/>
+                    </a:p>
+                  </a:txBody>
+                  <a:tcPr/>
+                </a:tc>
+                <a:tc>
+                  <a:txBody>
+                    <a:bodyPr/>
+                    <a:lstStyle/>
+                    <a:p>
+                      <a:pPr marL="342900" indent="-342900">
+                        <a:buFont typeface="+mj-lt"/>
+                        <a:buAutoNum type="arabicPeriod"/>
+                      </a:pPr>
+                      <a:endParaRPr lang="en-US" dirty="0"/>
+                    </a:p>
+                    <a:p>
+                      <a:pPr marL="342900" indent="-342900">
+                        <a:buFont typeface="+mj-lt"/>
+                        <a:buAutoNum type="arabicPeriod"/>
+                      </a:pPr>
+                      <a:endParaRPr lang="en-US" dirty="0"/>
+                    </a:p>
+                    <a:p>
+                      <a:pPr marL="342900" indent="-342900">
+                        <a:buFont typeface="+mj-lt"/>
+                        <a:buAutoNum type="arabicPeriod"/>
+                      </a:pPr>
+                      <a:endParaRPr lang="en-US" dirty="0"/>
+                    </a:p>
+                    <a:p>
+                      <a:pPr marL="342900" indent="-342900">
+                        <a:buFont typeface="Arial" panose="020B0604020202020204" pitchFamily="34" charset="0"/>
+                        <a:buChar char="•"/>
+                      </a:pPr>
+                      <a:r>
+                        <a:rPr lang="en-US" dirty="0">
+                          <a:latin typeface="Menlo" panose="020B0609030804020204" pitchFamily="49" charset="0"/>
+                          <a:ea typeface="Menlo" panose="020B0609030804020204" pitchFamily="49" charset="0"/>
+                          <a:cs typeface="Menlo" panose="020B0609030804020204" pitchFamily="49" charset="0"/>
+                        </a:rPr>
+                        <a:t>O_DIRECT</a:t>
+                      </a:r>
+                    </a:p>
+                    <a:p>
+                      <a:pPr marL="342900" indent="-342900">
+                        <a:buFont typeface="Arial" panose="020B0604020202020204" pitchFamily="34" charset="0"/>
+                        <a:buChar char="•"/>
+                      </a:pPr>
+                      <a:endParaRPr lang="en-US" dirty="0"/>
+                    </a:p>
+                    <a:p>
+                      <a:pPr marL="342900" indent="-342900">
+                        <a:buFont typeface="Arial" panose="020B0604020202020204" pitchFamily="34" charset="0"/>
+                        <a:buChar char="•"/>
+                      </a:pPr>
+                      <a:endParaRPr lang="en-US" dirty="0"/>
+                    </a:p>
+                    <a:p>
+                      <a:pPr marL="342900" indent="-342900">
+                        <a:buFont typeface="Arial" panose="020B0604020202020204" pitchFamily="34" charset="0"/>
+                        <a:buChar char="•"/>
+                      </a:pPr>
+                      <a:endParaRPr lang="en-US" dirty="0"/>
+                    </a:p>
+                    <a:p>
+                      <a:pPr marL="342900" indent="-342900">
+                        <a:buFont typeface="Arial" panose="020B0604020202020204" pitchFamily="34" charset="0"/>
+                        <a:buChar char="•"/>
+                      </a:pPr>
+                      <a:endParaRPr lang="en-US" dirty="0"/>
+                    </a:p>
+                    <a:p>
+                      <a:pPr marL="342900" indent="-342900">
+                        <a:buFont typeface="Arial" panose="020B0604020202020204" pitchFamily="34" charset="0"/>
+                        <a:buChar char="•"/>
+                      </a:pPr>
+                      <a:endParaRPr lang="en-US" dirty="0"/>
+                    </a:p>
+                    <a:p>
+                      <a:pPr marL="0" indent="0">
+                        <a:buFontTx/>
+                        <a:buNone/>
+                      </a:pPr>
+                      <a:r>
+                        <a:rPr lang="en-US" dirty="0">
+                          <a:sym typeface="Wingdings" pitchFamily="2" charset="2"/>
+                        </a:rPr>
+                        <a:t> </a:t>
+                      </a:r>
+                      <a:r>
+                        <a:rPr lang="en-US" dirty="0"/>
+                        <a:t>a source of contention on </a:t>
+                      </a:r>
+                      <a:r>
+                        <a:rPr lang="en-US" dirty="0" err="1"/>
+                        <a:t>mmap_lock</a:t>
+                      </a:r>
+                      <a:r>
+                        <a:rPr lang="en-US" dirty="0"/>
+                        <a:t>,</a:t>
+                      </a:r>
+                    </a:p>
+                  </a:txBody>
+                  <a:tcPr/>
+                </a:tc>
+                <a:extLst>
+                  <a:ext uri="{0D108BD9-81ED-4DB2-BD59-A6C34878D82A}">
+                    <a16:rowId xmlns:a16="http://schemas.microsoft.com/office/drawing/2014/main" val="10001"/>
+                  </a:ext>
+                </a:extLst>
+              </a:tr>
+            </a:tbl>
+          </a:graphicData>
+        </a:graphic>
+      </p:graphicFrame>
+    </p:spTree>
+    <p:extLst>
+      <p:ext uri="{BB962C8B-B14F-4D97-AF65-F5344CB8AC3E}">
+        <p14:creationId xmlns:p14="http://schemas.microsoft.com/office/powerpoint/2010/main" val="3712368658"/>
+      </p:ext>
+    </p:extLst>
+  </p:cSld>
+  <p:clrMapOvr>
+    <a:masterClrMapping/>
+  </p:clrMapOvr>
+</p:sld>
+</file>
+
+<file path=ppt/slides/slide47.xml><?xml version="1.0" encoding="utf-8"?>
+<p:sld xmlns:a="http://schemas.openxmlformats.org/drawingml/2006/main" xmlns:r="http://schemas.openxmlformats.org/officeDocument/2006/relationships" xmlns:p="http://schemas.openxmlformats.org/presentationml/2006/main">
+  <p:cSld>
+    <p:spTree>
+      <p:nvGrpSpPr>
+        <p:cNvPr id="1" name="">
+          <a:extLst>
+            <a:ext uri="{FF2B5EF4-FFF2-40B4-BE49-F238E27FC236}">
+              <a16:creationId xmlns:a16="http://schemas.microsoft.com/office/drawing/2014/main" id="{6706F034-2868-FF38-8F23-B3F28F9DC193}"/>
+            </a:ext>
+          </a:extLst>
+        </p:cNvPr>
+        <p:cNvGrpSpPr/>
+        <p:nvPr/>
+      </p:nvGrpSpPr>
+      <p:grpSpPr>
+        <a:xfrm>
+          <a:off x="0" y="0"/>
+          <a:ext cx="0" cy="0"/>
+          <a:chOff x="0" y="0"/>
+          <a:chExt cx="0" cy="0"/>
+        </a:xfrm>
+      </p:grpSpPr>
+      <p:graphicFrame>
+        <p:nvGraphicFramePr>
+          <p:cNvPr id="5" name="Table 4">
+            <a:extLst>
+              <a:ext uri="{FF2B5EF4-FFF2-40B4-BE49-F238E27FC236}">
+                <a16:creationId xmlns:a16="http://schemas.microsoft.com/office/drawing/2014/main" id="{4A024672-1B79-D9B4-6D52-EF2A1CEBC74B}"/>
+              </a:ext>
+            </a:extLst>
+          </p:cNvPr>
+          <p:cNvGraphicFramePr>
+            <a:graphicFrameLocks noGrp="1"/>
+          </p:cNvGraphicFramePr>
+          <p:nvPr/>
+        </p:nvGraphicFramePr>
+        <p:xfrm>
+          <a:off x="0" y="1"/>
+          <a:ext cx="12192000" cy="365760"/>
+        </p:xfrm>
+        <a:graphic>
+          <a:graphicData uri="http://schemas.openxmlformats.org/drawingml/2006/table">
+            <a:tbl>
+              <a:tblPr firstRow="1" bandRow="1">
+                <a:tableStyleId>{5C22544A-7EE6-4342-B048-85BDC9FD1C3A}</a:tableStyleId>
+              </a:tblPr>
+              <a:tblGrid>
+                <a:gridCol w="12192000">
+                  <a:extLst>
+                    <a:ext uri="{9D8B030D-6E8A-4147-A177-3AD203B41FA5}">
+                      <a16:colId xmlns:a16="http://schemas.microsoft.com/office/drawing/2014/main" val="20000"/>
+                    </a:ext>
+                  </a:extLst>
+                </a:gridCol>
+              </a:tblGrid>
+              <a:tr h="321276">
+                <a:tc>
+                  <a:txBody>
+                    <a:bodyPr/>
+                    <a:lstStyle/>
+                    <a:p>
+                      <a:r>
+                        <a:rPr lang="en-US" sz="1800" dirty="0"/>
+                        <a:t>The basics of file systems</a:t>
+                      </a:r>
+                      <a:endParaRPr lang="ru-RU" dirty="0"/>
+                    </a:p>
+                  </a:txBody>
+                  <a:tcPr/>
+                </a:tc>
+                <a:extLst>
+                  <a:ext uri="{0D108BD9-81ED-4DB2-BD59-A6C34878D82A}">
+                    <a16:rowId xmlns:a16="http://schemas.microsoft.com/office/drawing/2014/main" val="10000"/>
+                  </a:ext>
+                </a:extLst>
+              </a:tr>
+            </a:tbl>
+          </a:graphicData>
+        </a:graphic>
+      </p:graphicFrame>
+      <p:graphicFrame>
+        <p:nvGraphicFramePr>
+          <p:cNvPr id="6" name="Table 5">
+            <a:extLst>
+              <a:ext uri="{FF2B5EF4-FFF2-40B4-BE49-F238E27FC236}">
+                <a16:creationId xmlns:a16="http://schemas.microsoft.com/office/drawing/2014/main" id="{ACD77F94-E71C-BCD7-8C93-96764B9018B7}"/>
+              </a:ext>
+            </a:extLst>
+          </p:cNvPr>
+          <p:cNvGraphicFramePr>
+            <a:graphicFrameLocks noGrp="1"/>
+          </p:cNvGraphicFramePr>
+          <p:nvPr/>
+        </p:nvGraphicFramePr>
+        <p:xfrm>
+          <a:off x="0" y="6532604"/>
+          <a:ext cx="12192000" cy="365760"/>
+        </p:xfrm>
+        <a:graphic>
+          <a:graphicData uri="http://schemas.openxmlformats.org/drawingml/2006/table">
+            <a:tbl>
+              <a:tblPr firstRow="1" bandRow="1">
+                <a:tableStyleId>{5C22544A-7EE6-4342-B048-85BDC9FD1C3A}</a:tableStyleId>
+              </a:tblPr>
+              <a:tblGrid>
+                <a:gridCol w="12192000">
+                  <a:extLst>
+                    <a:ext uri="{9D8B030D-6E8A-4147-A177-3AD203B41FA5}">
+                      <a16:colId xmlns:a16="http://schemas.microsoft.com/office/drawing/2014/main" val="20000"/>
+                    </a:ext>
+                  </a:extLst>
+                </a:gridCol>
+              </a:tblGrid>
+              <a:tr h="308094">
+                <a:tc>
+                  <a:txBody>
+                    <a:bodyPr/>
+                    <a:lstStyle/>
+                    <a:p>
+                      <a:endParaRPr lang="ru-RU" dirty="0"/>
+                    </a:p>
+                  </a:txBody>
+                  <a:tcPr/>
+                </a:tc>
+                <a:extLst>
+                  <a:ext uri="{0D108BD9-81ED-4DB2-BD59-A6C34878D82A}">
+                    <a16:rowId xmlns:a16="http://schemas.microsoft.com/office/drawing/2014/main" val="10000"/>
+                  </a:ext>
+                </a:extLst>
+              </a:tr>
+            </a:tbl>
+          </a:graphicData>
+        </a:graphic>
+      </p:graphicFrame>
+      <p:graphicFrame>
+        <p:nvGraphicFramePr>
+          <p:cNvPr id="2" name="Table 1">
+            <a:extLst>
+              <a:ext uri="{FF2B5EF4-FFF2-40B4-BE49-F238E27FC236}">
+                <a16:creationId xmlns:a16="http://schemas.microsoft.com/office/drawing/2014/main" id="{F427AF81-B25E-4C83-4008-F48CD812B79C}"/>
+              </a:ext>
+            </a:extLst>
+          </p:cNvPr>
+          <p:cNvGraphicFramePr>
+            <a:graphicFrameLocks noGrp="1"/>
+          </p:cNvGraphicFramePr>
+          <p:nvPr>
+            <p:extLst>
+              <p:ext uri="{D42A27DB-BD31-4B8C-83A1-F6EECF244321}">
+                <p14:modId xmlns:p14="http://schemas.microsoft.com/office/powerpoint/2010/main" val="2089431766"/>
+              </p:ext>
+            </p:extLst>
+          </p:nvPr>
+        </p:nvGraphicFramePr>
+        <p:xfrm>
+          <a:off x="0" y="365762"/>
+          <a:ext cx="12192000" cy="4572000"/>
+        </p:xfrm>
+        <a:graphic>
+          <a:graphicData uri="http://schemas.openxmlformats.org/drawingml/2006/table">
+            <a:tbl>
+              <a:tblPr firstRow="1" bandRow="1">
+                <a:tableStyleId>{3B4B98B0-60AC-42C2-AFA5-B58CD77FA1E5}</a:tableStyleId>
+              </a:tblPr>
+              <a:tblGrid>
+                <a:gridCol w="6096000">
+                  <a:extLst>
+                    <a:ext uri="{9D8B030D-6E8A-4147-A177-3AD203B41FA5}">
+                      <a16:colId xmlns:a16="http://schemas.microsoft.com/office/drawing/2014/main" val="20000"/>
+                    </a:ext>
+                  </a:extLst>
+                </a:gridCol>
+                <a:gridCol w="6096000">
+                  <a:extLst>
+                    <a:ext uri="{9D8B030D-6E8A-4147-A177-3AD203B41FA5}">
+                      <a16:colId xmlns:a16="http://schemas.microsoft.com/office/drawing/2014/main" val="784827009"/>
+                    </a:ext>
+                  </a:extLst>
+                </a:gridCol>
+              </a:tblGrid>
+              <a:tr h="207593">
+                <a:tc gridSpan="2">
+                  <a:txBody>
+                    <a:bodyPr/>
+                    <a:lstStyle/>
+                    <a:p>
+                      <a:r>
+                        <a:rPr lang="en-US" dirty="0" err="1"/>
+                        <a:t>io_uring</a:t>
+                      </a:r>
+                      <a:r>
+                        <a:rPr lang="en-US" dirty="0"/>
+                        <a:t>: registered buffers and linked requests</a:t>
+                      </a:r>
+                      <a:endParaRPr lang="ru-RU" dirty="0"/>
+                    </a:p>
+                  </a:txBody>
+                  <a:tcPr/>
+                </a:tc>
+                <a:tc hMerge="1">
+                  <a:txBody>
+                    <a:bodyPr/>
+                    <a:lstStyle/>
+                    <a:p>
+                      <a:endParaRPr lang="en-CY"/>
+                    </a:p>
+                  </a:txBody>
+                  <a:tcPr/>
+                </a:tc>
+                <a:extLst>
+                  <a:ext uri="{0D108BD9-81ED-4DB2-BD59-A6C34878D82A}">
+                    <a16:rowId xmlns:a16="http://schemas.microsoft.com/office/drawing/2014/main" val="10000"/>
+                  </a:ext>
+                </a:extLst>
+              </a:tr>
+              <a:tr h="207593">
+                <a:tc>
+                  <a:txBody>
+                    <a:bodyPr/>
+                    <a:lstStyle/>
+                    <a:p>
+                      <a:r>
+                        <a:rPr lang="en-US" dirty="0"/>
+                        <a:t>There are several sources of inefficiency when doing a </a:t>
+                      </a:r>
+                      <a:r>
+                        <a:rPr lang="en-US" dirty="0" err="1">
+                          <a:latin typeface="Menlo" panose="020B0609030804020204" pitchFamily="49" charset="0"/>
+                          <a:ea typeface="Menlo" panose="020B0609030804020204" pitchFamily="49" charset="0"/>
+                          <a:cs typeface="Menlo" panose="020B0609030804020204" pitchFamily="49" charset="0"/>
+                        </a:rPr>
+                        <a:t>pread</a:t>
+                      </a:r>
+                      <a:r>
+                        <a:rPr lang="en-US" dirty="0">
+                          <a:latin typeface="Menlo" panose="020B0609030804020204" pitchFamily="49" charset="0"/>
+                          <a:ea typeface="Menlo" panose="020B0609030804020204" pitchFamily="49" charset="0"/>
+                          <a:cs typeface="Menlo" panose="020B0609030804020204" pitchFamily="49" charset="0"/>
+                        </a:rPr>
+                        <a:t>()</a:t>
+                      </a:r>
+                      <a:r>
+                        <a:rPr lang="en-US" dirty="0"/>
+                        <a:t> or a </a:t>
+                      </a:r>
+                      <a:r>
+                        <a:rPr lang="en-US" dirty="0" err="1">
+                          <a:latin typeface="Menlo" panose="020B0609030804020204" pitchFamily="49" charset="0"/>
+                          <a:ea typeface="Menlo" panose="020B0609030804020204" pitchFamily="49" charset="0"/>
+                          <a:cs typeface="Menlo" panose="020B0609030804020204" pitchFamily="49" charset="0"/>
+                        </a:rPr>
+                        <a:t>pwrite</a:t>
+                      </a:r>
+                      <a:r>
+                        <a:rPr lang="en-US" dirty="0">
+                          <a:latin typeface="Menlo" panose="020B0609030804020204" pitchFamily="49" charset="0"/>
+                          <a:ea typeface="Menlo" panose="020B0609030804020204" pitchFamily="49" charset="0"/>
+                          <a:cs typeface="Menlo" panose="020B0609030804020204" pitchFamily="49" charset="0"/>
+                        </a:rPr>
+                        <a:t>()</a:t>
+                      </a:r>
+                      <a:r>
+                        <a:rPr lang="en-US" dirty="0"/>
+                        <a:t>:</a:t>
+                      </a:r>
+                    </a:p>
+                    <a:p>
+                      <a:endParaRPr lang="en-US" dirty="0"/>
+                    </a:p>
+                    <a:p>
+                      <a:pPr marL="342900" indent="-342900">
+                        <a:buFont typeface="+mj-lt"/>
+                        <a:buAutoNum type="arabicPeriod"/>
+                      </a:pPr>
+                      <a:r>
+                        <a:rPr lang="en-US" dirty="0"/>
+                        <a:t>When the IO is buffered, the kernel needs to copy data between application buffers and the </a:t>
+                      </a:r>
+                      <a:r>
+                        <a:rPr lang="en-US" dirty="0" err="1"/>
+                        <a:t>pagecache</a:t>
+                      </a:r>
+                      <a:r>
+                        <a:rPr lang="en-US" dirty="0"/>
+                        <a:t>.</a:t>
+                      </a:r>
+                    </a:p>
+                    <a:p>
+                      <a:pPr marL="342900" indent="-342900">
+                        <a:buFont typeface="+mj-lt"/>
+                        <a:buAutoNum type="arabicPeriod"/>
+                      </a:pPr>
+                      <a:endParaRPr lang="en-US" dirty="0"/>
+                    </a:p>
+                    <a:p>
+                      <a:pPr marL="342900" indent="-342900">
+                        <a:buFont typeface="+mj-lt"/>
+                        <a:buAutoNum type="arabicPeriod"/>
+                      </a:pPr>
+                      <a:r>
+                        <a:rPr lang="en-US" dirty="0" err="1"/>
+                        <a:t>iovec</a:t>
+                      </a:r>
+                      <a:r>
+                        <a:rPr lang="en-US" dirty="0"/>
+                        <a:t> needs to be copied into the kernel,</a:t>
+                      </a:r>
+                    </a:p>
+                    <a:p>
+                      <a:pPr marL="342900" lvl="0" indent="-342900">
+                        <a:buFont typeface="+mj-lt"/>
+                        <a:buAutoNum type="arabicPeriod"/>
+                      </a:pPr>
+                      <a:endParaRPr lang="en-US" dirty="0"/>
+                    </a:p>
+                    <a:p>
+                      <a:pPr marL="342900" lvl="0" indent="-342900">
+                        <a:buFont typeface="+mj-lt"/>
+                        <a:buAutoNum type="arabicPeriod"/>
+                      </a:pPr>
+                      <a:r>
+                        <a:rPr lang="en-US" dirty="0"/>
+                        <a:t>When </a:t>
+                      </a:r>
+                      <a:r>
+                        <a:rPr lang="en-US" dirty="0">
+                          <a:latin typeface="Menlo" panose="020B0609030804020204" pitchFamily="49" charset="0"/>
+                          <a:ea typeface="Menlo" panose="020B0609030804020204" pitchFamily="49" charset="0"/>
+                          <a:cs typeface="Menlo" panose="020B0609030804020204" pitchFamily="49" charset="0"/>
+                        </a:rPr>
+                        <a:t>O_DIRECT</a:t>
+                      </a:r>
+                      <a:r>
+                        <a:rPr lang="en-US" dirty="0"/>
+                        <a:t> is in effect,</a:t>
+                      </a:r>
+                    </a:p>
+                    <a:p>
+                      <a:pPr marL="800100" lvl="1" indent="-342900">
+                        <a:buFont typeface="+mj-lt"/>
+                        <a:buAutoNum type="alphaLcPeriod"/>
+                      </a:pPr>
+                      <a:r>
+                        <a:rPr lang="en-US" dirty="0"/>
+                        <a:t>user pages need to pinned into memory,</a:t>
+                      </a:r>
+                    </a:p>
+                    <a:p>
+                      <a:pPr marL="800100" lvl="1" indent="-342900">
+                        <a:buFont typeface="+mj-lt"/>
+                        <a:buAutoNum type="alphaLcPeriod"/>
+                      </a:pPr>
+                      <a:r>
+                        <a:rPr lang="en-US" dirty="0"/>
+                        <a:t>prepare the </a:t>
+                      </a:r>
+                      <a:r>
+                        <a:rPr lang="en-US" dirty="0" err="1"/>
+                        <a:t>biovec</a:t>
+                      </a:r>
+                      <a:r>
+                        <a:rPr lang="en-US" dirty="0"/>
+                        <a:t> for issuing a request to the block devices,</a:t>
+                      </a:r>
+                    </a:p>
+                    <a:p>
+                      <a:pPr marL="800100" lvl="1" indent="-342900">
+                        <a:buFont typeface="+mj-lt"/>
+                        <a:buAutoNum type="alphaLcPeriod"/>
+                      </a:pPr>
+                      <a:r>
+                        <a:rPr lang="en-US" dirty="0"/>
+                        <a:t>do the IO,</a:t>
+                      </a:r>
+                    </a:p>
+                    <a:p>
+                      <a:pPr marL="800100" lvl="1" indent="-342900">
+                        <a:buFont typeface="+mj-lt"/>
+                        <a:buAutoNum type="alphaLcPeriod"/>
+                      </a:pPr>
+                      <a:r>
+                        <a:rPr lang="en-US" dirty="0"/>
+                        <a:t>free the </a:t>
+                      </a:r>
+                      <a:r>
+                        <a:rPr lang="en-US" dirty="0" err="1"/>
+                        <a:t>biovec</a:t>
+                      </a:r>
+                      <a:r>
+                        <a:rPr lang="en-US" dirty="0"/>
+                        <a:t>,</a:t>
+                      </a:r>
+                    </a:p>
+                    <a:p>
+                      <a:pPr marL="800100" lvl="1" indent="-342900">
+                        <a:buFont typeface="+mj-lt"/>
+                        <a:buAutoNum type="alphaLcPeriod"/>
+                      </a:pPr>
+                      <a:r>
+                        <a:rPr lang="en-US" dirty="0"/>
+                        <a:t>unpin user pages.</a:t>
+                      </a:r>
+                      <a:endParaRPr lang="ru-RU" dirty="0"/>
+                    </a:p>
+                  </a:txBody>
+                  <a:tcPr/>
+                </a:tc>
+                <a:tc>
+                  <a:txBody>
+                    <a:bodyPr/>
+                    <a:lstStyle/>
+                    <a:p>
+                      <a:pPr marL="342900" indent="-342900">
+                        <a:buFont typeface="+mj-lt"/>
+                        <a:buAutoNum type="arabicPeriod"/>
+                      </a:pPr>
+                      <a:endParaRPr lang="en-US" dirty="0"/>
+                    </a:p>
+                    <a:p>
+                      <a:pPr marL="342900" indent="-342900">
+                        <a:buFont typeface="+mj-lt"/>
+                        <a:buAutoNum type="arabicPeriod"/>
+                      </a:pPr>
+                      <a:endParaRPr lang="en-US" dirty="0"/>
+                    </a:p>
+                    <a:p>
+                      <a:pPr marL="342900" indent="-342900">
+                        <a:buFont typeface="+mj-lt"/>
+                        <a:buAutoNum type="arabicPeriod"/>
+                      </a:pPr>
+                      <a:endParaRPr lang="en-US" dirty="0"/>
+                    </a:p>
+                    <a:p>
+                      <a:pPr marL="342900" indent="-342900">
+                        <a:buFont typeface="Arial" panose="020B0604020202020204" pitchFamily="34" charset="0"/>
+                        <a:buChar char="•"/>
+                      </a:pPr>
+                      <a:r>
+                        <a:rPr lang="en-US" dirty="0">
+                          <a:latin typeface="Menlo" panose="020B0609030804020204" pitchFamily="49" charset="0"/>
+                          <a:ea typeface="Menlo" panose="020B0609030804020204" pitchFamily="49" charset="0"/>
+                          <a:cs typeface="Menlo" panose="020B0609030804020204" pitchFamily="49" charset="0"/>
+                        </a:rPr>
+                        <a:t>O_DIRECT</a:t>
+                      </a:r>
+                    </a:p>
+                    <a:p>
+                      <a:pPr marL="342900" indent="-342900">
+                        <a:buFont typeface="Arial" panose="020B0604020202020204" pitchFamily="34" charset="0"/>
+                        <a:buChar char="•"/>
+                      </a:pPr>
+                      <a:endParaRPr lang="en-US" dirty="0"/>
+                    </a:p>
+                    <a:p>
+                      <a:pPr marL="342900" indent="-342900">
+                        <a:buFont typeface="Arial" panose="020B0604020202020204" pitchFamily="34" charset="0"/>
+                        <a:buChar char="•"/>
+                      </a:pPr>
+                      <a:endParaRPr lang="en-US" dirty="0"/>
+                    </a:p>
+                    <a:p>
+                      <a:pPr marL="342900" indent="-342900">
+                        <a:buFont typeface="Arial" panose="020B0604020202020204" pitchFamily="34" charset="0"/>
+                        <a:buChar char="•"/>
+                      </a:pPr>
+                      <a:endParaRPr lang="en-US" dirty="0"/>
+                    </a:p>
+                    <a:p>
+                      <a:pPr marL="342900" indent="-342900">
+                        <a:buFont typeface="Arial" panose="020B0604020202020204" pitchFamily="34" charset="0"/>
+                        <a:buChar char="•"/>
+                      </a:pPr>
+                      <a:endParaRPr lang="en-US" dirty="0"/>
+                    </a:p>
+                    <a:p>
+                      <a:pPr marL="342900" indent="-342900">
+                        <a:buFont typeface="Arial" panose="020B0604020202020204" pitchFamily="34" charset="0"/>
+                        <a:buChar char="•"/>
+                      </a:pPr>
+                      <a:endParaRPr lang="en-US" dirty="0"/>
+                    </a:p>
+                    <a:p>
+                      <a:pPr marL="285750" indent="-285750">
+                        <a:buFont typeface="Arial" panose="020B0604020202020204" pitchFamily="34" charset="0"/>
+                        <a:buChar char="•"/>
+                      </a:pPr>
+                      <a:r>
+                        <a:rPr lang="en-US" dirty="0" err="1">
+                          <a:sym typeface="Wingdings" pitchFamily="2" charset="2"/>
+                        </a:rPr>
+                        <a:t>Io_uring</a:t>
+                      </a:r>
+                      <a:r>
+                        <a:rPr lang="en-US" dirty="0">
+                          <a:sym typeface="Wingdings" pitchFamily="2" charset="2"/>
+                        </a:rPr>
+                        <a:t> supports </a:t>
+                      </a:r>
+                      <a:r>
+                        <a:rPr lang="en-US" b="1" dirty="0">
+                          <a:sym typeface="Wingdings" pitchFamily="2" charset="2"/>
+                        </a:rPr>
+                        <a:t>registered buffers</a:t>
+                      </a:r>
+                      <a:r>
+                        <a:rPr lang="en-US" dirty="0">
+                          <a:sym typeface="Wingdings" pitchFamily="2" charset="2"/>
+                        </a:rPr>
+                        <a:t>. The setup (pinning user pages and constructing a </a:t>
+                      </a:r>
+                      <a:r>
+                        <a:rPr lang="en-US" dirty="0" err="1">
+                          <a:sym typeface="Wingdings" pitchFamily="2" charset="2"/>
+                        </a:rPr>
+                        <a:t>biovec</a:t>
+                      </a:r>
+                      <a:r>
+                        <a:rPr lang="en-US" dirty="0">
+                          <a:sym typeface="Wingdings" pitchFamily="2" charset="2"/>
+                        </a:rPr>
+                        <a:t>) happens only once.</a:t>
+                      </a:r>
+                      <a:endParaRPr lang="en-US" dirty="0"/>
+                    </a:p>
+                  </a:txBody>
+                  <a:tcPr/>
+                </a:tc>
+                <a:extLst>
+                  <a:ext uri="{0D108BD9-81ED-4DB2-BD59-A6C34878D82A}">
+                    <a16:rowId xmlns:a16="http://schemas.microsoft.com/office/drawing/2014/main" val="10001"/>
+                  </a:ext>
+                </a:extLst>
+              </a:tr>
+            </a:tbl>
+          </a:graphicData>
+        </a:graphic>
+      </p:graphicFrame>
+    </p:spTree>
+    <p:extLst>
+      <p:ext uri="{BB962C8B-B14F-4D97-AF65-F5344CB8AC3E}">
+        <p14:creationId xmlns:p14="http://schemas.microsoft.com/office/powerpoint/2010/main" val="1251791030"/>
+      </p:ext>
+    </p:extLst>
+  </p:cSld>
+  <p:clrMapOvr>
+    <a:masterClrMapping/>
+  </p:clrMapOvr>
+</p:sld>
+</file>
+
+<file path=ppt/slides/slide48.xml><?xml version="1.0" encoding="utf-8"?>
+<p:sld xmlns:a="http://schemas.openxmlformats.org/drawingml/2006/main" xmlns:r="http://schemas.openxmlformats.org/officeDocument/2006/relationships" xmlns:p="http://schemas.openxmlformats.org/presentationml/2006/main">
+  <p:cSld>
+    <p:spTree>
+      <p:nvGrpSpPr>
+        <p:cNvPr id="1" name="">
+          <a:extLst>
+            <a:ext uri="{FF2B5EF4-FFF2-40B4-BE49-F238E27FC236}">
+              <a16:creationId xmlns:a16="http://schemas.microsoft.com/office/drawing/2014/main" id="{66C5234C-D1BE-1791-58B3-6F3C571B10AA}"/>
+            </a:ext>
+          </a:extLst>
+        </p:cNvPr>
+        <p:cNvGrpSpPr/>
+        <p:nvPr/>
+      </p:nvGrpSpPr>
+      <p:grpSpPr>
+        <a:xfrm>
+          <a:off x="0" y="0"/>
+          <a:ext cx="0" cy="0"/>
+          <a:chOff x="0" y="0"/>
+          <a:chExt cx="0" cy="0"/>
+        </a:xfrm>
+      </p:grpSpPr>
+      <p:graphicFrame>
+        <p:nvGraphicFramePr>
+          <p:cNvPr id="5" name="Table 4">
+            <a:extLst>
+              <a:ext uri="{FF2B5EF4-FFF2-40B4-BE49-F238E27FC236}">
+                <a16:creationId xmlns:a16="http://schemas.microsoft.com/office/drawing/2014/main" id="{538AC347-9FC7-7B46-540B-6AE8CEBCC78A}"/>
+              </a:ext>
+            </a:extLst>
+          </p:cNvPr>
+          <p:cNvGraphicFramePr>
+            <a:graphicFrameLocks noGrp="1"/>
+          </p:cNvGraphicFramePr>
+          <p:nvPr/>
+        </p:nvGraphicFramePr>
+        <p:xfrm>
+          <a:off x="0" y="1"/>
+          <a:ext cx="12192000" cy="365760"/>
+        </p:xfrm>
+        <a:graphic>
+          <a:graphicData uri="http://schemas.openxmlformats.org/drawingml/2006/table">
+            <a:tbl>
+              <a:tblPr firstRow="1" bandRow="1">
+                <a:tableStyleId>{5C22544A-7EE6-4342-B048-85BDC9FD1C3A}</a:tableStyleId>
+              </a:tblPr>
+              <a:tblGrid>
+                <a:gridCol w="12192000">
+                  <a:extLst>
+                    <a:ext uri="{9D8B030D-6E8A-4147-A177-3AD203B41FA5}">
+                      <a16:colId xmlns:a16="http://schemas.microsoft.com/office/drawing/2014/main" val="20000"/>
+                    </a:ext>
+                  </a:extLst>
+                </a:gridCol>
+              </a:tblGrid>
+              <a:tr h="321276">
+                <a:tc>
+                  <a:txBody>
+                    <a:bodyPr/>
+                    <a:lstStyle/>
+                    <a:p>
+                      <a:r>
+                        <a:rPr lang="en-US" sz="1800" dirty="0"/>
+                        <a:t>The basics of file systems</a:t>
+                      </a:r>
+                      <a:endParaRPr lang="ru-RU" dirty="0"/>
+                    </a:p>
+                  </a:txBody>
+                  <a:tcPr/>
+                </a:tc>
+                <a:extLst>
+                  <a:ext uri="{0D108BD9-81ED-4DB2-BD59-A6C34878D82A}">
+                    <a16:rowId xmlns:a16="http://schemas.microsoft.com/office/drawing/2014/main" val="10000"/>
+                  </a:ext>
+                </a:extLst>
+              </a:tr>
+            </a:tbl>
+          </a:graphicData>
+        </a:graphic>
+      </p:graphicFrame>
+      <p:graphicFrame>
+        <p:nvGraphicFramePr>
+          <p:cNvPr id="6" name="Table 5">
+            <a:extLst>
+              <a:ext uri="{FF2B5EF4-FFF2-40B4-BE49-F238E27FC236}">
+                <a16:creationId xmlns:a16="http://schemas.microsoft.com/office/drawing/2014/main" id="{CC9E7FB3-5634-7443-E72E-0F694D4948B4}"/>
+              </a:ext>
+            </a:extLst>
+          </p:cNvPr>
+          <p:cNvGraphicFramePr>
+            <a:graphicFrameLocks noGrp="1"/>
+          </p:cNvGraphicFramePr>
+          <p:nvPr/>
+        </p:nvGraphicFramePr>
+        <p:xfrm>
+          <a:off x="0" y="6532604"/>
+          <a:ext cx="12192000" cy="365760"/>
+        </p:xfrm>
+        <a:graphic>
+          <a:graphicData uri="http://schemas.openxmlformats.org/drawingml/2006/table">
+            <a:tbl>
+              <a:tblPr firstRow="1" bandRow="1">
+                <a:tableStyleId>{5C22544A-7EE6-4342-B048-85BDC9FD1C3A}</a:tableStyleId>
+              </a:tblPr>
+              <a:tblGrid>
+                <a:gridCol w="12192000">
+                  <a:extLst>
+                    <a:ext uri="{9D8B030D-6E8A-4147-A177-3AD203B41FA5}">
+                      <a16:colId xmlns:a16="http://schemas.microsoft.com/office/drawing/2014/main" val="20000"/>
+                    </a:ext>
+                  </a:extLst>
+                </a:gridCol>
+              </a:tblGrid>
+              <a:tr h="308094">
+                <a:tc>
+                  <a:txBody>
+                    <a:bodyPr/>
+                    <a:lstStyle/>
+                    <a:p>
+                      <a:endParaRPr lang="ru-RU" dirty="0"/>
+                    </a:p>
+                  </a:txBody>
+                  <a:tcPr/>
+                </a:tc>
+                <a:extLst>
+                  <a:ext uri="{0D108BD9-81ED-4DB2-BD59-A6C34878D82A}">
+                    <a16:rowId xmlns:a16="http://schemas.microsoft.com/office/drawing/2014/main" val="10000"/>
+                  </a:ext>
+                </a:extLst>
+              </a:tr>
+            </a:tbl>
+          </a:graphicData>
+        </a:graphic>
+      </p:graphicFrame>
+      <p:graphicFrame>
+        <p:nvGraphicFramePr>
+          <p:cNvPr id="2" name="Table 1">
+            <a:extLst>
+              <a:ext uri="{FF2B5EF4-FFF2-40B4-BE49-F238E27FC236}">
+                <a16:creationId xmlns:a16="http://schemas.microsoft.com/office/drawing/2014/main" id="{D48A7F6B-B289-A9C6-68F1-091C902BDD88}"/>
+              </a:ext>
+            </a:extLst>
+          </p:cNvPr>
+          <p:cNvGraphicFramePr>
+            <a:graphicFrameLocks noGrp="1"/>
+          </p:cNvGraphicFramePr>
+          <p:nvPr>
+            <p:extLst>
+              <p:ext uri="{D42A27DB-BD31-4B8C-83A1-F6EECF244321}">
+                <p14:modId xmlns:p14="http://schemas.microsoft.com/office/powerpoint/2010/main" val="1466006191"/>
+              </p:ext>
+            </p:extLst>
+          </p:nvPr>
+        </p:nvGraphicFramePr>
+        <p:xfrm>
+          <a:off x="0" y="365762"/>
+          <a:ext cx="12192000" cy="2468880"/>
+        </p:xfrm>
+        <a:graphic>
+          <a:graphicData uri="http://schemas.openxmlformats.org/drawingml/2006/table">
+            <a:tbl>
+              <a:tblPr firstRow="1" bandRow="1">
+                <a:tableStyleId>{3B4B98B0-60AC-42C2-AFA5-B58CD77FA1E5}</a:tableStyleId>
+              </a:tblPr>
+              <a:tblGrid>
+                <a:gridCol w="12192000">
+                  <a:extLst>
+                    <a:ext uri="{9D8B030D-6E8A-4147-A177-3AD203B41FA5}">
+                      <a16:colId xmlns:a16="http://schemas.microsoft.com/office/drawing/2014/main" val="20000"/>
+                    </a:ext>
+                  </a:extLst>
+                </a:gridCol>
+              </a:tblGrid>
+              <a:tr h="207593">
+                <a:tc>
+                  <a:txBody>
+                    <a:bodyPr/>
+                    <a:lstStyle/>
+                    <a:p>
+                      <a:r>
+                        <a:rPr lang="en-US" dirty="0" err="1"/>
+                        <a:t>io_uring</a:t>
+                      </a:r>
+                      <a:r>
+                        <a:rPr lang="en-US" dirty="0"/>
+                        <a:t>: registered buffers and linked requests</a:t>
+                      </a:r>
+                      <a:endParaRPr lang="ru-RU" dirty="0"/>
+                    </a:p>
+                  </a:txBody>
+                  <a:tcPr/>
+                </a:tc>
+                <a:extLst>
+                  <a:ext uri="{0D108BD9-81ED-4DB2-BD59-A6C34878D82A}">
+                    <a16:rowId xmlns:a16="http://schemas.microsoft.com/office/drawing/2014/main" val="10000"/>
+                  </a:ext>
+                </a:extLst>
+              </a:tr>
+              <a:tr h="207593">
+                <a:tc>
+                  <a:txBody>
+                    <a:bodyPr/>
+                    <a:lstStyle/>
+                    <a:p>
+                      <a:pPr marL="0" indent="0">
+                        <a:buFontTx/>
+                        <a:buNone/>
+                      </a:pPr>
+                      <a:r>
+                        <a:rPr lang="en-US" dirty="0" err="1">
+                          <a:sym typeface="Wingdings" pitchFamily="2" charset="2"/>
+                        </a:rPr>
+                        <a:t>Io_uring</a:t>
+                      </a:r>
+                      <a:r>
+                        <a:rPr lang="en-US" dirty="0">
+                          <a:sym typeface="Wingdings" pitchFamily="2" charset="2"/>
+                        </a:rPr>
+                        <a:t> supports </a:t>
+                      </a:r>
+                      <a:r>
+                        <a:rPr lang="en-US" b="1" dirty="0">
+                          <a:sym typeface="Wingdings" pitchFamily="2" charset="2"/>
+                        </a:rPr>
+                        <a:t>registered buffers</a:t>
+                      </a:r>
+                      <a:r>
+                        <a:rPr lang="en-US" dirty="0">
+                          <a:sym typeface="Wingdings" pitchFamily="2" charset="2"/>
+                        </a:rPr>
+                        <a:t>. The setup (pinning user pages and constructing a </a:t>
+                      </a:r>
+                      <a:r>
+                        <a:rPr lang="en-US" dirty="0" err="1">
+                          <a:sym typeface="Wingdings" pitchFamily="2" charset="2"/>
+                        </a:rPr>
+                        <a:t>biovec</a:t>
+                      </a:r>
+                      <a:r>
+                        <a:rPr lang="en-US" dirty="0">
+                          <a:sym typeface="Wingdings" pitchFamily="2" charset="2"/>
+                        </a:rPr>
+                        <a:t>) happens only once.</a:t>
+                      </a:r>
+                      <a:endParaRPr lang="en-US" dirty="0"/>
+                    </a:p>
+                  </a:txBody>
+                  <a:tcPr/>
+                </a:tc>
+                <a:extLst>
+                  <a:ext uri="{0D108BD9-81ED-4DB2-BD59-A6C34878D82A}">
+                    <a16:rowId xmlns:a16="http://schemas.microsoft.com/office/drawing/2014/main" val="10001"/>
+                  </a:ext>
+                </a:extLst>
+              </a:tr>
+              <a:tr h="207593">
+                <a:tc>
+                  <a:txBody>
+                    <a:bodyPr/>
+                    <a:lstStyle/>
+                    <a:p>
+                      <a:pPr marL="0" indent="0">
+                        <a:buFontTx/>
+                        <a:buNone/>
+                      </a:pPr>
+                      <a:r>
+                        <a:rPr lang="en-US" dirty="0"/>
+                        <a:t>A better implementation of the home assignment:</a:t>
+                      </a:r>
+                    </a:p>
+                    <a:p>
+                      <a:pPr marL="857250" lvl="1" indent="-400050">
+                        <a:buFont typeface="+mj-lt"/>
+                        <a:buAutoNum type="alphaLcPeriod"/>
+                      </a:pPr>
+                      <a:r>
+                        <a:rPr lang="en-US" dirty="0"/>
+                        <a:t>allocate and register N buffers (N = 4 or N = 8),</a:t>
+                      </a:r>
+                    </a:p>
+                    <a:p>
+                      <a:pPr marL="857250" lvl="1" indent="-400050">
+                        <a:buFont typeface="+mj-lt"/>
+                        <a:buAutoNum type="alphaLcPeriod"/>
+                      </a:pPr>
+                      <a:r>
+                        <a:rPr lang="en-US" dirty="0"/>
+                        <a:t>start by issuing</a:t>
+                      </a:r>
+                      <a:r>
+                        <a:rPr lang="ru-RU" dirty="0"/>
+                        <a:t> </a:t>
+                      </a:r>
+                      <a:r>
+                        <a:rPr lang="en-US" dirty="0"/>
+                        <a:t>N</a:t>
+                      </a:r>
+                      <a:r>
+                        <a:rPr lang="ru-RU" dirty="0"/>
+                        <a:t> </a:t>
+                      </a:r>
+                      <a:r>
+                        <a:rPr lang="en-US" dirty="0"/>
+                        <a:t>read requests, each request being</a:t>
+                      </a:r>
+                      <a:r>
+                        <a:rPr lang="ru-RU" dirty="0"/>
+                        <a:t> </a:t>
+                      </a:r>
+                      <a:r>
+                        <a:rPr lang="en-US" dirty="0"/>
+                        <a:t>256K or</a:t>
+                      </a:r>
+                      <a:r>
+                        <a:rPr lang="ru-RU" dirty="0"/>
+                        <a:t> </a:t>
+                      </a:r>
+                      <a:r>
+                        <a:rPr lang="en-US" dirty="0"/>
+                        <a:t>512K long,</a:t>
+                      </a:r>
+                    </a:p>
+                    <a:p>
+                      <a:pPr marL="857250" lvl="1" indent="-400050">
+                        <a:buFont typeface="+mj-lt"/>
+                        <a:buAutoNum type="alphaLcPeriod"/>
+                      </a:pPr>
+                      <a:r>
+                        <a:rPr lang="en-US" dirty="0"/>
+                        <a:t>when the read</a:t>
+                      </a:r>
+                      <a:r>
+                        <a:rPr lang="ru-RU" dirty="0"/>
+                        <a:t> </a:t>
+                      </a:r>
+                      <a:r>
+                        <a:rPr lang="en-US" dirty="0"/>
+                        <a:t>#</a:t>
+                      </a:r>
+                      <a:r>
+                        <a:rPr lang="ru-RU" dirty="0"/>
+                        <a:t>0</a:t>
+                      </a:r>
+                      <a:r>
+                        <a:rPr lang="en-US" dirty="0"/>
+                        <a:t> completes</a:t>
+                      </a:r>
+                      <a:r>
+                        <a:rPr lang="ru-RU" dirty="0"/>
+                        <a:t>, </a:t>
+                      </a:r>
+                      <a:r>
+                        <a:rPr lang="en-US" dirty="0"/>
+                        <a:t>issue the write #0</a:t>
+                      </a:r>
+                      <a:r>
+                        <a:rPr lang="ru-RU" dirty="0"/>
+                        <a:t>,</a:t>
+                      </a:r>
+                    </a:p>
+                    <a:p>
+                      <a:pPr marL="857250" lvl="1" indent="-400050">
+                        <a:buFont typeface="+mj-lt"/>
+                        <a:buAutoNum type="alphaLcPeriod"/>
+                      </a:pPr>
+                      <a:r>
+                        <a:rPr lang="en-US" dirty="0"/>
+                        <a:t>when the</a:t>
+                      </a:r>
+                      <a:r>
+                        <a:rPr lang="ru-RU" dirty="0"/>
+                        <a:t> </a:t>
+                      </a:r>
+                      <a:r>
+                        <a:rPr lang="en-US" dirty="0"/>
+                        <a:t>read #</a:t>
+                      </a:r>
+                      <a:r>
+                        <a:rPr lang="ru-RU" dirty="0"/>
+                        <a:t>1</a:t>
+                      </a:r>
+                      <a:r>
+                        <a:rPr lang="en-US" dirty="0"/>
+                        <a:t> completes,</a:t>
+                      </a:r>
+                      <a:r>
+                        <a:rPr lang="ru-RU" dirty="0"/>
+                        <a:t> ….</a:t>
+                      </a:r>
+                      <a:endParaRPr lang="en-US" dirty="0"/>
+                    </a:p>
+                    <a:p>
+                      <a:pPr marL="857250" lvl="1" indent="-400050">
+                        <a:buFont typeface="+mj-lt"/>
+                        <a:buAutoNum type="alphaLcPeriod"/>
+                      </a:pPr>
+                      <a:r>
+                        <a:rPr lang="en-US" dirty="0"/>
+                        <a:t>as write requests complete and buffers become available for reuse, issue more reads.</a:t>
+                      </a:r>
+                    </a:p>
+                  </a:txBody>
+                  <a:tcPr/>
+                </a:tc>
+                <a:extLst>
+                  <a:ext uri="{0D108BD9-81ED-4DB2-BD59-A6C34878D82A}">
+                    <a16:rowId xmlns:a16="http://schemas.microsoft.com/office/drawing/2014/main" val="1799810141"/>
+                  </a:ext>
+                </a:extLst>
+              </a:tr>
+            </a:tbl>
+          </a:graphicData>
+        </a:graphic>
+      </p:graphicFrame>
+    </p:spTree>
+    <p:extLst>
+      <p:ext uri="{BB962C8B-B14F-4D97-AF65-F5344CB8AC3E}">
+        <p14:creationId xmlns:p14="http://schemas.microsoft.com/office/powerpoint/2010/main" val="1513691130"/>
+      </p:ext>
+    </p:extLst>
+  </p:cSld>
+  <p:clrMapOvr>
+    <a:masterClrMapping/>
+  </p:clrMapOvr>
+</p:sld>
+</file>
+
+<file path=ppt/slides/slide49.xml><?xml version="1.0" encoding="utf-8"?>
+<p:sld xmlns:a="http://schemas.openxmlformats.org/drawingml/2006/main" xmlns:r="http://schemas.openxmlformats.org/officeDocument/2006/relationships" xmlns:p="http://schemas.openxmlformats.org/presentationml/2006/main">
+  <p:cSld>
+    <p:spTree>
+      <p:nvGrpSpPr>
+        <p:cNvPr id="1" name="">
+          <a:extLst>
+            <a:ext uri="{FF2B5EF4-FFF2-40B4-BE49-F238E27FC236}">
+              <a16:creationId xmlns:a16="http://schemas.microsoft.com/office/drawing/2014/main" id="{35BCF222-6C39-DB4E-5E01-01BB65141DBA}"/>
+            </a:ext>
+          </a:extLst>
+        </p:cNvPr>
+        <p:cNvGrpSpPr/>
+        <p:nvPr/>
+      </p:nvGrpSpPr>
+      <p:grpSpPr>
+        <a:xfrm>
+          <a:off x="0" y="0"/>
+          <a:ext cx="0" cy="0"/>
+          <a:chOff x="0" y="0"/>
+          <a:chExt cx="0" cy="0"/>
+        </a:xfrm>
+      </p:grpSpPr>
+      <p:graphicFrame>
+        <p:nvGraphicFramePr>
+          <p:cNvPr id="5" name="Table 4">
+            <a:extLst>
+              <a:ext uri="{FF2B5EF4-FFF2-40B4-BE49-F238E27FC236}">
+                <a16:creationId xmlns:a16="http://schemas.microsoft.com/office/drawing/2014/main" id="{99D90C16-AB86-CE8F-8EA2-73DFA34B0054}"/>
+              </a:ext>
+            </a:extLst>
+          </p:cNvPr>
+          <p:cNvGraphicFramePr>
+            <a:graphicFrameLocks noGrp="1"/>
+          </p:cNvGraphicFramePr>
+          <p:nvPr/>
+        </p:nvGraphicFramePr>
+        <p:xfrm>
+          <a:off x="0" y="1"/>
+          <a:ext cx="12192000" cy="365760"/>
+        </p:xfrm>
+        <a:graphic>
+          <a:graphicData uri="http://schemas.openxmlformats.org/drawingml/2006/table">
+            <a:tbl>
+              <a:tblPr firstRow="1" bandRow="1">
+                <a:tableStyleId>{5C22544A-7EE6-4342-B048-85BDC9FD1C3A}</a:tableStyleId>
+              </a:tblPr>
+              <a:tblGrid>
+                <a:gridCol w="12192000">
+                  <a:extLst>
+                    <a:ext uri="{9D8B030D-6E8A-4147-A177-3AD203B41FA5}">
+                      <a16:colId xmlns:a16="http://schemas.microsoft.com/office/drawing/2014/main" val="20000"/>
+                    </a:ext>
+                  </a:extLst>
+                </a:gridCol>
+              </a:tblGrid>
+              <a:tr h="321276">
+                <a:tc>
+                  <a:txBody>
+                    <a:bodyPr/>
+                    <a:lstStyle/>
+                    <a:p>
+                      <a:r>
+                        <a:rPr lang="en-US" sz="1800" dirty="0"/>
+                        <a:t>The basics of file systems</a:t>
+                      </a:r>
+                      <a:endParaRPr lang="ru-RU" dirty="0"/>
+                    </a:p>
+                  </a:txBody>
+                  <a:tcPr/>
+                </a:tc>
+                <a:extLst>
+                  <a:ext uri="{0D108BD9-81ED-4DB2-BD59-A6C34878D82A}">
+                    <a16:rowId xmlns:a16="http://schemas.microsoft.com/office/drawing/2014/main" val="10000"/>
+                  </a:ext>
+                </a:extLst>
+              </a:tr>
+            </a:tbl>
+          </a:graphicData>
+        </a:graphic>
+      </p:graphicFrame>
+      <p:graphicFrame>
+        <p:nvGraphicFramePr>
+          <p:cNvPr id="6" name="Table 5">
+            <a:extLst>
+              <a:ext uri="{FF2B5EF4-FFF2-40B4-BE49-F238E27FC236}">
+                <a16:creationId xmlns:a16="http://schemas.microsoft.com/office/drawing/2014/main" id="{D24C0BE7-AABC-AE91-5746-CCBDBF8AA80F}"/>
+              </a:ext>
+            </a:extLst>
+          </p:cNvPr>
+          <p:cNvGraphicFramePr>
+            <a:graphicFrameLocks noGrp="1"/>
+          </p:cNvGraphicFramePr>
+          <p:nvPr/>
+        </p:nvGraphicFramePr>
+        <p:xfrm>
+          <a:off x="0" y="6532604"/>
+          <a:ext cx="12192000" cy="365760"/>
+        </p:xfrm>
+        <a:graphic>
+          <a:graphicData uri="http://schemas.openxmlformats.org/drawingml/2006/table">
+            <a:tbl>
+              <a:tblPr firstRow="1" bandRow="1">
+                <a:tableStyleId>{5C22544A-7EE6-4342-B048-85BDC9FD1C3A}</a:tableStyleId>
+              </a:tblPr>
+              <a:tblGrid>
+                <a:gridCol w="12192000">
+                  <a:extLst>
+                    <a:ext uri="{9D8B030D-6E8A-4147-A177-3AD203B41FA5}">
+                      <a16:colId xmlns:a16="http://schemas.microsoft.com/office/drawing/2014/main" val="20000"/>
+                    </a:ext>
+                  </a:extLst>
+                </a:gridCol>
+              </a:tblGrid>
+              <a:tr h="308094">
+                <a:tc>
+                  <a:txBody>
+                    <a:bodyPr/>
+                    <a:lstStyle/>
+                    <a:p>
+                      <a:endParaRPr lang="ru-RU" dirty="0"/>
+                    </a:p>
+                  </a:txBody>
+                  <a:tcPr/>
+                </a:tc>
+                <a:extLst>
+                  <a:ext uri="{0D108BD9-81ED-4DB2-BD59-A6C34878D82A}">
+                    <a16:rowId xmlns:a16="http://schemas.microsoft.com/office/drawing/2014/main" val="10000"/>
+                  </a:ext>
+                </a:extLst>
+              </a:tr>
+            </a:tbl>
+          </a:graphicData>
+        </a:graphic>
+      </p:graphicFrame>
+      <p:graphicFrame>
+        <p:nvGraphicFramePr>
+          <p:cNvPr id="2" name="Table 1">
+            <a:extLst>
+              <a:ext uri="{FF2B5EF4-FFF2-40B4-BE49-F238E27FC236}">
+                <a16:creationId xmlns:a16="http://schemas.microsoft.com/office/drawing/2014/main" id="{751F61F5-48B4-7F38-75AA-306762F31255}"/>
+              </a:ext>
+            </a:extLst>
+          </p:cNvPr>
+          <p:cNvGraphicFramePr>
+            <a:graphicFrameLocks noGrp="1"/>
+          </p:cNvGraphicFramePr>
+          <p:nvPr>
+            <p:extLst>
+              <p:ext uri="{D42A27DB-BD31-4B8C-83A1-F6EECF244321}">
+                <p14:modId xmlns:p14="http://schemas.microsoft.com/office/powerpoint/2010/main" val="4171304656"/>
+              </p:ext>
+            </p:extLst>
+          </p:nvPr>
+        </p:nvGraphicFramePr>
+        <p:xfrm>
+          <a:off x="0" y="365762"/>
+          <a:ext cx="12192000" cy="5029200"/>
+        </p:xfrm>
+        <a:graphic>
+          <a:graphicData uri="http://schemas.openxmlformats.org/drawingml/2006/table">
+            <a:tbl>
+              <a:tblPr firstRow="1" bandRow="1">
+                <a:tableStyleId>{3B4B98B0-60AC-42C2-AFA5-B58CD77FA1E5}</a:tableStyleId>
+              </a:tblPr>
+              <a:tblGrid>
+                <a:gridCol w="12192000">
+                  <a:extLst>
+                    <a:ext uri="{9D8B030D-6E8A-4147-A177-3AD203B41FA5}">
+                      <a16:colId xmlns:a16="http://schemas.microsoft.com/office/drawing/2014/main" val="20000"/>
+                    </a:ext>
+                  </a:extLst>
+                </a:gridCol>
+              </a:tblGrid>
+              <a:tr h="207593">
+                <a:tc>
+                  <a:txBody>
+                    <a:bodyPr/>
+                    <a:lstStyle/>
+                    <a:p>
+                      <a:r>
+                        <a:rPr lang="en-US" dirty="0" err="1"/>
+                        <a:t>io_uring</a:t>
+                      </a:r>
+                      <a:r>
+                        <a:rPr lang="en-US" dirty="0"/>
+                        <a:t>: registered buffers and linked requests</a:t>
+                      </a:r>
+                      <a:endParaRPr lang="ru-RU" dirty="0"/>
+                    </a:p>
+                  </a:txBody>
+                  <a:tcPr/>
+                </a:tc>
+                <a:extLst>
+                  <a:ext uri="{0D108BD9-81ED-4DB2-BD59-A6C34878D82A}">
+                    <a16:rowId xmlns:a16="http://schemas.microsoft.com/office/drawing/2014/main" val="10000"/>
+                  </a:ext>
+                </a:extLst>
+              </a:tr>
+              <a:tr h="207593">
+                <a:tc>
+                  <a:txBody>
+                    <a:bodyPr/>
+                    <a:lstStyle/>
+                    <a:p>
+                      <a:pPr marL="0" indent="0">
+                        <a:buFontTx/>
+                        <a:buNone/>
+                      </a:pPr>
+                      <a:r>
+                        <a:rPr lang="en-US" dirty="0" err="1">
+                          <a:sym typeface="Wingdings" pitchFamily="2" charset="2"/>
+                        </a:rPr>
+                        <a:t>Io_uring</a:t>
+                      </a:r>
+                      <a:r>
+                        <a:rPr lang="en-US" dirty="0">
+                          <a:sym typeface="Wingdings" pitchFamily="2" charset="2"/>
+                        </a:rPr>
+                        <a:t> supports </a:t>
+                      </a:r>
+                      <a:r>
+                        <a:rPr lang="en-US" b="1" dirty="0">
+                          <a:sym typeface="Wingdings" pitchFamily="2" charset="2"/>
+                        </a:rPr>
+                        <a:t>registered buffers</a:t>
+                      </a:r>
+                      <a:r>
+                        <a:rPr lang="en-US" dirty="0">
+                          <a:sym typeface="Wingdings" pitchFamily="2" charset="2"/>
+                        </a:rPr>
+                        <a:t>. The setup (pinning user pages and constructing a </a:t>
+                      </a:r>
+                      <a:r>
+                        <a:rPr lang="en-US" dirty="0" err="1">
+                          <a:sym typeface="Wingdings" pitchFamily="2" charset="2"/>
+                        </a:rPr>
+                        <a:t>biovec</a:t>
+                      </a:r>
+                      <a:r>
+                        <a:rPr lang="en-US" dirty="0">
+                          <a:sym typeface="Wingdings" pitchFamily="2" charset="2"/>
+                        </a:rPr>
+                        <a:t>) happens only once.</a:t>
+                      </a:r>
+                      <a:endParaRPr lang="en-US" dirty="0"/>
+                    </a:p>
+                  </a:txBody>
+                  <a:tcPr/>
+                </a:tc>
+                <a:extLst>
+                  <a:ext uri="{0D108BD9-81ED-4DB2-BD59-A6C34878D82A}">
+                    <a16:rowId xmlns:a16="http://schemas.microsoft.com/office/drawing/2014/main" val="10001"/>
+                  </a:ext>
+                </a:extLst>
+              </a:tr>
+              <a:tr h="207593">
+                <a:tc>
+                  <a:txBody>
+                    <a:bodyPr/>
+                    <a:lstStyle/>
+                    <a:p>
+                      <a:pPr marL="0" indent="0">
+                        <a:buFontTx/>
+                        <a:buNone/>
+                      </a:pPr>
+                      <a:r>
+                        <a:rPr lang="en-US" dirty="0"/>
+                        <a:t>A better implementation of the home assignment:</a:t>
+                      </a:r>
+                    </a:p>
+                    <a:p>
+                      <a:pPr marL="857250" lvl="1" indent="-400050">
+                        <a:buFont typeface="+mj-lt"/>
+                        <a:buAutoNum type="alphaLcPeriod"/>
+                      </a:pPr>
+                      <a:r>
+                        <a:rPr lang="en-US" dirty="0"/>
+                        <a:t>allocate and register N buffers (N = 4 or N = 8),</a:t>
+                      </a:r>
+                    </a:p>
+                    <a:p>
+                      <a:pPr marL="857250" lvl="1" indent="-400050">
+                        <a:buFont typeface="+mj-lt"/>
+                        <a:buAutoNum type="alphaLcPeriod"/>
+                      </a:pPr>
+                      <a:r>
+                        <a:rPr lang="en-US" dirty="0"/>
+                        <a:t>start by issuing</a:t>
+                      </a:r>
+                      <a:r>
+                        <a:rPr lang="ru-RU" dirty="0"/>
+                        <a:t> </a:t>
+                      </a:r>
+                      <a:r>
+                        <a:rPr lang="en-US" dirty="0"/>
+                        <a:t>N</a:t>
+                      </a:r>
+                      <a:r>
+                        <a:rPr lang="ru-RU" dirty="0"/>
+                        <a:t> </a:t>
+                      </a:r>
+                      <a:r>
+                        <a:rPr lang="en-US" dirty="0"/>
+                        <a:t>read requests, each request being</a:t>
+                      </a:r>
+                      <a:r>
+                        <a:rPr lang="ru-RU" dirty="0"/>
+                        <a:t> </a:t>
+                      </a:r>
+                      <a:r>
+                        <a:rPr lang="en-US" dirty="0"/>
+                        <a:t>256K or</a:t>
+                      </a:r>
+                      <a:r>
+                        <a:rPr lang="ru-RU" dirty="0"/>
+                        <a:t> </a:t>
+                      </a:r>
+                      <a:r>
+                        <a:rPr lang="en-US" dirty="0"/>
+                        <a:t>512K long,</a:t>
+                      </a:r>
+                    </a:p>
+                    <a:p>
+                      <a:pPr marL="857250" lvl="1" indent="-400050">
+                        <a:buFont typeface="+mj-lt"/>
+                        <a:buAutoNum type="alphaLcPeriod"/>
+                      </a:pPr>
+                      <a:r>
+                        <a:rPr lang="en-US" dirty="0"/>
+                        <a:t>when the read</a:t>
+                      </a:r>
+                      <a:r>
+                        <a:rPr lang="ru-RU" dirty="0"/>
+                        <a:t> </a:t>
+                      </a:r>
+                      <a:r>
+                        <a:rPr lang="en-US" dirty="0"/>
+                        <a:t>#</a:t>
+                      </a:r>
+                      <a:r>
+                        <a:rPr lang="ru-RU" dirty="0"/>
+                        <a:t>0</a:t>
+                      </a:r>
+                      <a:r>
+                        <a:rPr lang="en-US" dirty="0"/>
+                        <a:t> completes</a:t>
+                      </a:r>
+                      <a:r>
+                        <a:rPr lang="ru-RU" dirty="0"/>
+                        <a:t>, </a:t>
+                      </a:r>
+                      <a:r>
+                        <a:rPr lang="en-US" dirty="0"/>
+                        <a:t>issue the write #0</a:t>
+                      </a:r>
+                      <a:r>
+                        <a:rPr lang="ru-RU" dirty="0"/>
+                        <a:t>,</a:t>
+                      </a:r>
+                    </a:p>
+                    <a:p>
+                      <a:pPr marL="857250" lvl="1" indent="-400050">
+                        <a:buFont typeface="+mj-lt"/>
+                        <a:buAutoNum type="alphaLcPeriod"/>
+                      </a:pPr>
+                      <a:r>
+                        <a:rPr lang="en-US" dirty="0"/>
+                        <a:t>when the</a:t>
+                      </a:r>
+                      <a:r>
+                        <a:rPr lang="ru-RU" dirty="0"/>
+                        <a:t> </a:t>
+                      </a:r>
+                      <a:r>
+                        <a:rPr lang="en-US" dirty="0"/>
+                        <a:t>read #</a:t>
+                      </a:r>
+                      <a:r>
+                        <a:rPr lang="ru-RU" dirty="0"/>
+                        <a:t>1</a:t>
+                      </a:r>
+                      <a:r>
+                        <a:rPr lang="en-US" dirty="0"/>
+                        <a:t> completes,</a:t>
+                      </a:r>
+                      <a:r>
+                        <a:rPr lang="ru-RU" dirty="0"/>
+                        <a:t> ….</a:t>
+                      </a:r>
+                      <a:endParaRPr lang="en-US" dirty="0"/>
+                    </a:p>
+                    <a:p>
+                      <a:pPr marL="857250" lvl="1" indent="-400050">
+                        <a:buFont typeface="+mj-lt"/>
+                        <a:buAutoNum type="alphaLcPeriod"/>
+                      </a:pPr>
+                      <a:r>
+                        <a:rPr lang="en-US" dirty="0"/>
+                        <a:t>as write requests complete and buffers become available for reuse, issue more reads.</a:t>
+                      </a:r>
+                    </a:p>
+                  </a:txBody>
+                  <a:tcPr/>
+                </a:tc>
+                <a:extLst>
+                  <a:ext uri="{0D108BD9-81ED-4DB2-BD59-A6C34878D82A}">
+                    <a16:rowId xmlns:a16="http://schemas.microsoft.com/office/drawing/2014/main" val="1799810141"/>
+                  </a:ext>
+                </a:extLst>
+              </a:tr>
+              <a:tr h="207593">
+                <a:tc>
+                  <a:txBody>
+                    <a:bodyPr/>
+                    <a:lstStyle/>
+                    <a:p>
+                      <a:pPr marL="0" lvl="0" indent="0">
+                        <a:buFont typeface="+mj-lt"/>
+                        <a:buNone/>
+                      </a:pPr>
+                      <a:r>
+                        <a:rPr lang="en-US" dirty="0"/>
+                        <a:t>There is a way to further reduce the overhead. One can issue a read #N and write #N with the same call to </a:t>
+                      </a:r>
+                      <a:r>
+                        <a:rPr lang="en-US" dirty="0" err="1">
+                          <a:latin typeface="Menlo" panose="020B0609030804020204" pitchFamily="49" charset="0"/>
+                          <a:ea typeface="Menlo" panose="020B0609030804020204" pitchFamily="49" charset="0"/>
+                          <a:cs typeface="Menlo" panose="020B0609030804020204" pitchFamily="49" charset="0"/>
+                        </a:rPr>
+                        <a:t>io_uring_submit</a:t>
+                      </a:r>
+                      <a:r>
+                        <a:rPr lang="en-US" dirty="0">
+                          <a:latin typeface="Menlo" panose="020B0609030804020204" pitchFamily="49" charset="0"/>
+                          <a:ea typeface="Menlo" panose="020B0609030804020204" pitchFamily="49" charset="0"/>
+                          <a:cs typeface="Menlo" panose="020B0609030804020204" pitchFamily="49" charset="0"/>
+                        </a:rPr>
+                        <a:t>()</a:t>
+                      </a:r>
+                      <a:r>
+                        <a:rPr lang="en-US" dirty="0"/>
+                        <a:t>. </a:t>
+                      </a:r>
+                      <a:r>
+                        <a:rPr lang="en-US" dirty="0" err="1"/>
+                        <a:t>Io_uring</a:t>
+                      </a:r>
+                      <a:r>
+                        <a:rPr lang="en-US" dirty="0"/>
+                        <a:t> has </a:t>
+                      </a:r>
+                      <a:r>
+                        <a:rPr lang="en-US" b="1" dirty="0"/>
+                        <a:t>linked requests</a:t>
+                      </a:r>
+                      <a:r>
+                        <a:rPr lang="en-US" dirty="0"/>
+                        <a:t>. Linked requests run sequentially.</a:t>
+                      </a:r>
+                    </a:p>
+                    <a:p>
+                      <a:pPr marL="0" lvl="0" indent="0">
+                        <a:buFont typeface="+mj-lt"/>
+                        <a:buNone/>
+                      </a:pPr>
+                      <a:endParaRPr lang="en-US" dirty="0"/>
+                    </a:p>
+                    <a:p>
+                      <a:pPr marL="0" marR="0" lvl="0" indent="0" algn="l" defTabSz="914400" rtl="0" eaLnBrk="1" fontAlgn="auto" latinLnBrk="0" hangingPunct="1">
+                        <a:lnSpc>
+                          <a:spcPct val="100000"/>
+                        </a:lnSpc>
+                        <a:spcBef>
+                          <a:spcPts val="0"/>
+                        </a:spcBef>
+                        <a:spcAft>
+                          <a:spcPts val="0"/>
+                        </a:spcAft>
+                        <a:buClrTx/>
+                        <a:buSzTx/>
+                        <a:buFont typeface="+mj-lt"/>
+                        <a:buNone/>
+                        <a:tabLst/>
+                        <a:defRPr/>
+                      </a:pPr>
+                      <a:r>
+                        <a:rPr lang="en-US" dirty="0"/>
+                        <a:t>Write an implementation of</a:t>
+                      </a:r>
+                      <a:r>
+                        <a:rPr lang="ru-RU" dirty="0"/>
+                        <a:t> </a:t>
+                      </a:r>
+                      <a:r>
+                        <a:rPr lang="en-US" dirty="0">
+                          <a:latin typeface="Consolas" panose="020B0609020204030204" pitchFamily="49" charset="0"/>
+                          <a:cs typeface="Consolas" panose="020B0609020204030204" pitchFamily="49" charset="0"/>
+                        </a:rPr>
+                        <a:t>cp</a:t>
+                      </a:r>
+                      <a:r>
+                        <a:rPr lang="en-US" dirty="0"/>
+                        <a:t> that works this way</a:t>
+                      </a:r>
+                      <a:r>
+                        <a:rPr lang="ru-RU" dirty="0"/>
+                        <a:t>:</a:t>
+                      </a:r>
+                      <a:endParaRPr lang="en-US" dirty="0"/>
+                    </a:p>
+                    <a:p>
+                      <a:pPr marL="800100" marR="0" lvl="1" indent="-342900" algn="l" defTabSz="914400" rtl="0" eaLnBrk="1" fontAlgn="auto" latinLnBrk="0" hangingPunct="1">
+                        <a:lnSpc>
+                          <a:spcPct val="100000"/>
+                        </a:lnSpc>
+                        <a:spcBef>
+                          <a:spcPts val="0"/>
+                        </a:spcBef>
+                        <a:spcAft>
+                          <a:spcPts val="0"/>
+                        </a:spcAft>
+                        <a:buClrTx/>
+                        <a:buSzTx/>
+                        <a:buFont typeface="+mj-lt"/>
+                        <a:buAutoNum type="alphaLcPeriod"/>
+                        <a:tabLst/>
+                        <a:defRPr/>
+                      </a:pPr>
+                      <a:r>
+                        <a:rPr lang="en-US" dirty="0"/>
+                        <a:t>allocate and register N buffers,</a:t>
+                      </a:r>
+                    </a:p>
+                    <a:p>
+                      <a:pPr marL="800100" marR="0" lvl="1" indent="-342900" algn="l" defTabSz="914400" rtl="0" eaLnBrk="1" fontAlgn="auto" latinLnBrk="0" hangingPunct="1">
+                        <a:lnSpc>
+                          <a:spcPct val="100000"/>
+                        </a:lnSpc>
+                        <a:spcBef>
+                          <a:spcPts val="0"/>
+                        </a:spcBef>
+                        <a:spcAft>
+                          <a:spcPts val="0"/>
+                        </a:spcAft>
+                        <a:buClrTx/>
+                        <a:buSzTx/>
+                        <a:buFont typeface="+mj-lt"/>
+                        <a:buAutoNum type="alphaLcPeriod"/>
+                        <a:tabLst/>
+                        <a:defRPr/>
+                      </a:pPr>
+                      <a:r>
+                        <a:rPr lang="en-US" dirty="0"/>
+                        <a:t>register the input and the output </a:t>
+                      </a:r>
+                      <a:r>
+                        <a:rPr lang="en-US"/>
+                        <a:t>file descriptors,</a:t>
+                      </a:r>
+                      <a:endParaRPr lang="en-US" dirty="0"/>
+                    </a:p>
+                    <a:p>
+                      <a:pPr marL="800100" marR="0" lvl="1" indent="-342900" algn="l" defTabSz="914400" rtl="0" eaLnBrk="1" fontAlgn="auto" latinLnBrk="0" hangingPunct="1">
+                        <a:lnSpc>
+                          <a:spcPct val="100000"/>
+                        </a:lnSpc>
+                        <a:spcBef>
+                          <a:spcPts val="0"/>
+                        </a:spcBef>
+                        <a:spcAft>
+                          <a:spcPts val="0"/>
+                        </a:spcAft>
+                        <a:buClrTx/>
+                        <a:buSzTx/>
+                        <a:buFont typeface="+mj-lt"/>
+                        <a:buAutoNum type="alphaLcPeriod"/>
+                        <a:tabLst/>
+                        <a:defRPr/>
+                      </a:pPr>
+                      <a:r>
+                        <a:rPr lang="en-US" dirty="0"/>
+                        <a:t>start by issuing N pairs of linked </a:t>
+                      </a:r>
+                      <a:r>
+                        <a:rPr lang="en-US" dirty="0" err="1"/>
+                        <a:t>read+write</a:t>
+                      </a:r>
+                      <a:r>
+                        <a:rPr lang="en-US" dirty="0"/>
+                        <a:t>,</a:t>
+                      </a:r>
+                    </a:p>
+                    <a:p>
+                      <a:pPr marL="800100" marR="0" lvl="1" indent="-342900" algn="l" defTabSz="914400" rtl="0" eaLnBrk="1" fontAlgn="auto" latinLnBrk="0" hangingPunct="1">
+                        <a:lnSpc>
+                          <a:spcPct val="100000"/>
+                        </a:lnSpc>
+                        <a:spcBef>
+                          <a:spcPts val="0"/>
+                        </a:spcBef>
+                        <a:spcAft>
+                          <a:spcPts val="0"/>
+                        </a:spcAft>
+                        <a:buClrTx/>
+                        <a:buSzTx/>
+                        <a:buFont typeface="+mj-lt"/>
+                        <a:buAutoNum type="alphaLcPeriod"/>
+                        <a:tabLst/>
+                        <a:defRPr/>
+                      </a:pPr>
+                      <a:r>
+                        <a:rPr lang="en-US" dirty="0"/>
+                        <a:t>when write #0 completes, issue one more linked </a:t>
+                      </a:r>
+                      <a:r>
+                        <a:rPr lang="en-US" dirty="0" err="1"/>
+                        <a:t>read+write</a:t>
+                      </a:r>
+                      <a:r>
+                        <a:rPr lang="en-US" dirty="0"/>
+                        <a:t>,</a:t>
+                      </a:r>
+                    </a:p>
+                    <a:p>
+                      <a:pPr marL="800100" marR="0" lvl="1" indent="-342900" algn="l" defTabSz="914400" rtl="0" eaLnBrk="1" fontAlgn="auto" latinLnBrk="0" hangingPunct="1">
+                        <a:lnSpc>
+                          <a:spcPct val="100000"/>
+                        </a:lnSpc>
+                        <a:spcBef>
+                          <a:spcPts val="0"/>
+                        </a:spcBef>
+                        <a:spcAft>
+                          <a:spcPts val="0"/>
+                        </a:spcAft>
+                        <a:buClrTx/>
+                        <a:buSzTx/>
+                        <a:buFont typeface="+mj-lt"/>
+                        <a:buAutoNum type="alphaLcPeriod"/>
+                        <a:tabLst/>
+                        <a:defRPr/>
+                      </a:pPr>
+                      <a:r>
+                        <a:rPr lang="en-US" dirty="0"/>
+                        <a:t>when write #1 completes, …</a:t>
+                      </a:r>
+                      <a:endParaRPr lang="ru-RU" dirty="0"/>
+                    </a:p>
+                  </a:txBody>
+                  <a:tcPr/>
+                </a:tc>
+                <a:extLst>
+                  <a:ext uri="{0D108BD9-81ED-4DB2-BD59-A6C34878D82A}">
+                    <a16:rowId xmlns:a16="http://schemas.microsoft.com/office/drawing/2014/main" val="3840712989"/>
+                  </a:ext>
+                </a:extLst>
+              </a:tr>
+            </a:tbl>
+          </a:graphicData>
+        </a:graphic>
+      </p:graphicFrame>
+    </p:spTree>
+    <p:extLst>
+      <p:ext uri="{BB962C8B-B14F-4D97-AF65-F5344CB8AC3E}">
+        <p14:creationId xmlns:p14="http://schemas.microsoft.com/office/powerpoint/2010/main" val="2636325064"/>
       </p:ext>
     </p:extLst>
   </p:cSld>
